--- a/ppt/AML-System-Walkthrough-Legal-CN.pptx
+++ b/ppt/AML-System-Walkthrough-Legal-CN.pptx
@@ -13,9 +13,10 @@
     <p:sldId id="261" r:id="rId7"/>
     <p:sldId id="262" r:id="rId8"/>
     <p:sldId id="263" r:id="rId9"/>
+    <p:sldId id="264" r:id="rId10"/>
   </p:sldIdLst>
   <p:notesMasterIdLst>
-    <p:notesMasterId r:id="rId10"/>
+    <p:notesMasterId r:id="rId11"/>
   </p:notesMasterIdLst>
   <p:sldSz cx="12191695" cy="6858000"/>
   <p:notesSz cx="6858000" cy="12191695"/>
@@ -1149,6 +1150,94 @@
             <a:fld id="{F7021451-1387-4CA6-816F-3879F97B5CBC}" type="slidenum">
               <a:rPr lang="en-US"/>
               <a:t>8</a:t>
+            </a:fld>
+            <a:endParaRPr lang="en-US"/>
+          </a:p>
+        </p:txBody>
+      </p:sp>
+    </p:spTree>
+    <p:extLst>
+      <p:ext uri="{BB962C8B-B14F-4D97-AF65-F5344CB8AC3E}">
+        <p14:creationId xmlns:p14="http://schemas.microsoft.com/office/powerpoint/2010/main" val="1024086991"/>
+      </p:ext>
+    </p:extLst>
+  </p:cSld>
+  <p:clrMapOvr>
+    <a:masterClrMapping/>
+  </p:clrMapOvr>
+</p:notes>
+</file>
+
+<file path=ppt/notesSlides/notesSlide9.xml><?xml version="1.0" encoding="utf-8"?>
+<p:notes xmlns:a="http://schemas.openxmlformats.org/drawingml/2006/main" xmlns:r="http://schemas.openxmlformats.org/officeDocument/2006/relationships" xmlns:p="http://schemas.openxmlformats.org/presentationml/2006/main">
+  <p:cSld>
+    <p:spTree>
+      <p:nvGrpSpPr>
+        <p:cNvPr id="1" name=""/>
+        <p:cNvGrpSpPr/>
+        <p:nvPr/>
+      </p:nvGrpSpPr>
+      <p:grpSpPr>
+        <a:xfrm>
+          <a:off x="0" y="0"/>
+          <a:ext cx="0" cy="0"/>
+          <a:chOff x="0" y="0"/>
+          <a:chExt cx="0" cy="0"/>
+        </a:xfrm>
+      </p:grpSpPr>
+      <p:sp>
+        <p:nvSpPr>
+          <p:cNvPr id="2" name="Slide Image Placeholder 1"/>
+          <p:cNvSpPr>
+            <a:spLocks noGrp="1" noRot="1" noChangeAspect="1"/>
+          </p:cNvSpPr>
+          <p:nvPr>
+            <p:ph type="sldImg"/>
+          </p:nvPr>
+        </p:nvSpPr>
+        <p:spPr/>
+      </p:sp>
+      <p:sp>
+        <p:nvSpPr>
+          <p:cNvPr id="3" name="Notes Placeholder 2"/>
+          <p:cNvSpPr>
+            <a:spLocks noGrp="1"/>
+          </p:cNvSpPr>
+          <p:nvPr>
+            <p:ph type="body" idx="1"/>
+          </p:nvPr>
+        </p:nvSpPr>
+        <p:spPr/>
+        <p:txBody>
+          <a:bodyPr/>
+          <a:lstStyle/>
+          <a:p>
+            <a:r>
+              <a:rPr lang="en-US" dirty="0"/>
+              <a:t/>
+            </a:r>
+            <a:endParaRPr lang="en-US" dirty="0"/>
+          </a:p>
+        </p:txBody>
+      </p:sp>
+      <p:sp>
+        <p:nvSpPr>
+          <p:cNvPr id="4" name="Slide Number Placeholder 3"/>
+          <p:cNvSpPr>
+            <a:spLocks noGrp="1"/>
+          </p:cNvSpPr>
+          <p:nvPr>
+            <p:ph type="sldNum" sz="quarter" idx="10"/>
+          </p:nvPr>
+        </p:nvSpPr>
+        <p:spPr/>
+        <p:txBody>
+          <a:bodyPr/>
+          <a:lstStyle/>
+          <a:p>
+            <a:fld id="{F7021451-1387-4CA6-816F-3879F97B5CBC}" type="slidenum">
+              <a:rPr lang="en-US"/>
+              <a:t>9</a:t>
             </a:fld>
             <a:endParaRPr lang="en-US"/>
           </a:p>
@@ -3481,7 +3570,7 @@
                 <a:ea typeface="Microsoft YaHei" pitchFamily="34" charset="-122"/>
                 <a:cs typeface="Microsoft YaHei" pitchFamily="34" charset="-120"/>
               </a:rPr>
-              <a:t>怎么发现 · 怎么运转</a:t>
+              <a:t>分级规则</a:t>
             </a:r>
             <a:endParaRPr lang="en-US" sz="1200" dirty="0"/>
           </a:p>
@@ -3520,7 +3609,7 @@
                 <a:ea typeface="Microsoft YaHei" pitchFamily="34" charset="-122"/>
                 <a:cs typeface="Microsoft YaHei" pitchFamily="34" charset="-120"/>
               </a:rPr>
-              <a:t>两个入口，一个越用越准的闭环</a:t>
+              <a:t>分级逻辑：看命中几条高精度规则</a:t>
             </a:r>
             <a:endParaRPr lang="en-US" sz="3000" dirty="0"/>
           </a:p>
@@ -3534,12 +3623,12 @@
         </p:nvSpPr>
         <p:spPr>
           <a:xfrm>
-            <a:off x="548640" y="1783080"/>
-            <a:ext cx="5440680" cy="1463040"/>
+            <a:off x="548640" y="1828800"/>
+            <a:ext cx="5074920" cy="3520440"/>
           </a:xfrm>
           <a:prstGeom prst="roundRect">
             <a:avLst>
-              <a:gd name="adj" fmla="val 7500"/>
+              <a:gd name="adj" fmla="val 3117"/>
             </a:avLst>
           </a:prstGeom>
           <a:solidFill>
@@ -3562,58 +3651,14 @@
       </p:sp>
       <p:sp>
         <p:nvSpPr>
-          <p:cNvPr id="5" name="Shape 3"/>
-          <p:cNvSpPr/>
-          <p:nvPr/>
-        </p:nvSpPr>
-        <p:spPr>
-          <a:xfrm>
-            <a:off x="804672" y="2011680"/>
-            <a:ext cx="548640" cy="548640"/>
-          </a:xfrm>
-          <a:prstGeom prst="ellipse">
-            <a:avLst/>
-          </a:prstGeom>
-          <a:solidFill>
-            <a:srgbClr val="1BA39C"/>
-          </a:solidFill>
-          <a:ln/>
-        </p:spPr>
-      </p:sp>
-      <p:pic>
-        <p:nvPicPr>
-          <p:cNvPr id="6" name="Image 0" descr="preencoded.png">    </p:cNvPr>
-          <p:cNvPicPr>
-            <a:picLocks noChangeAspect="1"/>
-          </p:cNvPicPr>
-          <p:nvPr/>
-        </p:nvPicPr>
-        <p:blipFill>
-          <a:blip r:embed="rId1"/>
-          <a:stretch>
-            <a:fillRect/>
-          </a:stretch>
-        </p:blipFill>
-        <p:spPr>
-          <a:xfrm>
-            <a:off x="914400" y="2121408"/>
-            <a:ext cx="329184" cy="329184"/>
-          </a:xfrm>
-          <a:prstGeom prst="rect">
-            <a:avLst/>
-          </a:prstGeom>
-        </p:spPr>
-      </p:pic>
-      <p:sp>
-        <p:nvSpPr>
-          <p:cNvPr id="7" name="Text 4"/>
-          <p:cNvSpPr/>
-          <p:nvPr/>
-        </p:nvSpPr>
-        <p:spPr>
-          <a:xfrm>
-            <a:off x="1508760" y="1993392"/>
-            <a:ext cx="4297680" cy="548640"/>
+          <p:cNvPr id="5" name="Text 3"/>
+          <p:cNvSpPr/>
+          <p:nvPr/>
+        </p:nvSpPr>
+        <p:spPr>
+          <a:xfrm>
+            <a:off x="822960" y="2029968"/>
+            <a:ext cx="4572000" cy="365760"/>
           </a:xfrm>
           <a:prstGeom prst="rect">
             <a:avLst/>
@@ -3637,7 +3682,7 @@
                 <a:ea typeface="Microsoft YaHei" pitchFamily="34" charset="-122"/>
                 <a:cs typeface="Microsoft YaHei" pitchFamily="34" charset="-120"/>
               </a:rPr>
-              <a:t>入口 A · 付款级</a:t>
+              <a:t>付款级高精度规则（入口 A）</a:t>
             </a:r>
             <a:endParaRPr lang="en-US" sz="1600" dirty="0"/>
           </a:p>
@@ -3645,14 +3690,14 @@
       </p:sp>
       <p:sp>
         <p:nvSpPr>
-          <p:cNvPr id="8" name="Text 5"/>
-          <p:cNvSpPr/>
-          <p:nvPr/>
-        </p:nvSpPr>
-        <p:spPr>
-          <a:xfrm>
-            <a:off x="841248" y="2578608"/>
-            <a:ext cx="4983480" cy="594360"/>
+          <p:cNvPr id="6" name="Text 4"/>
+          <p:cNvSpPr/>
+          <p:nvPr/>
+        </p:nvSpPr>
+        <p:spPr>
+          <a:xfrm>
+            <a:off x="822960" y="2432304"/>
+            <a:ext cx="4572000" cy="320040"/>
           </a:xfrm>
           <a:prstGeom prst="rect">
             <a:avLst/>
@@ -3665,40 +3710,155 @@
           <a:lstStyle/>
           <a:p>
             <a:pPr indent="0" marL="0">
+              <a:buNone/>
+            </a:pPr>
+            <a:r>
+              <a:rPr lang="en-US" sz="1150" dirty="0">
+                <a:solidFill>
+                  <a:srgbClr val="71838F"/>
+                </a:solidFill>
+                <a:latin typeface="Microsoft YaHei" pitchFamily="34" charset="0"/>
+                <a:ea typeface="Microsoft YaHei" pitchFamily="34" charset="-122"/>
+                <a:cs typeface="Microsoft YaHei" pitchFamily="34" charset="-120"/>
+              </a:rPr>
+              <a:t>每条约 30% PPV —— 命中后约三成确实是洗钱</a:t>
+            </a:r>
+            <a:endParaRPr lang="en-US" sz="1150" dirty="0"/>
+          </a:p>
+        </p:txBody>
+      </p:sp>
+      <p:sp>
+        <p:nvSpPr>
+          <p:cNvPr id="7" name="Text 5"/>
+          <p:cNvSpPr/>
+          <p:nvPr/>
+        </p:nvSpPr>
+        <p:spPr>
+          <a:xfrm>
+            <a:off x="914400" y="2926080"/>
+            <a:ext cx="4572000" cy="2194560"/>
+          </a:xfrm>
+          <a:prstGeom prst="rect">
+            <a:avLst/>
+          </a:prstGeom>
+          <a:noFill/>
+          <a:ln/>
+        </p:spPr>
+        <p:txBody>
+          <a:bodyPr wrap="square" rtlCol="0" anchor="ctr"/>
+          <a:lstStyle/>
+          <a:p>
+            <a:pPr marL="342900" indent="-342900">
               <a:lnSpc>
-                <a:spcPct val="110000"/>
+                <a:spcPct val="100000"/>
               </a:lnSpc>
-              <a:buNone/>
-            </a:pPr>
-            <a:r>
-              <a:rPr lang="en-US" sz="1250" dirty="0">
-                <a:solidFill>
-                  <a:srgbClr val="71838F"/>
-                </a:solidFill>
-                <a:latin typeface="Microsoft YaHei" pitchFamily="34" charset="0"/>
-                <a:ea typeface="Microsoft YaHei" pitchFamily="34" charset="-122"/>
-                <a:cs typeface="Microsoft YaHei" pitchFamily="34" charset="-120"/>
-              </a:rPr>
-              <a:t>单笔命中硬规则：国家不一致、虚假发票、业务 ≠ 品类…</a:t>
-            </a:r>
-            <a:endParaRPr lang="en-US" sz="1250" dirty="0"/>
-          </a:p>
-        </p:txBody>
-      </p:sp>
-      <p:sp>
-        <p:nvSpPr>
-          <p:cNvPr id="9" name="Shape 6"/>
-          <p:cNvSpPr/>
-          <p:nvPr/>
-        </p:nvSpPr>
-        <p:spPr>
-          <a:xfrm>
-            <a:off x="6199632" y="1783080"/>
-            <a:ext cx="5440680" cy="1463040"/>
+              <a:spcAft>
+                <a:spcPts val="1200"/>
+              </a:spcAft>
+              <a:buSzPct val="100000"/>
+              <a:buChar char="•"/>
+            </a:pPr>
+            <a:r>
+              <a:rPr lang="en-US" sz="1400" dirty="0">
+                <a:solidFill>
+                  <a:srgbClr val="17313F"/>
+                </a:solidFill>
+                <a:latin typeface="Microsoft YaHei" pitchFamily="34" charset="0"/>
+                <a:ea typeface="Microsoft YaHei" pitchFamily="34" charset="-122"/>
+                <a:cs typeface="Microsoft YaHei" pitchFamily="34" charset="-120"/>
+              </a:rPr>
+              <a:t>银行 / 营业地国家不一致</a:t>
+            </a:r>
+            <a:endParaRPr lang="en-US" sz="1400" dirty="0"/>
+          </a:p>
+          <a:p>
+            <a:pPr marL="342900" indent="-342900">
+              <a:lnSpc>
+                <a:spcPct val="100000"/>
+              </a:lnSpc>
+              <a:spcAft>
+                <a:spcPts val="1200"/>
+              </a:spcAft>
+              <a:buSzPct val="100000"/>
+              <a:buChar char="•"/>
+            </a:pPr>
+            <a:r>
+              <a:rPr lang="en-US" sz="1400" dirty="0">
+                <a:solidFill>
+                  <a:srgbClr val="17313F"/>
+                </a:solidFill>
+                <a:latin typeface="Microsoft YaHei" pitchFamily="34" charset="0"/>
+                <a:ea typeface="Microsoft YaHei" pitchFamily="34" charset="-122"/>
+                <a:cs typeface="Microsoft YaHei" pitchFamily="34" charset="-120"/>
+              </a:rPr>
+              <a:t>付款方 / 发票来源国不一致</a:t>
+            </a:r>
+            <a:endParaRPr lang="en-US" sz="1400" dirty="0"/>
+          </a:p>
+          <a:p>
+            <a:pPr marL="342900" indent="-342900">
+              <a:lnSpc>
+                <a:spcPct val="100000"/>
+              </a:lnSpc>
+              <a:spcAft>
+                <a:spcPts val="1200"/>
+              </a:spcAft>
+              <a:buSzPct val="100000"/>
+              <a:buChar char="•"/>
+            </a:pPr>
+            <a:r>
+              <a:rPr lang="en-US" sz="1400" dirty="0">
+                <a:solidFill>
+                  <a:srgbClr val="17313F"/>
+                </a:solidFill>
+                <a:latin typeface="Microsoft YaHei" pitchFamily="34" charset="0"/>
+                <a:ea typeface="Microsoft YaHei" pitchFamily="34" charset="-122"/>
+                <a:cs typeface="Microsoft YaHei" pitchFamily="34" charset="-120"/>
+              </a:rPr>
+              <a:t>主营业务 ≠ 采购品类</a:t>
+            </a:r>
+            <a:endParaRPr lang="en-US" sz="1400" dirty="0"/>
+          </a:p>
+          <a:p>
+            <a:pPr marL="342900" indent="-342900">
+              <a:lnSpc>
+                <a:spcPct val="100000"/>
+              </a:lnSpc>
+              <a:spcAft>
+                <a:spcPts val="1200"/>
+              </a:spcAft>
+              <a:buSzPct val="100000"/>
+              <a:buChar char="•"/>
+            </a:pPr>
+            <a:r>
+              <a:rPr lang="en-US" sz="1400" dirty="0">
+                <a:solidFill>
+                  <a:srgbClr val="17313F"/>
+                </a:solidFill>
+                <a:latin typeface="Microsoft YaHei" pitchFamily="34" charset="0"/>
+                <a:ea typeface="Microsoft YaHei" pitchFamily="34" charset="-122"/>
+                <a:cs typeface="Microsoft YaHei" pitchFamily="34" charset="-120"/>
+              </a:rPr>
+              <a:t>虚假发票特征</a:t>
+            </a:r>
+            <a:endParaRPr lang="en-US" sz="1400" dirty="0"/>
+          </a:p>
+        </p:txBody>
+      </p:sp>
+      <p:sp>
+        <p:nvSpPr>
+          <p:cNvPr id="8" name="Shape 6"/>
+          <p:cNvSpPr/>
+          <p:nvPr/>
+        </p:nvSpPr>
+        <p:spPr>
+          <a:xfrm>
+            <a:off x="5989320" y="1828800"/>
+            <a:ext cx="5650992" cy="1005840"/>
           </a:xfrm>
           <a:prstGeom prst="roundRect">
             <a:avLst>
-              <a:gd name="adj" fmla="val 7500"/>
+              <a:gd name="adj" fmla="val 10909"/>
             </a:avLst>
           </a:prstGeom>
           <a:solidFill>
@@ -3721,58 +3881,57 @@
       </p:sp>
       <p:sp>
         <p:nvSpPr>
-          <p:cNvPr id="10" name="Shape 7"/>
-          <p:cNvSpPr/>
-          <p:nvPr/>
-        </p:nvSpPr>
-        <p:spPr>
-          <a:xfrm>
-            <a:off x="6455664" y="2011680"/>
-            <a:ext cx="548640" cy="548640"/>
-          </a:xfrm>
-          <a:prstGeom prst="ellipse">
-            <a:avLst/>
+          <p:cNvPr id="9" name="Text 7"/>
+          <p:cNvSpPr/>
+          <p:nvPr/>
+        </p:nvSpPr>
+        <p:spPr>
+          <a:xfrm>
+            <a:off x="6217920" y="2057400"/>
+            <a:ext cx="914400" cy="548640"/>
+          </a:xfrm>
+          <a:prstGeom prst="rect">
+            <a:avLst>
+              <a:gd name="adj" fmla="val 13333"/>
+            </a:avLst>
           </a:prstGeom>
           <a:solidFill>
-            <a:srgbClr val="C9861A"/>
+            <a:srgbClr val="D84B4B"/>
           </a:solidFill>
           <a:ln/>
         </p:spPr>
-      </p:sp>
-      <p:pic>
-        <p:nvPicPr>
-          <p:cNvPr id="11" name="Image 1" descr="preencoded.png">    </p:cNvPr>
-          <p:cNvPicPr>
-            <a:picLocks noChangeAspect="1"/>
-          </p:cNvPicPr>
-          <p:nvPr/>
-        </p:nvPicPr>
-        <p:blipFill>
-          <a:blip r:embed="rId2"/>
-          <a:stretch>
-            <a:fillRect/>
-          </a:stretch>
-        </p:blipFill>
-        <p:spPr>
-          <a:xfrm>
-            <a:off x="6565392" y="2121408"/>
-            <a:ext cx="329184" cy="329184"/>
-          </a:xfrm>
-          <a:prstGeom prst="rect">
-            <a:avLst/>
-          </a:prstGeom>
-        </p:spPr>
-      </p:pic>
-      <p:sp>
-        <p:nvSpPr>
-          <p:cNvPr id="12" name="Text 8"/>
-          <p:cNvSpPr/>
-          <p:nvPr/>
-        </p:nvSpPr>
-        <p:spPr>
-          <a:xfrm>
-            <a:off x="7159752" y="1993392"/>
-            <a:ext cx="4297680" cy="548640"/>
+        <p:txBody>
+          <a:bodyPr wrap="square" rtlCol="0" anchor="ctr"/>
+          <a:lstStyle/>
+          <a:p>
+            <a:pPr algn="ctr" indent="0" marL="0">
+              <a:buNone/>
+            </a:pPr>
+            <a:r>
+              <a:rPr lang="en-US" sz="2000" b="1" dirty="0">
+                <a:solidFill>
+                  <a:srgbClr val="FFFFFF"/>
+                </a:solidFill>
+                <a:latin typeface="Microsoft YaHei" pitchFamily="34" charset="0"/>
+                <a:ea typeface="Microsoft YaHei" pitchFamily="34" charset="-122"/>
+                <a:cs typeface="Microsoft YaHei" pitchFamily="34" charset="-120"/>
+              </a:rPr>
+              <a:t>T1</a:t>
+            </a:r>
+            <a:endParaRPr lang="en-US" sz="2000" dirty="0"/>
+          </a:p>
+        </p:txBody>
+      </p:sp>
+      <p:sp>
+        <p:nvSpPr>
+          <p:cNvPr id="10" name="Text 8"/>
+          <p:cNvSpPr/>
+          <p:nvPr/>
+        </p:nvSpPr>
+        <p:spPr>
+          <a:xfrm>
+            <a:off x="7360920" y="1975104"/>
+            <a:ext cx="4114800" cy="384048"/>
           </a:xfrm>
           <a:prstGeom prst="rect">
             <a:avLst/>
@@ -3788,7 +3947,7 @@
               <a:buNone/>
             </a:pPr>
             <a:r>
-              <a:rPr lang="en-US" sz="1600" b="1" dirty="0">
+              <a:rPr lang="en-US" sz="1500" b="1" dirty="0">
                 <a:solidFill>
                   <a:srgbClr val="17313F"/>
                 </a:solidFill>
@@ -3796,22 +3955,22 @@
                 <a:ea typeface="Microsoft YaHei" pitchFamily="34" charset="-122"/>
                 <a:cs typeface="Microsoft YaHei" pitchFamily="34" charset="-120"/>
               </a:rPr>
-              <a:t>入口 B · 供应商级</a:t>
-            </a:r>
-            <a:endParaRPr lang="en-US" sz="1600" dirty="0"/>
-          </a:p>
-        </p:txBody>
-      </p:sp>
-      <p:sp>
-        <p:nvSpPr>
-          <p:cNvPr id="13" name="Text 9"/>
-          <p:cNvSpPr/>
-          <p:nvPr/>
-        </p:nvSpPr>
-        <p:spPr>
-          <a:xfrm>
-            <a:off x="6492240" y="2578608"/>
-            <a:ext cx="4983480" cy="594360"/>
+              <a:t>命中 ≥ 2 条高精度规则</a:t>
+            </a:r>
+            <a:endParaRPr lang="en-US" sz="1500" dirty="0"/>
+          </a:p>
+        </p:txBody>
+      </p:sp>
+      <p:sp>
+        <p:nvSpPr>
+          <p:cNvPr id="11" name="Text 9"/>
+          <p:cNvSpPr/>
+          <p:nvPr/>
+        </p:nvSpPr>
+        <p:spPr>
+          <a:xfrm>
+            <a:off x="7360920" y="2359152"/>
+            <a:ext cx="4114800" cy="347472"/>
           </a:xfrm>
           <a:prstGeom prst="rect">
             <a:avLst/>
@@ -3824,13 +3983,10 @@
           <a:lstStyle/>
           <a:p>
             <a:pPr indent="0" marL="0">
-              <a:lnSpc>
-                <a:spcPct val="110000"/>
-              </a:lnSpc>
-              <a:buNone/>
-            </a:pPr>
-            <a:r>
-              <a:rPr lang="en-US" sz="1250" dirty="0">
+              <a:buNone/>
+            </a:pPr>
+            <a:r>
+              <a:rPr lang="en-US" sz="1200" dirty="0">
                 <a:solidFill>
                   <a:srgbClr val="71838F"/>
                 </a:solidFill>
@@ -3838,71 +3994,32 @@
                 <a:ea typeface="Microsoft YaHei" pitchFamily="34" charset="-122"/>
                 <a:cs typeface="Microsoft YaHei" pitchFamily="34" charset="-120"/>
               </a:rPr>
-              <a:t>聚合多笔才看得出：拆分付款、付款突增、多次命中…</a:t>
-            </a:r>
-            <a:endParaRPr lang="en-US" sz="1250" dirty="0"/>
-          </a:p>
-        </p:txBody>
-      </p:sp>
-      <p:sp>
-        <p:nvSpPr>
-          <p:cNvPr id="14" name="Text 10"/>
-          <p:cNvSpPr/>
-          <p:nvPr/>
-        </p:nvSpPr>
-        <p:spPr>
-          <a:xfrm>
-            <a:off x="548640" y="3310128"/>
-            <a:ext cx="10972800" cy="320040"/>
-          </a:xfrm>
-          <a:prstGeom prst="rect">
-            <a:avLst/>
-          </a:prstGeom>
-          <a:noFill/>
-          <a:ln/>
-        </p:spPr>
-        <p:txBody>
-          <a:bodyPr wrap="square" rtlCol="0" anchor="ctr"/>
-          <a:lstStyle/>
-          <a:p>
-            <a:pPr algn="ctr" indent="0" marL="0">
-              <a:buNone/>
-            </a:pPr>
-            <a:r>
-              <a:rPr lang="en-US" sz="1250" i="1" dirty="0">
-                <a:solidFill>
-                  <a:srgbClr val="1BA39C"/>
-                </a:solidFill>
-                <a:latin typeface="Microsoft YaHei" pitchFamily="34" charset="0"/>
-                <a:ea typeface="Microsoft YaHei" pitchFamily="34" charset="-122"/>
-                <a:cs typeface="Microsoft YaHei" pitchFamily="34" charset="-120"/>
-              </a:rPr>
-              <a:t>两入口合并成法务的一份统一告警清单</a:t>
-            </a:r>
-            <a:endParaRPr lang="en-US" sz="1250" dirty="0"/>
-          </a:p>
-        </p:txBody>
-      </p:sp>
-      <p:sp>
-        <p:nvSpPr>
-          <p:cNvPr id="15" name="Shape 11"/>
-          <p:cNvSpPr/>
-          <p:nvPr/>
-        </p:nvSpPr>
-        <p:spPr>
-          <a:xfrm>
-            <a:off x="548640" y="3840480"/>
-            <a:ext cx="2468880" cy="914400"/>
+              <a:t>紧急 · 24 小时内复核</a:t>
+            </a:r>
+            <a:endParaRPr lang="en-US" sz="1200" dirty="0"/>
+          </a:p>
+        </p:txBody>
+      </p:sp>
+      <p:sp>
+        <p:nvSpPr>
+          <p:cNvPr id="12" name="Shape 10"/>
+          <p:cNvSpPr/>
+          <p:nvPr/>
+        </p:nvSpPr>
+        <p:spPr>
+          <a:xfrm>
+            <a:off x="5989320" y="3017520"/>
+            <a:ext cx="5650992" cy="1005840"/>
           </a:xfrm>
           <a:prstGeom prst="roundRect">
             <a:avLst>
-              <a:gd name="adj" fmla="val 12000"/>
+              <a:gd name="adj" fmla="val 10909"/>
             </a:avLst>
           </a:prstGeom>
           <a:solidFill>
-            <a:srgbClr val="FFFFFF"/>
+            <a:srgbClr val="F4FAFB"/>
           </a:solidFill>
-          <a:ln w="15240">
+          <a:ln w="12700">
             <a:solidFill>
               <a:srgbClr val="DCE8EE"/>
             </a:solidFill>
@@ -3919,139 +4036,145 @@
       </p:sp>
       <p:sp>
         <p:nvSpPr>
-          <p:cNvPr id="16" name="Shape 12"/>
-          <p:cNvSpPr/>
-          <p:nvPr/>
-        </p:nvSpPr>
-        <p:spPr>
-          <a:xfrm>
-            <a:off x="731520" y="4069080"/>
-            <a:ext cx="457200" cy="457200"/>
-          </a:xfrm>
-          <a:prstGeom prst="ellipse">
-            <a:avLst/>
+          <p:cNvPr id="13" name="Text 11"/>
+          <p:cNvSpPr/>
+          <p:nvPr/>
+        </p:nvSpPr>
+        <p:spPr>
+          <a:xfrm>
+            <a:off x="6217920" y="3246120"/>
+            <a:ext cx="914400" cy="548640"/>
+          </a:xfrm>
+          <a:prstGeom prst="rect">
+            <a:avLst>
+              <a:gd name="adj" fmla="val 13333"/>
+            </a:avLst>
+          </a:prstGeom>
+          <a:solidFill>
+            <a:srgbClr val="C9861A"/>
+          </a:solidFill>
+          <a:ln/>
+        </p:spPr>
+        <p:txBody>
+          <a:bodyPr wrap="square" rtlCol="0" anchor="ctr"/>
+          <a:lstStyle/>
+          <a:p>
+            <a:pPr algn="ctr" indent="0" marL="0">
+              <a:buNone/>
+            </a:pPr>
+            <a:r>
+              <a:rPr lang="en-US" sz="2000" b="1" dirty="0">
+                <a:solidFill>
+                  <a:srgbClr val="FFFFFF"/>
+                </a:solidFill>
+                <a:latin typeface="Microsoft YaHei" pitchFamily="34" charset="0"/>
+                <a:ea typeface="Microsoft YaHei" pitchFamily="34" charset="-122"/>
+                <a:cs typeface="Microsoft YaHei" pitchFamily="34" charset="-120"/>
+              </a:rPr>
+              <a:t>T2</a:t>
+            </a:r>
+            <a:endParaRPr lang="en-US" sz="2000" dirty="0"/>
+          </a:p>
+        </p:txBody>
+      </p:sp>
+      <p:sp>
+        <p:nvSpPr>
+          <p:cNvPr id="14" name="Text 12"/>
+          <p:cNvSpPr/>
+          <p:nvPr/>
+        </p:nvSpPr>
+        <p:spPr>
+          <a:xfrm>
+            <a:off x="7360920" y="3163824"/>
+            <a:ext cx="4114800" cy="384048"/>
+          </a:xfrm>
+          <a:prstGeom prst="rect">
+            <a:avLst/>
+          </a:prstGeom>
+          <a:noFill/>
+          <a:ln/>
+        </p:spPr>
+        <p:txBody>
+          <a:bodyPr wrap="square" rtlCol="0" anchor="ctr"/>
+          <a:lstStyle/>
+          <a:p>
+            <a:pPr indent="0" marL="0">
+              <a:buNone/>
+            </a:pPr>
+            <a:r>
+              <a:rPr lang="en-US" sz="1500" b="1" dirty="0">
+                <a:solidFill>
+                  <a:srgbClr val="17313F"/>
+                </a:solidFill>
+                <a:latin typeface="Microsoft YaHei" pitchFamily="34" charset="0"/>
+                <a:ea typeface="Microsoft YaHei" pitchFamily="34" charset="-122"/>
+                <a:cs typeface="Microsoft YaHei" pitchFamily="34" charset="-120"/>
+              </a:rPr>
+              <a:t>命中 1 条高精度规则</a:t>
+            </a:r>
+            <a:endParaRPr lang="en-US" sz="1500" dirty="0"/>
+          </a:p>
+        </p:txBody>
+      </p:sp>
+      <p:sp>
+        <p:nvSpPr>
+          <p:cNvPr id="15" name="Text 13"/>
+          <p:cNvSpPr/>
+          <p:nvPr/>
+        </p:nvSpPr>
+        <p:spPr>
+          <a:xfrm>
+            <a:off x="7360920" y="3547872"/>
+            <a:ext cx="4114800" cy="347472"/>
+          </a:xfrm>
+          <a:prstGeom prst="rect">
+            <a:avLst/>
+          </a:prstGeom>
+          <a:noFill/>
+          <a:ln/>
+        </p:spPr>
+        <p:txBody>
+          <a:bodyPr wrap="square" rtlCol="0" anchor="ctr"/>
+          <a:lstStyle/>
+          <a:p>
+            <a:pPr indent="0" marL="0">
+              <a:buNone/>
+            </a:pPr>
+            <a:r>
+              <a:rPr lang="en-US" sz="1200" dirty="0">
+                <a:solidFill>
+                  <a:srgbClr val="71838F"/>
+                </a:solidFill>
+                <a:latin typeface="Microsoft YaHei" pitchFamily="34" charset="0"/>
+                <a:ea typeface="Microsoft YaHei" pitchFamily="34" charset="-122"/>
+                <a:cs typeface="Microsoft YaHei" pitchFamily="34" charset="-120"/>
+              </a:rPr>
+              <a:t>告警 · 3 天内复核</a:t>
+            </a:r>
+            <a:endParaRPr lang="en-US" sz="1200" dirty="0"/>
+          </a:p>
+        </p:txBody>
+      </p:sp>
+      <p:sp>
+        <p:nvSpPr>
+          <p:cNvPr id="16" name="Shape 14"/>
+          <p:cNvSpPr/>
+          <p:nvPr/>
+        </p:nvSpPr>
+        <p:spPr>
+          <a:xfrm>
+            <a:off x="5989320" y="4206240"/>
+            <a:ext cx="5650992" cy="1005840"/>
+          </a:xfrm>
+          <a:prstGeom prst="roundRect">
+            <a:avLst>
+              <a:gd name="adj" fmla="val 10909"/>
+            </a:avLst>
           </a:prstGeom>
           <a:solidFill>
             <a:srgbClr val="F4FAFB"/>
           </a:solidFill>
-          <a:ln w="16510">
-            <a:solidFill>
-              <a:srgbClr val="1BA39C"/>
-            </a:solidFill>
-            <a:prstDash val="solid"/>
-          </a:ln>
-        </p:spPr>
-      </p:sp>
-      <p:pic>
-        <p:nvPicPr>
-          <p:cNvPr id="17" name="Image 2" descr="preencoded.png">    </p:cNvPr>
-          <p:cNvPicPr>
-            <a:picLocks noChangeAspect="1"/>
-          </p:cNvPicPr>
-          <p:nvPr/>
-        </p:nvPicPr>
-        <p:blipFill>
-          <a:blip r:embed="rId3"/>
-          <a:stretch>
-            <a:fillRect/>
-          </a:stretch>
-        </p:blipFill>
-        <p:spPr>
-          <a:xfrm>
-            <a:off x="822960" y="4160520"/>
-            <a:ext cx="274320" cy="274320"/>
-          </a:xfrm>
-          <a:prstGeom prst="rect">
-            <a:avLst/>
-          </a:prstGeom>
-        </p:spPr>
-      </p:pic>
-      <p:sp>
-        <p:nvSpPr>
-          <p:cNvPr id="18" name="Text 13"/>
-          <p:cNvSpPr/>
-          <p:nvPr/>
-        </p:nvSpPr>
-        <p:spPr>
-          <a:xfrm>
-            <a:off x="1280160" y="3840480"/>
-            <a:ext cx="1691640" cy="914400"/>
-          </a:xfrm>
-          <a:prstGeom prst="rect">
-            <a:avLst/>
-          </a:prstGeom>
-          <a:noFill/>
-          <a:ln/>
-        </p:spPr>
-        <p:txBody>
-          <a:bodyPr wrap="square" rtlCol="0" anchor="ctr"/>
-          <a:lstStyle/>
-          <a:p>
-            <a:pPr indent="0" marL="0">
-              <a:lnSpc>
-                <a:spcPct val="100000"/>
-              </a:lnSpc>
-              <a:buNone/>
-            </a:pPr>
-            <a:r>
-              <a:rPr lang="en-US" sz="1300" b="1" dirty="0">
-                <a:solidFill>
-                  <a:srgbClr val="17313F"/>
-                </a:solidFill>
-                <a:latin typeface="Microsoft YaHei" pitchFamily="34" charset="0"/>
-                <a:ea typeface="Microsoft YaHei" pitchFamily="34" charset="-122"/>
-                <a:cs typeface="Microsoft YaHei" pitchFamily="34" charset="-120"/>
-              </a:rPr>
-              <a:t>检测 + 定级</a:t>
-            </a:r>
-            <a:endParaRPr lang="en-US" sz="1300" dirty="0"/>
-          </a:p>
-        </p:txBody>
-      </p:sp>
-      <p:pic>
-        <p:nvPicPr>
-          <p:cNvPr id="19" name="Image 3" descr="preencoded.png">    </p:cNvPr>
-          <p:cNvPicPr>
-            <a:picLocks noChangeAspect="1"/>
-          </p:cNvPicPr>
-          <p:nvPr/>
-        </p:nvPicPr>
-        <p:blipFill>
-          <a:blip r:embed="rId4"/>
-          <a:stretch>
-            <a:fillRect/>
-          </a:stretch>
-        </p:blipFill>
-        <p:spPr>
-          <a:xfrm>
-            <a:off x="3072384" y="4160520"/>
-            <a:ext cx="237744" cy="237744"/>
-          </a:xfrm>
-          <a:prstGeom prst="rect">
-            <a:avLst/>
-          </a:prstGeom>
-        </p:spPr>
-      </p:pic>
-      <p:sp>
-        <p:nvSpPr>
-          <p:cNvPr id="20" name="Shape 14"/>
-          <p:cNvSpPr/>
-          <p:nvPr/>
-        </p:nvSpPr>
-        <p:spPr>
-          <a:xfrm>
-            <a:off x="3337560" y="3840480"/>
-            <a:ext cx="2468880" cy="914400"/>
-          </a:xfrm>
-          <a:prstGeom prst="roundRect">
-            <a:avLst>
-              <a:gd name="adj" fmla="val 12000"/>
-            </a:avLst>
-          </a:prstGeom>
-          <a:solidFill>
-            <a:srgbClr val="FFFFFF"/>
-          </a:solidFill>
-          <a:ln w="15240">
+          <a:ln w="12700">
             <a:solidFill>
               <a:srgbClr val="DCE8EE"/>
             </a:solidFill>
@@ -4068,63 +4191,57 @@
       </p:sp>
       <p:sp>
         <p:nvSpPr>
-          <p:cNvPr id="21" name="Shape 15"/>
-          <p:cNvSpPr/>
-          <p:nvPr/>
-        </p:nvSpPr>
-        <p:spPr>
-          <a:xfrm>
-            <a:off x="3520440" y="4069080"/>
-            <a:ext cx="457200" cy="457200"/>
-          </a:xfrm>
-          <a:prstGeom prst="ellipse">
-            <a:avLst/>
+          <p:cNvPr id="17" name="Text 15"/>
+          <p:cNvSpPr/>
+          <p:nvPr/>
+        </p:nvSpPr>
+        <p:spPr>
+          <a:xfrm>
+            <a:off x="6217920" y="4434840"/>
+            <a:ext cx="914400" cy="548640"/>
+          </a:xfrm>
+          <a:prstGeom prst="rect">
+            <a:avLst>
+              <a:gd name="adj" fmla="val 13333"/>
+            </a:avLst>
           </a:prstGeom>
           <a:solidFill>
-            <a:srgbClr val="F4FAFB"/>
+            <a:srgbClr val="5D8AA8"/>
           </a:solidFill>
-          <a:ln w="16510">
-            <a:solidFill>
-              <a:srgbClr val="1BA39C"/>
-            </a:solidFill>
-            <a:prstDash val="solid"/>
-          </a:ln>
-        </p:spPr>
-      </p:sp>
-      <p:pic>
-        <p:nvPicPr>
-          <p:cNvPr id="22" name="Image 4" descr="preencoded.png">    </p:cNvPr>
-          <p:cNvPicPr>
-            <a:picLocks noChangeAspect="1"/>
-          </p:cNvPicPr>
-          <p:nvPr/>
-        </p:nvPicPr>
-        <p:blipFill>
-          <a:blip r:embed="rId5"/>
-          <a:stretch>
-            <a:fillRect/>
-          </a:stretch>
-        </p:blipFill>
-        <p:spPr>
-          <a:xfrm>
-            <a:off x="3611880" y="4160520"/>
-            <a:ext cx="274320" cy="274320"/>
-          </a:xfrm>
-          <a:prstGeom prst="rect">
-            <a:avLst/>
-          </a:prstGeom>
-        </p:spPr>
-      </p:pic>
-      <p:sp>
-        <p:nvSpPr>
-          <p:cNvPr id="23" name="Text 16"/>
-          <p:cNvSpPr/>
-          <p:nvPr/>
-        </p:nvSpPr>
-        <p:spPr>
-          <a:xfrm>
-            <a:off x="4069080" y="3840480"/>
-            <a:ext cx="1691640" cy="914400"/>
+          <a:ln/>
+        </p:spPr>
+        <p:txBody>
+          <a:bodyPr wrap="square" rtlCol="0" anchor="ctr"/>
+          <a:lstStyle/>
+          <a:p>
+            <a:pPr algn="ctr" indent="0" marL="0">
+              <a:buNone/>
+            </a:pPr>
+            <a:r>
+              <a:rPr lang="en-US" sz="2000" b="1" dirty="0">
+                <a:solidFill>
+                  <a:srgbClr val="FFFFFF"/>
+                </a:solidFill>
+                <a:latin typeface="Microsoft YaHei" pitchFamily="34" charset="0"/>
+                <a:ea typeface="Microsoft YaHei" pitchFamily="34" charset="-122"/>
+                <a:cs typeface="Microsoft YaHei" pitchFamily="34" charset="-120"/>
+              </a:rPr>
+              <a:t>T3</a:t>
+            </a:r>
+            <a:endParaRPr lang="en-US" sz="2000" dirty="0"/>
+          </a:p>
+        </p:txBody>
+      </p:sp>
+      <p:sp>
+        <p:nvSpPr>
+          <p:cNvPr id="18" name="Text 16"/>
+          <p:cNvSpPr/>
+          <p:nvPr/>
+        </p:nvSpPr>
+        <p:spPr>
+          <a:xfrm>
+            <a:off x="7360920" y="4352544"/>
+            <a:ext cx="4114800" cy="384048"/>
           </a:xfrm>
           <a:prstGeom prst="rect">
             <a:avLst/>
@@ -4137,13 +4254,10 @@
           <a:lstStyle/>
           <a:p>
             <a:pPr indent="0" marL="0">
-              <a:lnSpc>
-                <a:spcPct val="100000"/>
-              </a:lnSpc>
-              <a:buNone/>
-            </a:pPr>
-            <a:r>
-              <a:rPr lang="en-US" sz="1300" b="1" dirty="0">
+              <a:buNone/>
+            </a:pPr>
+            <a:r>
+              <a:rPr lang="en-US" sz="1500" b="1" dirty="0">
                 <a:solidFill>
                   <a:srgbClr val="17313F"/>
                 </a:solidFill>
@@ -4151,129 +4265,83 @@
                 <a:ea typeface="Microsoft YaHei" pitchFamily="34" charset="-122"/>
                 <a:cs typeface="Microsoft YaHei" pitchFamily="34" charset="-120"/>
               </a:rPr>
-              <a:t>AI 调查</a:t>
-            </a:r>
-            <a:endParaRPr lang="en-US" sz="1300" dirty="0"/>
-          </a:p>
-        </p:txBody>
-      </p:sp>
-      <p:pic>
-        <p:nvPicPr>
-          <p:cNvPr id="24" name="Image 5" descr="preencoded.png">    </p:cNvPr>
-          <p:cNvPicPr>
-            <a:picLocks noChangeAspect="1"/>
-          </p:cNvPicPr>
-          <p:nvPr/>
-        </p:nvPicPr>
-        <p:blipFill>
-          <a:blip r:embed="rId6"/>
-          <a:stretch>
-            <a:fillRect/>
-          </a:stretch>
-        </p:blipFill>
-        <p:spPr>
-          <a:xfrm>
-            <a:off x="5861304" y="4160520"/>
-            <a:ext cx="237744" cy="237744"/>
-          </a:xfrm>
-          <a:prstGeom prst="rect">
-            <a:avLst/>
-          </a:prstGeom>
-        </p:spPr>
-      </p:pic>
-      <p:sp>
-        <p:nvSpPr>
-          <p:cNvPr id="25" name="Shape 17"/>
-          <p:cNvSpPr/>
-          <p:nvPr/>
-        </p:nvSpPr>
-        <p:spPr>
-          <a:xfrm>
-            <a:off x="6126480" y="3840480"/>
-            <a:ext cx="2468880" cy="914400"/>
+              <a:t>未命中高精度规则</a:t>
+            </a:r>
+            <a:endParaRPr lang="en-US" sz="1500" dirty="0"/>
+          </a:p>
+        </p:txBody>
+      </p:sp>
+      <p:sp>
+        <p:nvSpPr>
+          <p:cNvPr id="19" name="Text 17"/>
+          <p:cNvSpPr/>
+          <p:nvPr/>
+        </p:nvSpPr>
+        <p:spPr>
+          <a:xfrm>
+            <a:off x="7360920" y="4736592"/>
+            <a:ext cx="4114800" cy="347472"/>
+          </a:xfrm>
+          <a:prstGeom prst="rect">
+            <a:avLst/>
+          </a:prstGeom>
+          <a:noFill/>
+          <a:ln/>
+        </p:spPr>
+        <p:txBody>
+          <a:bodyPr wrap="square" rtlCol="0" anchor="ctr"/>
+          <a:lstStyle/>
+          <a:p>
+            <a:pPr indent="0" marL="0">
+              <a:buNone/>
+            </a:pPr>
+            <a:r>
+              <a:rPr lang="en-US" sz="1200" dirty="0">
+                <a:solidFill>
+                  <a:srgbClr val="71838F"/>
+                </a:solidFill>
+                <a:latin typeface="Microsoft YaHei" pitchFamily="34" charset="0"/>
+                <a:ea typeface="Microsoft YaHei" pitchFamily="34" charset="-122"/>
+                <a:cs typeface="Microsoft YaHei" pitchFamily="34" charset="-120"/>
+              </a:rPr>
+              <a:t>评分 · 批量排序（复用原有逻辑）</a:t>
+            </a:r>
+            <a:endParaRPr lang="en-US" sz="1200" dirty="0"/>
+          </a:p>
+        </p:txBody>
+      </p:sp>
+      <p:sp>
+        <p:nvSpPr>
+          <p:cNvPr id="20" name="Shape 18"/>
+          <p:cNvSpPr/>
+          <p:nvPr/>
+        </p:nvSpPr>
+        <p:spPr>
+          <a:xfrm>
+            <a:off x="548640" y="5532120"/>
+            <a:ext cx="11091672" cy="640080"/>
           </a:xfrm>
           <a:prstGeom prst="roundRect">
             <a:avLst>
-              <a:gd name="adj" fmla="val 12000"/>
+              <a:gd name="adj" fmla="val 17143"/>
             </a:avLst>
           </a:prstGeom>
           <a:solidFill>
-            <a:srgbClr val="FFFFFF"/>
+            <a:srgbClr val="102C3A"/>
           </a:solidFill>
-          <a:ln w="15240">
-            <a:solidFill>
-              <a:srgbClr val="DCE8EE"/>
-            </a:solidFill>
-            <a:prstDash val="solid"/>
-          </a:ln>
-          <a:effectLst>
-            <a:outerShdw sx="100000" sy="100000" kx="0" ky="0" algn="bl" rotWithShape="0" blurRad="114300" dist="38100" dir="8100000">
-              <a:srgbClr val="0B1F2A">
-                <a:alpha val="16000"/>
-              </a:srgbClr>
-            </a:outerShdw>
-          </a:effectLst>
-        </p:spPr>
-      </p:sp>
-      <p:sp>
-        <p:nvSpPr>
-          <p:cNvPr id="26" name="Shape 18"/>
-          <p:cNvSpPr/>
-          <p:nvPr/>
-        </p:nvSpPr>
-        <p:spPr>
-          <a:xfrm>
-            <a:off x="6309360" y="4069080"/>
-            <a:ext cx="457200" cy="457200"/>
-          </a:xfrm>
-          <a:prstGeom prst="ellipse">
-            <a:avLst/>
-          </a:prstGeom>
-          <a:solidFill>
-            <a:srgbClr val="F4FAFB"/>
-          </a:solidFill>
-          <a:ln w="16510">
-            <a:solidFill>
-              <a:srgbClr val="1BA39C"/>
-            </a:solidFill>
-            <a:prstDash val="solid"/>
-          </a:ln>
-        </p:spPr>
-      </p:sp>
-      <p:pic>
-        <p:nvPicPr>
-          <p:cNvPr id="27" name="Image 6" descr="preencoded.png">    </p:cNvPr>
-          <p:cNvPicPr>
-            <a:picLocks noChangeAspect="1"/>
-          </p:cNvPicPr>
-          <p:nvPr/>
-        </p:nvPicPr>
-        <p:blipFill>
-          <a:blip r:embed="rId7"/>
-          <a:stretch>
-            <a:fillRect/>
-          </a:stretch>
-        </p:blipFill>
-        <p:spPr>
-          <a:xfrm>
-            <a:off x="6400800" y="4160520"/>
-            <a:ext cx="274320" cy="274320"/>
-          </a:xfrm>
-          <a:prstGeom prst="rect">
-            <a:avLst/>
-          </a:prstGeom>
-        </p:spPr>
-      </p:pic>
-      <p:sp>
-        <p:nvSpPr>
-          <p:cNvPr id="28" name="Text 19"/>
-          <p:cNvSpPr/>
-          <p:nvPr/>
-        </p:nvSpPr>
-        <p:spPr>
-          <a:xfrm>
-            <a:off x="6858000" y="3840480"/>
-            <a:ext cx="1691640" cy="914400"/>
+          <a:ln/>
+        </p:spPr>
+      </p:sp>
+      <p:sp>
+        <p:nvSpPr>
+          <p:cNvPr id="21" name="Text 19"/>
+          <p:cNvSpPr/>
+          <p:nvPr/>
+        </p:nvSpPr>
+        <p:spPr>
+          <a:xfrm>
+            <a:off x="822960" y="5532120"/>
+            <a:ext cx="10607040" cy="640080"/>
           </a:xfrm>
           <a:prstGeom prst="rect">
             <a:avLst/>
@@ -4286,288 +4354,40 @@
           <a:lstStyle/>
           <a:p>
             <a:pPr indent="0" marL="0">
-              <a:lnSpc>
-                <a:spcPct val="100000"/>
-              </a:lnSpc>
               <a:buNone/>
             </a:pPr>
             <a:r>
               <a:rPr lang="en-US" sz="1300" b="1" dirty="0">
                 <a:solidFill>
-                  <a:srgbClr val="17313F"/>
-                </a:solidFill>
-                <a:latin typeface="Microsoft YaHei" pitchFamily="34" charset="0"/>
-                <a:ea typeface="Microsoft YaHei" pitchFamily="34" charset="-122"/>
-                <a:cs typeface="Microsoft YaHei" pitchFamily="34" charset="-120"/>
-              </a:rPr>
-              <a:t>法务裁决</a:t>
+                  <a:srgbClr val="37B7AD"/>
+                </a:solidFill>
+                <a:latin typeface="Microsoft YaHei" pitchFamily="34" charset="0"/>
+                <a:ea typeface="Microsoft YaHei" pitchFamily="34" charset="-122"/>
+                <a:cs typeface="Microsoft YaHei" pitchFamily="34" charset="-120"/>
+              </a:rPr>
+              <a:t>供应商级信号（入口 B）同样并入：</a:t>
+            </a:r>
+            <a:pPr indent="0" marL="0">
+              <a:buNone/>
+            </a:pPr>
+            <a:r>
+              <a:rPr lang="en-US" sz="1300" dirty="0">
+                <a:solidFill>
+                  <a:srgbClr val="DDEBEF"/>
+                </a:solidFill>
+                <a:latin typeface="Microsoft YaHei" pitchFamily="34" charset="0"/>
+                <a:ea typeface="Microsoft YaHei" pitchFamily="34" charset="-122"/>
+                <a:cs typeface="Microsoft YaHei" pitchFamily="34" charset="-120"/>
+              </a:rPr>
+              <a:t>拆分 + 旗下高精度命中 → T1；单一行为信号（拆分 / 突增 / 多次命中）→ T2。</a:t>
             </a:r>
             <a:endParaRPr lang="en-US" sz="1300" dirty="0"/>
           </a:p>
         </p:txBody>
       </p:sp>
-      <p:pic>
-        <p:nvPicPr>
-          <p:cNvPr id="29" name="Image 7" descr="preencoded.png">    </p:cNvPr>
-          <p:cNvPicPr>
-            <a:picLocks noChangeAspect="1"/>
-          </p:cNvPicPr>
-          <p:nvPr/>
-        </p:nvPicPr>
-        <p:blipFill>
-          <a:blip r:embed="rId8"/>
-          <a:stretch>
-            <a:fillRect/>
-          </a:stretch>
-        </p:blipFill>
-        <p:spPr>
-          <a:xfrm>
-            <a:off x="8650224" y="4160520"/>
-            <a:ext cx="237744" cy="237744"/>
-          </a:xfrm>
-          <a:prstGeom prst="rect">
-            <a:avLst/>
-          </a:prstGeom>
-        </p:spPr>
-      </p:pic>
-      <p:sp>
-        <p:nvSpPr>
-          <p:cNvPr id="30" name="Shape 20"/>
-          <p:cNvSpPr/>
-          <p:nvPr/>
-        </p:nvSpPr>
-        <p:spPr>
-          <a:xfrm>
-            <a:off x="8915400" y="3840480"/>
-            <a:ext cx="2468880" cy="914400"/>
-          </a:xfrm>
-          <a:prstGeom prst="roundRect">
-            <a:avLst>
-              <a:gd name="adj" fmla="val 12000"/>
-            </a:avLst>
-          </a:prstGeom>
-          <a:solidFill>
-            <a:srgbClr val="FFFFFF"/>
-          </a:solidFill>
-          <a:ln w="15240">
-            <a:solidFill>
-              <a:srgbClr val="DCE8EE"/>
-            </a:solidFill>
-            <a:prstDash val="solid"/>
-          </a:ln>
-          <a:effectLst>
-            <a:outerShdw sx="100000" sy="100000" kx="0" ky="0" algn="bl" rotWithShape="0" blurRad="114300" dist="38100" dir="8100000">
-              <a:srgbClr val="0B1F2A">
-                <a:alpha val="16000"/>
-              </a:srgbClr>
-            </a:outerShdw>
-          </a:effectLst>
-        </p:spPr>
-      </p:sp>
-      <p:sp>
-        <p:nvSpPr>
-          <p:cNvPr id="31" name="Shape 21"/>
-          <p:cNvSpPr/>
-          <p:nvPr/>
-        </p:nvSpPr>
-        <p:spPr>
-          <a:xfrm>
-            <a:off x="9098280" y="4069080"/>
-            <a:ext cx="457200" cy="457200"/>
-          </a:xfrm>
-          <a:prstGeom prst="ellipse">
-            <a:avLst/>
-          </a:prstGeom>
-          <a:solidFill>
-            <a:srgbClr val="F4FAFB"/>
-          </a:solidFill>
-          <a:ln w="16510">
-            <a:solidFill>
-              <a:srgbClr val="1BA39C"/>
-            </a:solidFill>
-            <a:prstDash val="solid"/>
-          </a:ln>
-        </p:spPr>
-      </p:sp>
-      <p:pic>
-        <p:nvPicPr>
-          <p:cNvPr id="32" name="Image 8" descr="preencoded.png">    </p:cNvPr>
-          <p:cNvPicPr>
-            <a:picLocks noChangeAspect="1"/>
-          </p:cNvPicPr>
-          <p:nvPr/>
-        </p:nvPicPr>
-        <p:blipFill>
-          <a:blip r:embed="rId9"/>
-          <a:stretch>
-            <a:fillRect/>
-          </a:stretch>
-        </p:blipFill>
-        <p:spPr>
-          <a:xfrm>
-            <a:off x="9189720" y="4160520"/>
-            <a:ext cx="274320" cy="274320"/>
-          </a:xfrm>
-          <a:prstGeom prst="rect">
-            <a:avLst/>
-          </a:prstGeom>
-        </p:spPr>
-      </p:pic>
-      <p:sp>
-        <p:nvSpPr>
-          <p:cNvPr id="33" name="Text 22"/>
-          <p:cNvSpPr/>
-          <p:nvPr/>
-        </p:nvSpPr>
-        <p:spPr>
-          <a:xfrm>
-            <a:off x="9646920" y="3840480"/>
-            <a:ext cx="1691640" cy="914400"/>
-          </a:xfrm>
-          <a:prstGeom prst="rect">
-            <a:avLst/>
-          </a:prstGeom>
-          <a:noFill/>
-          <a:ln/>
-        </p:spPr>
-        <p:txBody>
-          <a:bodyPr wrap="square" rtlCol="0" anchor="ctr"/>
-          <a:lstStyle/>
-          <a:p>
-            <a:pPr indent="0" marL="0">
-              <a:lnSpc>
-                <a:spcPct val="100000"/>
-              </a:lnSpc>
-              <a:buNone/>
-            </a:pPr>
-            <a:r>
-              <a:rPr lang="en-US" sz="1300" b="1" dirty="0">
-                <a:solidFill>
-                  <a:srgbClr val="17313F"/>
-                </a:solidFill>
-                <a:latin typeface="Microsoft YaHei" pitchFamily="34" charset="0"/>
-                <a:ea typeface="Microsoft YaHei" pitchFamily="34" charset="-122"/>
-                <a:cs typeface="Microsoft YaHei" pitchFamily="34" charset="-120"/>
-              </a:rPr>
-              <a:t>持续学习</a:t>
-            </a:r>
-            <a:endParaRPr lang="en-US" sz="1300" dirty="0"/>
-          </a:p>
-        </p:txBody>
-      </p:sp>
-      <p:sp>
-        <p:nvSpPr>
-          <p:cNvPr id="34" name="Shape 23"/>
-          <p:cNvSpPr/>
-          <p:nvPr/>
-        </p:nvSpPr>
-        <p:spPr>
-          <a:xfrm>
-            <a:off x="548640" y="4983480"/>
-            <a:ext cx="11091672" cy="868680"/>
-          </a:xfrm>
-          <a:prstGeom prst="roundRect">
-            <a:avLst>
-              <a:gd name="adj" fmla="val 12632"/>
-            </a:avLst>
-          </a:prstGeom>
-          <a:solidFill>
-            <a:srgbClr val="F4FAFB"/>
-          </a:solidFill>
-          <a:ln w="15240">
-            <a:solidFill>
-              <a:srgbClr val="1BA39C"/>
-            </a:solidFill>
-            <a:prstDash val="dash"/>
-          </a:ln>
-        </p:spPr>
-      </p:sp>
-      <p:pic>
-        <p:nvPicPr>
-          <p:cNvPr id="35" name="Image 9" descr="preencoded.png">    </p:cNvPr>
-          <p:cNvPicPr>
-            <a:picLocks noChangeAspect="1"/>
-          </p:cNvPicPr>
-          <p:nvPr/>
-        </p:nvPicPr>
-        <p:blipFill>
-          <a:blip r:embed="rId10"/>
-          <a:stretch>
-            <a:fillRect/>
-          </a:stretch>
-        </p:blipFill>
-        <p:spPr>
-          <a:xfrm>
-            <a:off x="822960" y="5212080"/>
-            <a:ext cx="411480" cy="411480"/>
-          </a:xfrm>
-          <a:prstGeom prst="rect">
-            <a:avLst/>
-          </a:prstGeom>
-        </p:spPr>
-      </p:pic>
-      <p:sp>
-        <p:nvSpPr>
-          <p:cNvPr id="36" name="Text 24"/>
-          <p:cNvSpPr/>
-          <p:nvPr/>
-        </p:nvSpPr>
-        <p:spPr>
-          <a:xfrm>
-            <a:off x="1417320" y="5029200"/>
-            <a:ext cx="10058400" cy="777240"/>
-          </a:xfrm>
-          <a:prstGeom prst="rect">
-            <a:avLst/>
-          </a:prstGeom>
-          <a:noFill/>
-          <a:ln/>
-        </p:spPr>
-        <p:txBody>
-          <a:bodyPr wrap="square" rtlCol="0" anchor="ctr"/>
-          <a:lstStyle/>
-          <a:p>
-            <a:pPr indent="0" marL="0">
-              <a:lnSpc>
-                <a:spcPct val="110000"/>
-              </a:lnSpc>
-              <a:buNone/>
-            </a:pPr>
-            <a:r>
-              <a:rPr lang="en-US" sz="1350" b="1" dirty="0">
-                <a:solidFill>
-                  <a:srgbClr val="1BA39C"/>
-                </a:solidFill>
-                <a:latin typeface="Microsoft YaHei" pitchFamily="34" charset="0"/>
-                <a:ea typeface="Microsoft YaHei" pitchFamily="34" charset="-122"/>
-                <a:cs typeface="Microsoft YaHei" pitchFamily="34" charset="-120"/>
-              </a:rPr>
-              <a:t>回流校准：</a:t>
-            </a:r>
-            <a:pPr indent="0" marL="0">
-              <a:lnSpc>
-                <a:spcPct val="110000"/>
-              </a:lnSpc>
-              <a:buNone/>
-            </a:pPr>
-            <a:r>
-              <a:rPr lang="en-US" sz="1350" dirty="0">
-                <a:solidFill>
-                  <a:srgbClr val="17313F"/>
-                </a:solidFill>
-                <a:latin typeface="Microsoft YaHei" pitchFamily="34" charset="0"/>
-                <a:ea typeface="Microsoft YaHei" pitchFamily="34" charset="-122"/>
-                <a:cs typeface="Microsoft YaHei" pitchFamily="34" charset="-120"/>
-              </a:rPr>
-              <a:t>法务每一次复核都被结构化沉淀，反过来校准「该看谁、多急」—— 系统越用越准。</a:t>
-            </a:r>
-            <a:endParaRPr lang="en-US" sz="1350" dirty="0"/>
-          </a:p>
-        </p:txBody>
-      </p:sp>
-      <p:sp>
-        <p:nvSpPr>
-          <p:cNvPr id="37" name="Text 25"/>
+      <p:sp>
+        <p:nvSpPr>
+          <p:cNvPr id="22" name="Text 20"/>
           <p:cNvSpPr/>
           <p:nvPr/>
         </p:nvSpPr>
@@ -4606,7 +4426,7 @@
       </p:sp>
       <p:sp>
         <p:nvSpPr>
-          <p:cNvPr id="38" name="Text 26"/>
+          <p:cNvPr id="23" name="Text 21"/>
           <p:cNvSpPr/>
           <p:nvPr/>
         </p:nvSpPr>
@@ -4708,7 +4528,7 @@
                 <a:ea typeface="Microsoft YaHei" pitchFamily="34" charset="-122"/>
                 <a:cs typeface="Microsoft YaHei" pitchFamily="34" charset="-120"/>
               </a:rPr>
-              <a:t>端到端流程</a:t>
+              <a:t>怎么发现 · 怎么运转</a:t>
             </a:r>
             <a:endParaRPr lang="en-US" sz="1200" dirty="0"/>
           </a:p>
@@ -4747,7 +4567,7 @@
                 <a:ea typeface="Microsoft YaHei" pitchFamily="34" charset="-122"/>
                 <a:cs typeface="Microsoft YaHei" pitchFamily="34" charset="-120"/>
               </a:rPr>
-              <a:t>一笔付款在系统中的流转</a:t>
+              <a:t>两个入口，一个越用越准的闭环</a:t>
             </a:r>
             <a:endParaRPr lang="en-US" sz="3000" dirty="0"/>
           </a:p>
@@ -4761,12 +4581,12 @@
         </p:nvSpPr>
         <p:spPr>
           <a:xfrm>
-            <a:off x="457200" y="1828800"/>
-            <a:ext cx="1554480" cy="914400"/>
+            <a:off x="548640" y="1783080"/>
+            <a:ext cx="5440680" cy="1463040"/>
           </a:xfrm>
           <a:prstGeom prst="roundRect">
             <a:avLst>
-              <a:gd name="adj" fmla="val 10000"/>
+              <a:gd name="adj" fmla="val 7500"/>
             </a:avLst>
           </a:prstGeom>
           <a:solidFill>
@@ -4789,53 +4609,116 @@
       </p:sp>
       <p:sp>
         <p:nvSpPr>
-          <p:cNvPr id="5" name="Text 3"/>
-          <p:cNvSpPr/>
-          <p:nvPr/>
-        </p:nvSpPr>
-        <p:spPr>
-          <a:xfrm>
-            <a:off x="502920" y="1828800"/>
-            <a:ext cx="1463040" cy="914400"/>
-          </a:xfrm>
-          <a:prstGeom prst="rect">
-            <a:avLst/>
-          </a:prstGeom>
-          <a:noFill/>
-          <a:ln/>
-        </p:spPr>
-        <p:txBody>
-          <a:bodyPr wrap="square" rtlCol="0" anchor="ctr"/>
-          <a:lstStyle/>
-          <a:p>
-            <a:pPr algn="ctr" indent="0" marL="0">
+          <p:cNvPr id="5" name="Shape 3"/>
+          <p:cNvSpPr/>
+          <p:nvPr/>
+        </p:nvSpPr>
+        <p:spPr>
+          <a:xfrm>
+            <a:off x="804672" y="2011680"/>
+            <a:ext cx="548640" cy="548640"/>
+          </a:xfrm>
+          <a:prstGeom prst="ellipse">
+            <a:avLst/>
+          </a:prstGeom>
+          <a:solidFill>
+            <a:srgbClr val="1BA39C"/>
+          </a:solidFill>
+          <a:ln/>
+        </p:spPr>
+      </p:sp>
+      <p:pic>
+        <p:nvPicPr>
+          <p:cNvPr id="6" name="Image 0" descr="preencoded.png">    </p:cNvPr>
+          <p:cNvPicPr>
+            <a:picLocks noChangeAspect="1"/>
+          </p:cNvPicPr>
+          <p:nvPr/>
+        </p:nvPicPr>
+        <p:blipFill>
+          <a:blip r:embed="rId1"/>
+          <a:stretch>
+            <a:fillRect/>
+          </a:stretch>
+        </p:blipFill>
+        <p:spPr>
+          <a:xfrm>
+            <a:off x="914400" y="2121408"/>
+            <a:ext cx="329184" cy="329184"/>
+          </a:xfrm>
+          <a:prstGeom prst="rect">
+            <a:avLst/>
+          </a:prstGeom>
+        </p:spPr>
+      </p:pic>
+      <p:sp>
+        <p:nvSpPr>
+          <p:cNvPr id="7" name="Text 4"/>
+          <p:cNvSpPr/>
+          <p:nvPr/>
+        </p:nvSpPr>
+        <p:spPr>
+          <a:xfrm>
+            <a:off x="1508760" y="1993392"/>
+            <a:ext cx="4297680" cy="548640"/>
+          </a:xfrm>
+          <a:prstGeom prst="rect">
+            <a:avLst/>
+          </a:prstGeom>
+          <a:noFill/>
+          <a:ln/>
+        </p:spPr>
+        <p:txBody>
+          <a:bodyPr wrap="square" rtlCol="0" anchor="ctr"/>
+          <a:lstStyle/>
+          <a:p>
+            <a:pPr indent="0" marL="0">
+              <a:buNone/>
+            </a:pPr>
+            <a:r>
+              <a:rPr lang="en-US" sz="1600" b="1" dirty="0">
+                <a:solidFill>
+                  <a:srgbClr val="17313F"/>
+                </a:solidFill>
+                <a:latin typeface="Microsoft YaHei" pitchFamily="34" charset="0"/>
+                <a:ea typeface="Microsoft YaHei" pitchFamily="34" charset="-122"/>
+                <a:cs typeface="Microsoft YaHei" pitchFamily="34" charset="-120"/>
+              </a:rPr>
+              <a:t>入口 A · 付款级</a:t>
+            </a:r>
+            <a:endParaRPr lang="en-US" sz="1600" dirty="0"/>
+          </a:p>
+        </p:txBody>
+      </p:sp>
+      <p:sp>
+        <p:nvSpPr>
+          <p:cNvPr id="8" name="Text 5"/>
+          <p:cNvSpPr/>
+          <p:nvPr/>
+        </p:nvSpPr>
+        <p:spPr>
+          <a:xfrm>
+            <a:off x="841248" y="2578608"/>
+            <a:ext cx="4983480" cy="594360"/>
+          </a:xfrm>
+          <a:prstGeom prst="rect">
+            <a:avLst/>
+          </a:prstGeom>
+          <a:noFill/>
+          <a:ln/>
+        </p:spPr>
+        <p:txBody>
+          <a:bodyPr wrap="square" rtlCol="0" anchor="ctr"/>
+          <a:lstStyle/>
+          <a:p>
+            <a:pPr indent="0" marL="0">
               <a:lnSpc>
-                <a:spcPct val="105000"/>
+                <a:spcPct val="110000"/>
               </a:lnSpc>
               <a:buNone/>
             </a:pPr>
             <a:r>
-              <a:rPr lang="en-US" sz="1300" b="1" dirty="0">
-                <a:solidFill>
-                  <a:srgbClr val="17313F"/>
-                </a:solidFill>
-                <a:latin typeface="Microsoft YaHei" pitchFamily="34" charset="0"/>
-                <a:ea typeface="Microsoft YaHei" pitchFamily="34" charset="-122"/>
-                <a:cs typeface="Microsoft YaHei" pitchFamily="34" charset="-120"/>
-              </a:rPr>
-              <a:t>订单流入</a:t>
-            </a:r>
-            <a:endParaRPr lang="en-US" sz="1300" dirty="0"/>
-          </a:p>
-          <a:p>
-            <a:pPr algn="ctr" indent="0" marL="0">
-              <a:lnSpc>
-                <a:spcPct val="105000"/>
-              </a:lnSpc>
-              <a:buNone/>
-            </a:pPr>
-            <a:r>
-              <a:rPr lang="en-US" sz="1050" dirty="0">
+              <a:rPr lang="en-US" sz="1250" dirty="0">
                 <a:solidFill>
                   <a:srgbClr val="71838F"/>
                 </a:solidFill>
@@ -4843,50 +4726,26 @@
                 <a:ea typeface="Microsoft YaHei" pitchFamily="34" charset="-122"/>
                 <a:cs typeface="Microsoft YaHei" pitchFamily="34" charset="-120"/>
               </a:rPr>
-              <a:t>约 1 万 / 天</a:t>
-            </a:r>
-            <a:endParaRPr lang="en-US" sz="1300" dirty="0"/>
-          </a:p>
-        </p:txBody>
-      </p:sp>
-      <p:sp>
-        <p:nvSpPr>
-          <p:cNvPr id="6" name="Shape 4"/>
-          <p:cNvSpPr/>
-          <p:nvPr/>
-        </p:nvSpPr>
-        <p:spPr>
-          <a:xfrm>
-            <a:off x="2011680" y="2286000"/>
-            <a:ext cx="274320" cy="0"/>
-          </a:xfrm>
-          <a:prstGeom prst="line">
-            <a:avLst/>
-          </a:prstGeom>
-          <a:noFill/>
-          <a:ln w="22225">
-            <a:solidFill>
-              <a:srgbClr val="9FB6C0"/>
-            </a:solidFill>
-            <a:prstDash val="solid"/>
-            <a:tailEnd type="triangle"/>
-          </a:ln>
-        </p:spPr>
-      </p:sp>
-      <p:sp>
-        <p:nvSpPr>
-          <p:cNvPr id="7" name="Shape 5"/>
-          <p:cNvSpPr/>
-          <p:nvPr/>
-        </p:nvSpPr>
-        <p:spPr>
-          <a:xfrm>
-            <a:off x="2286000" y="1828800"/>
-            <a:ext cx="1691640" cy="914400"/>
+              <a:t>单笔命中硬规则：国家不一致、虚假发票、业务 ≠ 品类…</a:t>
+            </a:r>
+            <a:endParaRPr lang="en-US" sz="1250" dirty="0"/>
+          </a:p>
+        </p:txBody>
+      </p:sp>
+      <p:sp>
+        <p:nvSpPr>
+          <p:cNvPr id="9" name="Shape 6"/>
+          <p:cNvSpPr/>
+          <p:nvPr/>
+        </p:nvSpPr>
+        <p:spPr>
+          <a:xfrm>
+            <a:off x="6199632" y="1783080"/>
+            <a:ext cx="5440680" cy="1463040"/>
           </a:xfrm>
           <a:prstGeom prst="roundRect">
             <a:avLst>
-              <a:gd name="adj" fmla="val 10000"/>
+              <a:gd name="adj" fmla="val 7500"/>
             </a:avLst>
           </a:prstGeom>
           <a:solidFill>
@@ -4909,14 +4768,139 @@
       </p:sp>
       <p:sp>
         <p:nvSpPr>
-          <p:cNvPr id="8" name="Text 6"/>
-          <p:cNvSpPr/>
-          <p:nvPr/>
-        </p:nvSpPr>
-        <p:spPr>
-          <a:xfrm>
-            <a:off x="2331720" y="1828800"/>
-            <a:ext cx="1600200" cy="914400"/>
+          <p:cNvPr id="10" name="Shape 7"/>
+          <p:cNvSpPr/>
+          <p:nvPr/>
+        </p:nvSpPr>
+        <p:spPr>
+          <a:xfrm>
+            <a:off x="6455664" y="2011680"/>
+            <a:ext cx="548640" cy="548640"/>
+          </a:xfrm>
+          <a:prstGeom prst="ellipse">
+            <a:avLst/>
+          </a:prstGeom>
+          <a:solidFill>
+            <a:srgbClr val="C9861A"/>
+          </a:solidFill>
+          <a:ln/>
+        </p:spPr>
+      </p:sp>
+      <p:pic>
+        <p:nvPicPr>
+          <p:cNvPr id="11" name="Image 1" descr="preencoded.png">    </p:cNvPr>
+          <p:cNvPicPr>
+            <a:picLocks noChangeAspect="1"/>
+          </p:cNvPicPr>
+          <p:nvPr/>
+        </p:nvPicPr>
+        <p:blipFill>
+          <a:blip r:embed="rId2"/>
+          <a:stretch>
+            <a:fillRect/>
+          </a:stretch>
+        </p:blipFill>
+        <p:spPr>
+          <a:xfrm>
+            <a:off x="6565392" y="2121408"/>
+            <a:ext cx="329184" cy="329184"/>
+          </a:xfrm>
+          <a:prstGeom prst="rect">
+            <a:avLst/>
+          </a:prstGeom>
+        </p:spPr>
+      </p:pic>
+      <p:sp>
+        <p:nvSpPr>
+          <p:cNvPr id="12" name="Text 8"/>
+          <p:cNvSpPr/>
+          <p:nvPr/>
+        </p:nvSpPr>
+        <p:spPr>
+          <a:xfrm>
+            <a:off x="7159752" y="1993392"/>
+            <a:ext cx="4297680" cy="548640"/>
+          </a:xfrm>
+          <a:prstGeom prst="rect">
+            <a:avLst/>
+          </a:prstGeom>
+          <a:noFill/>
+          <a:ln/>
+        </p:spPr>
+        <p:txBody>
+          <a:bodyPr wrap="square" rtlCol="0" anchor="ctr"/>
+          <a:lstStyle/>
+          <a:p>
+            <a:pPr indent="0" marL="0">
+              <a:buNone/>
+            </a:pPr>
+            <a:r>
+              <a:rPr lang="en-US" sz="1600" b="1" dirty="0">
+                <a:solidFill>
+                  <a:srgbClr val="17313F"/>
+                </a:solidFill>
+                <a:latin typeface="Microsoft YaHei" pitchFamily="34" charset="0"/>
+                <a:ea typeface="Microsoft YaHei" pitchFamily="34" charset="-122"/>
+                <a:cs typeface="Microsoft YaHei" pitchFamily="34" charset="-120"/>
+              </a:rPr>
+              <a:t>入口 B · 供应商级</a:t>
+            </a:r>
+            <a:endParaRPr lang="en-US" sz="1600" dirty="0"/>
+          </a:p>
+        </p:txBody>
+      </p:sp>
+      <p:sp>
+        <p:nvSpPr>
+          <p:cNvPr id="13" name="Text 9"/>
+          <p:cNvSpPr/>
+          <p:nvPr/>
+        </p:nvSpPr>
+        <p:spPr>
+          <a:xfrm>
+            <a:off x="6492240" y="2578608"/>
+            <a:ext cx="4983480" cy="594360"/>
+          </a:xfrm>
+          <a:prstGeom prst="rect">
+            <a:avLst/>
+          </a:prstGeom>
+          <a:noFill/>
+          <a:ln/>
+        </p:spPr>
+        <p:txBody>
+          <a:bodyPr wrap="square" rtlCol="0" anchor="ctr"/>
+          <a:lstStyle/>
+          <a:p>
+            <a:pPr indent="0" marL="0">
+              <a:lnSpc>
+                <a:spcPct val="110000"/>
+              </a:lnSpc>
+              <a:buNone/>
+            </a:pPr>
+            <a:r>
+              <a:rPr lang="en-US" sz="1250" dirty="0">
+                <a:solidFill>
+                  <a:srgbClr val="71838F"/>
+                </a:solidFill>
+                <a:latin typeface="Microsoft YaHei" pitchFamily="34" charset="0"/>
+                <a:ea typeface="Microsoft YaHei" pitchFamily="34" charset="-122"/>
+                <a:cs typeface="Microsoft YaHei" pitchFamily="34" charset="-120"/>
+              </a:rPr>
+              <a:t>聚合多笔才看得出：拆分付款、付款突增、多次命中…</a:t>
+            </a:r>
+            <a:endParaRPr lang="en-US" sz="1250" dirty="0"/>
+          </a:p>
+        </p:txBody>
+      </p:sp>
+      <p:sp>
+        <p:nvSpPr>
+          <p:cNvPr id="14" name="Text 10"/>
+          <p:cNvSpPr/>
+          <p:nvPr/>
+        </p:nvSpPr>
+        <p:spPr>
+          <a:xfrm>
+            <a:off x="548640" y="3310128"/>
+            <a:ext cx="10972800" cy="320040"/>
           </a:xfrm>
           <a:prstGeom prst="rect">
             <a:avLst/>
@@ -4929,234 +4913,43 @@
           <a:lstStyle/>
           <a:p>
             <a:pPr algn="ctr" indent="0" marL="0">
-              <a:lnSpc>
-                <a:spcPct val="105000"/>
-              </a:lnSpc>
-              <a:buNone/>
-            </a:pPr>
-            <a:r>
-              <a:rPr lang="en-US" sz="1300" b="1" dirty="0">
-                <a:solidFill>
-                  <a:srgbClr val="17313F"/>
-                </a:solidFill>
-                <a:latin typeface="Microsoft YaHei" pitchFamily="34" charset="0"/>
-                <a:ea typeface="Microsoft YaHei" pitchFamily="34" charset="-122"/>
-                <a:cs typeface="Microsoft YaHei" pitchFamily="34" charset="-120"/>
-              </a:rPr>
-              <a:t>检测 + 分层</a:t>
-            </a:r>
-            <a:endParaRPr lang="en-US" sz="1300" dirty="0"/>
-          </a:p>
-          <a:p>
-            <a:pPr algn="ctr" indent="0" marL="0">
-              <a:lnSpc>
-                <a:spcPct val="105000"/>
-              </a:lnSpc>
-              <a:buNone/>
-            </a:pPr>
-            <a:r>
-              <a:rPr lang="en-US" sz="1050" dirty="0">
-                <a:solidFill>
-                  <a:srgbClr val="71838F"/>
-                </a:solidFill>
-                <a:latin typeface="Microsoft YaHei" pitchFamily="34" charset="0"/>
-                <a:ea typeface="Microsoft YaHei" pitchFamily="34" charset="-122"/>
-                <a:cs typeface="Microsoft YaHei" pitchFamily="34" charset="-120"/>
-              </a:rPr>
-              <a:t>双入口</a:t>
-            </a:r>
-            <a:endParaRPr lang="en-US" sz="1300" dirty="0"/>
-          </a:p>
-        </p:txBody>
-      </p:sp>
-      <p:sp>
-        <p:nvSpPr>
-          <p:cNvPr id="9" name="Shape 7"/>
-          <p:cNvSpPr/>
-          <p:nvPr/>
-        </p:nvSpPr>
-        <p:spPr>
-          <a:xfrm>
-            <a:off x="3977640" y="2286000"/>
-            <a:ext cx="246888" cy="0"/>
-          </a:xfrm>
-          <a:prstGeom prst="line">
-            <a:avLst/>
-          </a:prstGeom>
-          <a:noFill/>
-          <a:ln w="22225">
-            <a:solidFill>
-              <a:srgbClr val="9FB6C0"/>
-            </a:solidFill>
-            <a:prstDash val="solid"/>
-            <a:tailEnd type="triangle"/>
-          </a:ln>
-        </p:spPr>
-      </p:sp>
-      <p:sp>
-        <p:nvSpPr>
-          <p:cNvPr id="10" name="Shape 8"/>
-          <p:cNvSpPr/>
-          <p:nvPr/>
-        </p:nvSpPr>
-        <p:spPr>
-          <a:xfrm>
-            <a:off x="4251960" y="1682496"/>
-            <a:ext cx="1463040" cy="1207008"/>
-          </a:xfrm>
-          <a:prstGeom prst="diamond">
-            <a:avLst/>
-          </a:prstGeom>
-          <a:solidFill>
-            <a:srgbClr val="FFF6E8"/>
-          </a:solidFill>
-          <a:ln w="19050">
-            <a:solidFill>
-              <a:srgbClr val="C9861A"/>
-            </a:solidFill>
-            <a:prstDash val="solid"/>
-          </a:ln>
-        </p:spPr>
-      </p:sp>
-      <p:sp>
-        <p:nvSpPr>
-          <p:cNvPr id="11" name="Text 9"/>
-          <p:cNvSpPr/>
-          <p:nvPr/>
-        </p:nvSpPr>
-        <p:spPr>
-          <a:xfrm>
-            <a:off x="4251960" y="1682496"/>
-            <a:ext cx="1463040" cy="1207008"/>
-          </a:xfrm>
-          <a:prstGeom prst="rect">
-            <a:avLst/>
-          </a:prstGeom>
-          <a:noFill/>
-          <a:ln/>
-        </p:spPr>
-        <p:txBody>
-          <a:bodyPr wrap="square" rtlCol="0" anchor="ctr"/>
-          <a:lstStyle/>
-          <a:p>
-            <a:pPr algn="ctr" indent="0" marL="0">
-              <a:buNone/>
-            </a:pPr>
-            <a:r>
-              <a:rPr lang="en-US" sz="1100" b="1" dirty="0">
-                <a:solidFill>
-                  <a:srgbClr val="8A6115"/>
-                </a:solidFill>
-                <a:latin typeface="Microsoft YaHei" pitchFamily="34" charset="0"/>
-                <a:ea typeface="Microsoft YaHei" pitchFamily="34" charset="-122"/>
-                <a:cs typeface="Microsoft YaHei" pitchFamily="34" charset="-120"/>
-              </a:rPr>
-              <a:t>分层</a:t>
-            </a:r>
-            <a:endParaRPr lang="en-US" sz="1100" dirty="0"/>
-          </a:p>
-          <a:p>
-            <a:pPr algn="ctr" indent="0" marL="0">
-              <a:buNone/>
-            </a:pPr>
-            <a:r>
-              <a:rPr lang="en-US" sz="1100" b="1" dirty="0">
-                <a:solidFill>
-                  <a:srgbClr val="8A6115"/>
-                </a:solidFill>
-                <a:latin typeface="Microsoft YaHei" pitchFamily="34" charset="0"/>
-                <a:ea typeface="Microsoft YaHei" pitchFamily="34" charset="-122"/>
-                <a:cs typeface="Microsoft YaHei" pitchFamily="34" charset="-120"/>
-              </a:rPr>
-              <a:t>等级？</a:t>
-            </a:r>
-            <a:endParaRPr lang="en-US" sz="1100" dirty="0"/>
-          </a:p>
-        </p:txBody>
-      </p:sp>
-      <p:sp>
-        <p:nvSpPr>
-          <p:cNvPr id="12" name="Shape 10"/>
-          <p:cNvSpPr/>
-          <p:nvPr/>
-        </p:nvSpPr>
-        <p:spPr>
-          <a:xfrm>
-            <a:off x="5715000" y="2286000"/>
-            <a:ext cx="274320" cy="0"/>
-          </a:xfrm>
-          <a:prstGeom prst="line">
-            <a:avLst/>
-          </a:prstGeom>
-          <a:noFill/>
-          <a:ln w="22225">
-            <a:solidFill>
-              <a:srgbClr val="9FB6C0"/>
-            </a:solidFill>
-            <a:prstDash val="solid"/>
-            <a:tailEnd type="triangle"/>
-          </a:ln>
-        </p:spPr>
-      </p:sp>
-      <p:sp>
-        <p:nvSpPr>
-          <p:cNvPr id="13" name="Text 11"/>
-          <p:cNvSpPr/>
-          <p:nvPr/>
-        </p:nvSpPr>
-        <p:spPr>
-          <a:xfrm>
-            <a:off x="5440680" y="1481328"/>
-            <a:ext cx="822960" cy="256032"/>
-          </a:xfrm>
-          <a:prstGeom prst="rect">
-            <a:avLst/>
-          </a:prstGeom>
-          <a:noFill/>
-          <a:ln/>
-        </p:spPr>
-        <p:txBody>
-          <a:bodyPr wrap="square" rtlCol="0" anchor="ctr"/>
-          <a:lstStyle/>
-          <a:p>
-            <a:pPr algn="ctr" indent="0" marL="0">
-              <a:buNone/>
-            </a:pPr>
-            <a:r>
-              <a:rPr lang="en-US" sz="950" b="1" dirty="0">
-                <a:solidFill>
-                  <a:srgbClr val="D84B4B"/>
-                </a:solidFill>
-                <a:latin typeface="Microsoft YaHei" pitchFamily="34" charset="0"/>
-                <a:ea typeface="Microsoft YaHei" pitchFamily="34" charset="-122"/>
-                <a:cs typeface="Microsoft YaHei" pitchFamily="34" charset="-120"/>
-              </a:rPr>
-              <a:t>T1 / T2</a:t>
-            </a:r>
-            <a:endParaRPr lang="en-US" sz="950" dirty="0"/>
-          </a:p>
-        </p:txBody>
-      </p:sp>
-      <p:sp>
-        <p:nvSpPr>
-          <p:cNvPr id="14" name="Shape 12"/>
-          <p:cNvSpPr/>
-          <p:nvPr/>
-        </p:nvSpPr>
-        <p:spPr>
-          <a:xfrm>
-            <a:off x="5989320" y="1828800"/>
-            <a:ext cx="1691640" cy="914400"/>
+              <a:buNone/>
+            </a:pPr>
+            <a:r>
+              <a:rPr lang="en-US" sz="1250" i="1" dirty="0">
+                <a:solidFill>
+                  <a:srgbClr val="1BA39C"/>
+                </a:solidFill>
+                <a:latin typeface="Microsoft YaHei" pitchFamily="34" charset="0"/>
+                <a:ea typeface="Microsoft YaHei" pitchFamily="34" charset="-122"/>
+                <a:cs typeface="Microsoft YaHei" pitchFamily="34" charset="-120"/>
+              </a:rPr>
+              <a:t>两入口合并成法务的一份统一告警清单</a:t>
+            </a:r>
+            <a:endParaRPr lang="en-US" sz="1250" dirty="0"/>
+          </a:p>
+        </p:txBody>
+      </p:sp>
+      <p:sp>
+        <p:nvSpPr>
+          <p:cNvPr id="15" name="Shape 11"/>
+          <p:cNvSpPr/>
+          <p:nvPr/>
+        </p:nvSpPr>
+        <p:spPr>
+          <a:xfrm>
+            <a:off x="548640" y="3840480"/>
+            <a:ext cx="2468880" cy="914400"/>
           </a:xfrm>
           <a:prstGeom prst="roundRect">
             <a:avLst>
-              <a:gd name="adj" fmla="val 10000"/>
+              <a:gd name="adj" fmla="val 12000"/>
             </a:avLst>
           </a:prstGeom>
           <a:solidFill>
-            <a:srgbClr val="F4FAFB"/>
+            <a:srgbClr val="FFFFFF"/>
           </a:solidFill>
-          <a:ln w="12700">
+          <a:ln w="15240">
             <a:solidFill>
               <a:srgbClr val="DCE8EE"/>
             </a:solidFill>
@@ -5173,215 +4966,139 @@
       </p:sp>
       <p:sp>
         <p:nvSpPr>
-          <p:cNvPr id="15" name="Text 13"/>
-          <p:cNvSpPr/>
-          <p:nvPr/>
-        </p:nvSpPr>
-        <p:spPr>
-          <a:xfrm>
-            <a:off x="6035040" y="1828800"/>
-            <a:ext cx="1600200" cy="914400"/>
-          </a:xfrm>
-          <a:prstGeom prst="rect">
-            <a:avLst/>
-          </a:prstGeom>
-          <a:noFill/>
-          <a:ln/>
-        </p:spPr>
-        <p:txBody>
-          <a:bodyPr wrap="square" rtlCol="0" anchor="ctr"/>
-          <a:lstStyle/>
-          <a:p>
-            <a:pPr algn="ctr" indent="0" marL="0">
-              <a:lnSpc>
-                <a:spcPct val="105000"/>
-              </a:lnSpc>
-              <a:buNone/>
-            </a:pPr>
-            <a:r>
-              <a:rPr lang="en-US" sz="1300" b="1" dirty="0">
-                <a:solidFill>
-                  <a:srgbClr val="17313F"/>
-                </a:solidFill>
-                <a:latin typeface="Microsoft YaHei" pitchFamily="34" charset="0"/>
-                <a:ea typeface="Microsoft YaHei" pitchFamily="34" charset="-122"/>
-                <a:cs typeface="Microsoft YaHei" pitchFamily="34" charset="-120"/>
-              </a:rPr>
-              <a:t>AI 调查</a:t>
-            </a:r>
-            <a:endParaRPr lang="en-US" sz="1300" dirty="0"/>
-          </a:p>
-          <a:p>
-            <a:pPr algn="ctr" indent="0" marL="0">
-              <a:lnSpc>
-                <a:spcPct val="105000"/>
-              </a:lnSpc>
-              <a:buNone/>
-            </a:pPr>
-            <a:r>
-              <a:rPr lang="en-US" sz="1050" dirty="0">
-                <a:solidFill>
-                  <a:srgbClr val="71838F"/>
-                </a:solidFill>
-                <a:latin typeface="Microsoft YaHei" pitchFamily="34" charset="0"/>
-                <a:ea typeface="Microsoft YaHei" pitchFamily="34" charset="-122"/>
-                <a:cs typeface="Microsoft YaHei" pitchFamily="34" charset="-120"/>
-              </a:rPr>
-              <a:t>生成证据包</a:t>
-            </a:r>
-            <a:endParaRPr lang="en-US" sz="1300" dirty="0"/>
-          </a:p>
-        </p:txBody>
-      </p:sp>
-      <p:sp>
-        <p:nvSpPr>
-          <p:cNvPr id="16" name="Shape 14"/>
-          <p:cNvSpPr/>
-          <p:nvPr/>
-        </p:nvSpPr>
-        <p:spPr>
-          <a:xfrm>
-            <a:off x="7680960" y="2286000"/>
-            <a:ext cx="246888" cy="0"/>
-          </a:xfrm>
-          <a:prstGeom prst="line">
-            <a:avLst/>
-          </a:prstGeom>
-          <a:noFill/>
-          <a:ln w="22225">
+          <p:cNvPr id="16" name="Shape 12"/>
+          <p:cNvSpPr/>
+          <p:nvPr/>
+        </p:nvSpPr>
+        <p:spPr>
+          <a:xfrm>
+            <a:off x="731520" y="4069080"/>
+            <a:ext cx="457200" cy="457200"/>
+          </a:xfrm>
+          <a:prstGeom prst="ellipse">
+            <a:avLst/>
+          </a:prstGeom>
+          <a:solidFill>
+            <a:srgbClr val="F4FAFB"/>
+          </a:solidFill>
+          <a:ln w="16510">
             <a:solidFill>
-              <a:srgbClr val="9FB6C0"/>
-            </a:solidFill>
-            <a:prstDash val="solid"/>
-            <a:tailEnd type="triangle"/>
-          </a:ln>
-        </p:spPr>
-      </p:sp>
-      <p:sp>
-        <p:nvSpPr>
-          <p:cNvPr id="17" name="Shape 15"/>
-          <p:cNvSpPr/>
-          <p:nvPr/>
-        </p:nvSpPr>
-        <p:spPr>
-          <a:xfrm>
-            <a:off x="8001000" y="1682496"/>
-            <a:ext cx="1463040" cy="1207008"/>
-          </a:xfrm>
-          <a:prstGeom prst="diamond">
-            <a:avLst/>
-          </a:prstGeom>
-          <a:solidFill>
-            <a:srgbClr val="FFF6E8"/>
-          </a:solidFill>
-          <a:ln w="19050">
-            <a:solidFill>
-              <a:srgbClr val="C9861A"/>
+              <a:srgbClr val="1BA39C"/>
             </a:solidFill>
             <a:prstDash val="solid"/>
           </a:ln>
         </p:spPr>
       </p:sp>
-      <p:sp>
-        <p:nvSpPr>
-          <p:cNvPr id="18" name="Text 16"/>
-          <p:cNvSpPr/>
-          <p:nvPr/>
-        </p:nvSpPr>
-        <p:spPr>
-          <a:xfrm>
-            <a:off x="8001000" y="1682496"/>
-            <a:ext cx="1463040" cy="1207008"/>
-          </a:xfrm>
-          <a:prstGeom prst="rect">
-            <a:avLst/>
-          </a:prstGeom>
-          <a:noFill/>
-          <a:ln/>
-        </p:spPr>
-        <p:txBody>
-          <a:bodyPr wrap="square" rtlCol="0" anchor="ctr"/>
-          <a:lstStyle/>
-          <a:p>
-            <a:pPr algn="ctr" indent="0" marL="0">
-              <a:buNone/>
-            </a:pPr>
-            <a:r>
-              <a:rPr lang="en-US" sz="1100" b="1" dirty="0">
-                <a:solidFill>
-                  <a:srgbClr val="8A6115"/>
-                </a:solidFill>
-                <a:latin typeface="Microsoft YaHei" pitchFamily="34" charset="0"/>
-                <a:ea typeface="Microsoft YaHei" pitchFamily="34" charset="-122"/>
-                <a:cs typeface="Microsoft YaHei" pitchFamily="34" charset="-120"/>
-              </a:rPr>
-              <a:t>是否</a:t>
-            </a:r>
-            <a:endParaRPr lang="en-US" sz="1100" dirty="0"/>
-          </a:p>
-          <a:p>
-            <a:pPr algn="ctr" indent="0" marL="0">
-              <a:buNone/>
-            </a:pPr>
-            <a:r>
-              <a:rPr lang="en-US" sz="1100" b="1" dirty="0">
-                <a:solidFill>
-                  <a:srgbClr val="8A6115"/>
-                </a:solidFill>
-                <a:latin typeface="Microsoft YaHei" pitchFamily="34" charset="0"/>
-                <a:ea typeface="Microsoft YaHei" pitchFamily="34" charset="-122"/>
-                <a:cs typeface="Microsoft YaHei" pitchFamily="34" charset="-120"/>
-              </a:rPr>
-              <a:t>洗钱？</a:t>
-            </a:r>
-            <a:endParaRPr lang="en-US" sz="1100" dirty="0"/>
-          </a:p>
-        </p:txBody>
-      </p:sp>
-      <p:sp>
-        <p:nvSpPr>
-          <p:cNvPr id="19" name="Shape 17"/>
-          <p:cNvSpPr/>
-          <p:nvPr/>
-        </p:nvSpPr>
-        <p:spPr>
-          <a:xfrm>
-            <a:off x="9464040" y="2286000"/>
-            <a:ext cx="246888" cy="0"/>
-          </a:xfrm>
-          <a:prstGeom prst="line">
-            <a:avLst/>
-          </a:prstGeom>
-          <a:noFill/>
-          <a:ln w="22225">
-            <a:solidFill>
-              <a:srgbClr val="9FB6C0"/>
-            </a:solidFill>
-            <a:prstDash val="solid"/>
-            <a:tailEnd type="triangle"/>
-          </a:ln>
-        </p:spPr>
-      </p:sp>
-      <p:sp>
-        <p:nvSpPr>
-          <p:cNvPr id="20" name="Shape 18"/>
-          <p:cNvSpPr/>
-          <p:nvPr/>
-        </p:nvSpPr>
-        <p:spPr>
-          <a:xfrm>
-            <a:off x="9710928" y="1828800"/>
-            <a:ext cx="1783080" cy="914400"/>
+      <p:pic>
+        <p:nvPicPr>
+          <p:cNvPr id="17" name="Image 2" descr="preencoded.png">    </p:cNvPr>
+          <p:cNvPicPr>
+            <a:picLocks noChangeAspect="1"/>
+          </p:cNvPicPr>
+          <p:nvPr/>
+        </p:nvPicPr>
+        <p:blipFill>
+          <a:blip r:embed="rId3"/>
+          <a:stretch>
+            <a:fillRect/>
+          </a:stretch>
+        </p:blipFill>
+        <p:spPr>
+          <a:xfrm>
+            <a:off x="822960" y="4160520"/>
+            <a:ext cx="274320" cy="274320"/>
+          </a:xfrm>
+          <a:prstGeom prst="rect">
+            <a:avLst/>
+          </a:prstGeom>
+        </p:spPr>
+      </p:pic>
+      <p:sp>
+        <p:nvSpPr>
+          <p:cNvPr id="18" name="Text 13"/>
+          <p:cNvSpPr/>
+          <p:nvPr/>
+        </p:nvSpPr>
+        <p:spPr>
+          <a:xfrm>
+            <a:off x="1280160" y="3840480"/>
+            <a:ext cx="1691640" cy="914400"/>
+          </a:xfrm>
+          <a:prstGeom prst="rect">
+            <a:avLst/>
+          </a:prstGeom>
+          <a:noFill/>
+          <a:ln/>
+        </p:spPr>
+        <p:txBody>
+          <a:bodyPr wrap="square" rtlCol="0" anchor="ctr"/>
+          <a:lstStyle/>
+          <a:p>
+            <a:pPr indent="0" marL="0">
+              <a:lnSpc>
+                <a:spcPct val="100000"/>
+              </a:lnSpc>
+              <a:buNone/>
+            </a:pPr>
+            <a:r>
+              <a:rPr lang="en-US" sz="1300" b="1" dirty="0">
+                <a:solidFill>
+                  <a:srgbClr val="17313F"/>
+                </a:solidFill>
+                <a:latin typeface="Microsoft YaHei" pitchFamily="34" charset="0"/>
+                <a:ea typeface="Microsoft YaHei" pitchFamily="34" charset="-122"/>
+                <a:cs typeface="Microsoft YaHei" pitchFamily="34" charset="-120"/>
+              </a:rPr>
+              <a:t>检测 + 定级</a:t>
+            </a:r>
+            <a:endParaRPr lang="en-US" sz="1300" dirty="0"/>
+          </a:p>
+        </p:txBody>
+      </p:sp>
+      <p:pic>
+        <p:nvPicPr>
+          <p:cNvPr id="19" name="Image 3" descr="preencoded.png">    </p:cNvPr>
+          <p:cNvPicPr>
+            <a:picLocks noChangeAspect="1"/>
+          </p:cNvPicPr>
+          <p:nvPr/>
+        </p:nvPicPr>
+        <p:blipFill>
+          <a:blip r:embed="rId4"/>
+          <a:stretch>
+            <a:fillRect/>
+          </a:stretch>
+        </p:blipFill>
+        <p:spPr>
+          <a:xfrm>
+            <a:off x="3072384" y="4160520"/>
+            <a:ext cx="237744" cy="237744"/>
+          </a:xfrm>
+          <a:prstGeom prst="rect">
+            <a:avLst/>
+          </a:prstGeom>
+        </p:spPr>
+      </p:pic>
+      <p:sp>
+        <p:nvSpPr>
+          <p:cNvPr id="20" name="Shape 14"/>
+          <p:cNvSpPr/>
+          <p:nvPr/>
+        </p:nvSpPr>
+        <p:spPr>
+          <a:xfrm>
+            <a:off x="3337560" y="3840480"/>
+            <a:ext cx="2468880" cy="914400"/>
           </a:xfrm>
           <a:prstGeom prst="roundRect">
             <a:avLst>
-              <a:gd name="adj" fmla="val 10000"/>
+              <a:gd name="adj" fmla="val 12000"/>
             </a:avLst>
           </a:prstGeom>
           <a:solidFill>
-            <a:srgbClr val="F4FAFB"/>
+            <a:srgbClr val="FFFFFF"/>
           </a:solidFill>
-          <a:ln w="12700">
+          <a:ln w="15240">
             <a:solidFill>
               <a:srgbClr val="DCE8EE"/>
             </a:solidFill>
@@ -5398,149 +5115,139 @@
       </p:sp>
       <p:sp>
         <p:nvSpPr>
-          <p:cNvPr id="21" name="Text 19"/>
-          <p:cNvSpPr/>
-          <p:nvPr/>
-        </p:nvSpPr>
-        <p:spPr>
-          <a:xfrm>
-            <a:off x="9756648" y="1828800"/>
-            <a:ext cx="1691640" cy="914400"/>
-          </a:xfrm>
-          <a:prstGeom prst="rect">
-            <a:avLst/>
-          </a:prstGeom>
-          <a:noFill/>
-          <a:ln/>
-        </p:spPr>
-        <p:txBody>
-          <a:bodyPr wrap="square" rtlCol="0" anchor="ctr"/>
-          <a:lstStyle/>
-          <a:p>
-            <a:pPr algn="ctr" indent="0" marL="0">
-              <a:lnSpc>
-                <a:spcPct val="105000"/>
-              </a:lnSpc>
-              <a:buNone/>
-            </a:pPr>
-            <a:r>
-              <a:rPr lang="en-US" sz="1300" b="1" dirty="0">
-                <a:solidFill>
-                  <a:srgbClr val="17313F"/>
-                </a:solidFill>
-                <a:latin typeface="Microsoft YaHei" pitchFamily="34" charset="0"/>
-                <a:ea typeface="Microsoft YaHei" pitchFamily="34" charset="-122"/>
-                <a:cs typeface="Microsoft YaHei" pitchFamily="34" charset="-120"/>
-              </a:rPr>
-              <a:t>进化与学习</a:t>
-            </a:r>
-            <a:endParaRPr lang="en-US" sz="1300" dirty="0"/>
-          </a:p>
-          <a:p>
-            <a:pPr algn="ctr" indent="0" marL="0">
-              <a:lnSpc>
-                <a:spcPct val="105000"/>
-              </a:lnSpc>
-              <a:buNone/>
-            </a:pPr>
-            <a:r>
-              <a:rPr lang="en-US" sz="1050" dirty="0">
-                <a:solidFill>
-                  <a:srgbClr val="71838F"/>
-                </a:solidFill>
-                <a:latin typeface="Microsoft YaHei" pitchFamily="34" charset="0"/>
-                <a:ea typeface="Microsoft YaHei" pitchFamily="34" charset="-122"/>
-                <a:cs typeface="Microsoft YaHei" pitchFamily="34" charset="-120"/>
-              </a:rPr>
-              <a:t>校准 · 发现</a:t>
-            </a:r>
-            <a:endParaRPr lang="en-US" sz="1300" dirty="0"/>
-          </a:p>
-        </p:txBody>
-      </p:sp>
-      <p:sp>
-        <p:nvSpPr>
-          <p:cNvPr id="22" name="Shape 20"/>
-          <p:cNvSpPr/>
-          <p:nvPr/>
-        </p:nvSpPr>
-        <p:spPr>
-          <a:xfrm>
-            <a:off x="4983480" y="2889504"/>
-            <a:ext cx="0" cy="539496"/>
-          </a:xfrm>
-          <a:prstGeom prst="line">
-            <a:avLst/>
-          </a:prstGeom>
-          <a:noFill/>
-          <a:ln w="22225">
-            <a:solidFill>
-              <a:srgbClr val="9FB6C0"/>
-            </a:solidFill>
-            <a:prstDash val="solid"/>
-            <a:tailEnd type="triangle"/>
-          </a:ln>
-        </p:spPr>
-      </p:sp>
-      <p:sp>
-        <p:nvSpPr>
-          <p:cNvPr id="23" name="Text 21"/>
-          <p:cNvSpPr/>
-          <p:nvPr/>
-        </p:nvSpPr>
-        <p:spPr>
-          <a:xfrm>
-            <a:off x="5074920" y="2907792"/>
-            <a:ext cx="548640" cy="256032"/>
-          </a:xfrm>
-          <a:prstGeom prst="rect">
-            <a:avLst/>
-          </a:prstGeom>
-          <a:noFill/>
-          <a:ln/>
-        </p:spPr>
-        <p:txBody>
-          <a:bodyPr wrap="square" rtlCol="0" anchor="ctr"/>
-          <a:lstStyle/>
-          <a:p>
-            <a:pPr indent="0" marL="0">
-              <a:buNone/>
-            </a:pPr>
-            <a:r>
-              <a:rPr lang="en-US" sz="950" b="1" dirty="0">
-                <a:solidFill>
-                  <a:srgbClr val="5D8AA8"/>
-                </a:solidFill>
-                <a:latin typeface="Microsoft YaHei" pitchFamily="34" charset="0"/>
-                <a:ea typeface="Microsoft YaHei" pitchFamily="34" charset="-122"/>
-                <a:cs typeface="Microsoft YaHei" pitchFamily="34" charset="-120"/>
-              </a:rPr>
-              <a:t>T3</a:t>
-            </a:r>
-            <a:endParaRPr lang="en-US" sz="950" dirty="0"/>
-          </a:p>
-        </p:txBody>
-      </p:sp>
-      <p:sp>
-        <p:nvSpPr>
-          <p:cNvPr id="24" name="Shape 22"/>
-          <p:cNvSpPr/>
-          <p:nvPr/>
-        </p:nvSpPr>
-        <p:spPr>
-          <a:xfrm>
-            <a:off x="4069080" y="3429000"/>
-            <a:ext cx="1828800" cy="685800"/>
-          </a:xfrm>
-          <a:prstGeom prst="roundRect">
-            <a:avLst>
-              <a:gd name="adj" fmla="val 13333"/>
-            </a:avLst>
+          <p:cNvPr id="21" name="Shape 15"/>
+          <p:cNvSpPr/>
+          <p:nvPr/>
+        </p:nvSpPr>
+        <p:spPr>
+          <a:xfrm>
+            <a:off x="3520440" y="4069080"/>
+            <a:ext cx="457200" cy="457200"/>
+          </a:xfrm>
+          <a:prstGeom prst="ellipse">
+            <a:avLst/>
           </a:prstGeom>
           <a:solidFill>
             <a:srgbClr val="F4FAFB"/>
           </a:solidFill>
-          <a:ln w="12700">
+          <a:ln w="16510">
+            <a:solidFill>
+              <a:srgbClr val="1BA39C"/>
+            </a:solidFill>
+            <a:prstDash val="solid"/>
+          </a:ln>
+        </p:spPr>
+      </p:sp>
+      <p:pic>
+        <p:nvPicPr>
+          <p:cNvPr id="22" name="Image 4" descr="preencoded.png">    </p:cNvPr>
+          <p:cNvPicPr>
+            <a:picLocks noChangeAspect="1"/>
+          </p:cNvPicPr>
+          <p:nvPr/>
+        </p:nvPicPr>
+        <p:blipFill>
+          <a:blip r:embed="rId5"/>
+          <a:stretch>
+            <a:fillRect/>
+          </a:stretch>
+        </p:blipFill>
+        <p:spPr>
+          <a:xfrm>
+            <a:off x="3611880" y="4160520"/>
+            <a:ext cx="274320" cy="274320"/>
+          </a:xfrm>
+          <a:prstGeom prst="rect">
+            <a:avLst/>
+          </a:prstGeom>
+        </p:spPr>
+      </p:pic>
+      <p:sp>
+        <p:nvSpPr>
+          <p:cNvPr id="23" name="Text 16"/>
+          <p:cNvSpPr/>
+          <p:nvPr/>
+        </p:nvSpPr>
+        <p:spPr>
+          <a:xfrm>
+            <a:off x="4069080" y="3840480"/>
+            <a:ext cx="1691640" cy="914400"/>
+          </a:xfrm>
+          <a:prstGeom prst="rect">
+            <a:avLst/>
+          </a:prstGeom>
+          <a:noFill/>
+          <a:ln/>
+        </p:spPr>
+        <p:txBody>
+          <a:bodyPr wrap="square" rtlCol="0" anchor="ctr"/>
+          <a:lstStyle/>
+          <a:p>
+            <a:pPr indent="0" marL="0">
+              <a:lnSpc>
+                <a:spcPct val="100000"/>
+              </a:lnSpc>
+              <a:buNone/>
+            </a:pPr>
+            <a:r>
+              <a:rPr lang="en-US" sz="1300" b="1" dirty="0">
+                <a:solidFill>
+                  <a:srgbClr val="17313F"/>
+                </a:solidFill>
+                <a:latin typeface="Microsoft YaHei" pitchFamily="34" charset="0"/>
+                <a:ea typeface="Microsoft YaHei" pitchFamily="34" charset="-122"/>
+                <a:cs typeface="Microsoft YaHei" pitchFamily="34" charset="-120"/>
+              </a:rPr>
+              <a:t>AI 调查</a:t>
+            </a:r>
+            <a:endParaRPr lang="en-US" sz="1300" dirty="0"/>
+          </a:p>
+        </p:txBody>
+      </p:sp>
+      <p:pic>
+        <p:nvPicPr>
+          <p:cNvPr id="24" name="Image 5" descr="preencoded.png">    </p:cNvPr>
+          <p:cNvPicPr>
+            <a:picLocks noChangeAspect="1"/>
+          </p:cNvPicPr>
+          <p:nvPr/>
+        </p:nvPicPr>
+        <p:blipFill>
+          <a:blip r:embed="rId6"/>
+          <a:stretch>
+            <a:fillRect/>
+          </a:stretch>
+        </p:blipFill>
+        <p:spPr>
+          <a:xfrm>
+            <a:off x="5861304" y="4160520"/>
+            <a:ext cx="237744" cy="237744"/>
+          </a:xfrm>
+          <a:prstGeom prst="rect">
+            <a:avLst/>
+          </a:prstGeom>
+        </p:spPr>
+      </p:pic>
+      <p:sp>
+        <p:nvSpPr>
+          <p:cNvPr id="25" name="Shape 17"/>
+          <p:cNvSpPr/>
+          <p:nvPr/>
+        </p:nvSpPr>
+        <p:spPr>
+          <a:xfrm>
+            <a:off x="6126480" y="3840480"/>
+            <a:ext cx="2468880" cy="914400"/>
+          </a:xfrm>
+          <a:prstGeom prst="roundRect">
+            <a:avLst>
+              <a:gd name="adj" fmla="val 12000"/>
+            </a:avLst>
+          </a:prstGeom>
+          <a:solidFill>
+            <a:srgbClr val="FFFFFF"/>
+          </a:solidFill>
+          <a:ln w="15240">
             <a:solidFill>
               <a:srgbClr val="DCE8EE"/>
             </a:solidFill>
@@ -5557,129 +5264,139 @@
       </p:sp>
       <p:sp>
         <p:nvSpPr>
-          <p:cNvPr id="25" name="Text 23"/>
-          <p:cNvSpPr/>
-          <p:nvPr/>
-        </p:nvSpPr>
-        <p:spPr>
-          <a:xfrm>
-            <a:off x="4114800" y="3429000"/>
-            <a:ext cx="1737360" cy="685800"/>
-          </a:xfrm>
-          <a:prstGeom prst="rect">
-            <a:avLst/>
-          </a:prstGeom>
-          <a:noFill/>
-          <a:ln/>
-        </p:spPr>
-        <p:txBody>
-          <a:bodyPr wrap="square" rtlCol="0" anchor="ctr"/>
-          <a:lstStyle/>
-          <a:p>
-            <a:pPr algn="ctr" indent="0" marL="0">
-              <a:lnSpc>
-                <a:spcPct val="105000"/>
-              </a:lnSpc>
-              <a:buNone/>
-            </a:pPr>
-            <a:r>
-              <a:rPr lang="en-US" sz="1300" b="1" dirty="0">
-                <a:solidFill>
-                  <a:srgbClr val="17313F"/>
-                </a:solidFill>
-                <a:latin typeface="Microsoft YaHei" pitchFamily="34" charset="0"/>
-                <a:ea typeface="Microsoft YaHei" pitchFamily="34" charset="-122"/>
-                <a:cs typeface="Microsoft YaHei" pitchFamily="34" charset="-120"/>
-              </a:rPr>
-              <a:t>批量评分排序</a:t>
-            </a:r>
-            <a:endParaRPr lang="en-US" sz="1300" dirty="0"/>
-          </a:p>
-        </p:txBody>
-      </p:sp>
-      <p:sp>
-        <p:nvSpPr>
-          <p:cNvPr id="26" name="Shape 24"/>
-          <p:cNvSpPr/>
-          <p:nvPr/>
-        </p:nvSpPr>
-        <p:spPr>
-          <a:xfrm>
-            <a:off x="8732520" y="2889504"/>
-            <a:ext cx="0" cy="539496"/>
-          </a:xfrm>
-          <a:prstGeom prst="line">
-            <a:avLst/>
-          </a:prstGeom>
-          <a:noFill/>
-          <a:ln w="22225">
-            <a:solidFill>
-              <a:srgbClr val="9FB6C0"/>
-            </a:solidFill>
-            <a:prstDash val="solid"/>
-            <a:tailEnd type="triangle"/>
-          </a:ln>
-        </p:spPr>
-      </p:sp>
-      <p:sp>
-        <p:nvSpPr>
-          <p:cNvPr id="27" name="Text 25"/>
-          <p:cNvSpPr/>
-          <p:nvPr/>
-        </p:nvSpPr>
-        <p:spPr>
-          <a:xfrm>
-            <a:off x="8796528" y="2907792"/>
-            <a:ext cx="914400" cy="256032"/>
-          </a:xfrm>
-          <a:prstGeom prst="rect">
-            <a:avLst/>
-          </a:prstGeom>
-          <a:noFill/>
-          <a:ln/>
-        </p:spPr>
-        <p:txBody>
-          <a:bodyPr wrap="square" rtlCol="0" anchor="ctr"/>
-          <a:lstStyle/>
-          <a:p>
-            <a:pPr indent="0" marL="0">
-              <a:buNone/>
-            </a:pPr>
-            <a:r>
-              <a:rPr lang="en-US" sz="950" b="1" dirty="0">
-                <a:solidFill>
-                  <a:srgbClr val="22875A"/>
-                </a:solidFill>
-                <a:latin typeface="Microsoft YaHei" pitchFamily="34" charset="0"/>
-                <a:ea typeface="Microsoft YaHei" pitchFamily="34" charset="-122"/>
-                <a:cs typeface="Microsoft YaHei" pitchFamily="34" charset="-120"/>
-              </a:rPr>
-              <a:t>是 / 否</a:t>
-            </a:r>
-            <a:endParaRPr lang="en-US" sz="950" dirty="0"/>
-          </a:p>
-        </p:txBody>
-      </p:sp>
-      <p:sp>
-        <p:nvSpPr>
-          <p:cNvPr id="28" name="Shape 26"/>
-          <p:cNvSpPr/>
-          <p:nvPr/>
-        </p:nvSpPr>
-        <p:spPr>
-          <a:xfrm>
-            <a:off x="7772400" y="3429000"/>
-            <a:ext cx="1920240" cy="685800"/>
-          </a:xfrm>
-          <a:prstGeom prst="roundRect">
-            <a:avLst>
-              <a:gd name="adj" fmla="val 13333"/>
-            </a:avLst>
+          <p:cNvPr id="26" name="Shape 18"/>
+          <p:cNvSpPr/>
+          <p:nvPr/>
+        </p:nvSpPr>
+        <p:spPr>
+          <a:xfrm>
+            <a:off x="6309360" y="4069080"/>
+            <a:ext cx="457200" cy="457200"/>
+          </a:xfrm>
+          <a:prstGeom prst="ellipse">
+            <a:avLst/>
           </a:prstGeom>
           <a:solidFill>
             <a:srgbClr val="F4FAFB"/>
           </a:solidFill>
-          <a:ln w="12700">
+          <a:ln w="16510">
+            <a:solidFill>
+              <a:srgbClr val="1BA39C"/>
+            </a:solidFill>
+            <a:prstDash val="solid"/>
+          </a:ln>
+        </p:spPr>
+      </p:sp>
+      <p:pic>
+        <p:nvPicPr>
+          <p:cNvPr id="27" name="Image 6" descr="preencoded.png">    </p:cNvPr>
+          <p:cNvPicPr>
+            <a:picLocks noChangeAspect="1"/>
+          </p:cNvPicPr>
+          <p:nvPr/>
+        </p:nvPicPr>
+        <p:blipFill>
+          <a:blip r:embed="rId7"/>
+          <a:stretch>
+            <a:fillRect/>
+          </a:stretch>
+        </p:blipFill>
+        <p:spPr>
+          <a:xfrm>
+            <a:off x="6400800" y="4160520"/>
+            <a:ext cx="274320" cy="274320"/>
+          </a:xfrm>
+          <a:prstGeom prst="rect">
+            <a:avLst/>
+          </a:prstGeom>
+        </p:spPr>
+      </p:pic>
+      <p:sp>
+        <p:nvSpPr>
+          <p:cNvPr id="28" name="Text 19"/>
+          <p:cNvSpPr/>
+          <p:nvPr/>
+        </p:nvSpPr>
+        <p:spPr>
+          <a:xfrm>
+            <a:off x="6858000" y="3840480"/>
+            <a:ext cx="1691640" cy="914400"/>
+          </a:xfrm>
+          <a:prstGeom prst="rect">
+            <a:avLst/>
+          </a:prstGeom>
+          <a:noFill/>
+          <a:ln/>
+        </p:spPr>
+        <p:txBody>
+          <a:bodyPr wrap="square" rtlCol="0" anchor="ctr"/>
+          <a:lstStyle/>
+          <a:p>
+            <a:pPr indent="0" marL="0">
+              <a:lnSpc>
+                <a:spcPct val="100000"/>
+              </a:lnSpc>
+              <a:buNone/>
+            </a:pPr>
+            <a:r>
+              <a:rPr lang="en-US" sz="1300" b="1" dirty="0">
+                <a:solidFill>
+                  <a:srgbClr val="17313F"/>
+                </a:solidFill>
+                <a:latin typeface="Microsoft YaHei" pitchFamily="34" charset="0"/>
+                <a:ea typeface="Microsoft YaHei" pitchFamily="34" charset="-122"/>
+                <a:cs typeface="Microsoft YaHei" pitchFamily="34" charset="-120"/>
+              </a:rPr>
+              <a:t>法务裁决</a:t>
+            </a:r>
+            <a:endParaRPr lang="en-US" sz="1300" dirty="0"/>
+          </a:p>
+        </p:txBody>
+      </p:sp>
+      <p:pic>
+        <p:nvPicPr>
+          <p:cNvPr id="29" name="Image 7" descr="preencoded.png">    </p:cNvPr>
+          <p:cNvPicPr>
+            <a:picLocks noChangeAspect="1"/>
+          </p:cNvPicPr>
+          <p:nvPr/>
+        </p:nvPicPr>
+        <p:blipFill>
+          <a:blip r:embed="rId8"/>
+          <a:stretch>
+            <a:fillRect/>
+          </a:stretch>
+        </p:blipFill>
+        <p:spPr>
+          <a:xfrm>
+            <a:off x="8650224" y="4160520"/>
+            <a:ext cx="237744" cy="237744"/>
+          </a:xfrm>
+          <a:prstGeom prst="rect">
+            <a:avLst/>
+          </a:prstGeom>
+        </p:spPr>
+      </p:pic>
+      <p:sp>
+        <p:nvSpPr>
+          <p:cNvPr id="30" name="Shape 20"/>
+          <p:cNvSpPr/>
+          <p:nvPr/>
+        </p:nvSpPr>
+        <p:spPr>
+          <a:xfrm>
+            <a:off x="8915400" y="3840480"/>
+            <a:ext cx="2468880" cy="914400"/>
+          </a:xfrm>
+          <a:prstGeom prst="roundRect">
+            <a:avLst>
+              <a:gd name="adj" fmla="val 12000"/>
+            </a:avLst>
+          </a:prstGeom>
+          <a:solidFill>
+            <a:srgbClr val="FFFFFF"/>
+          </a:solidFill>
+          <a:ln w="15240">
             <a:solidFill>
               <a:srgbClr val="DCE8EE"/>
             </a:solidFill>
@@ -5696,345 +5413,115 @@
       </p:sp>
       <p:sp>
         <p:nvSpPr>
-          <p:cNvPr id="29" name="Text 27"/>
-          <p:cNvSpPr/>
-          <p:nvPr/>
-        </p:nvSpPr>
-        <p:spPr>
-          <a:xfrm>
-            <a:off x="7818120" y="3429000"/>
-            <a:ext cx="1828800" cy="685800"/>
-          </a:xfrm>
-          <a:prstGeom prst="rect">
-            <a:avLst/>
-          </a:prstGeom>
-          <a:noFill/>
-          <a:ln/>
-        </p:spPr>
-        <p:txBody>
-          <a:bodyPr wrap="square" rtlCol="0" anchor="ctr"/>
-          <a:lstStyle/>
-          <a:p>
-            <a:pPr algn="ctr" indent="0" marL="0">
-              <a:lnSpc>
-                <a:spcPct val="105000"/>
-              </a:lnSpc>
-              <a:buNone/>
-            </a:pPr>
-            <a:r>
-              <a:rPr lang="en-US" sz="1300" b="1" dirty="0">
-                <a:solidFill>
-                  <a:srgbClr val="17313F"/>
-                </a:solidFill>
-                <a:latin typeface="Microsoft YaHei" pitchFamily="34" charset="0"/>
-                <a:ea typeface="Microsoft YaHei" pitchFamily="34" charset="-122"/>
-                <a:cs typeface="Microsoft YaHei" pitchFamily="34" charset="-120"/>
-              </a:rPr>
-              <a:t>记录结论 → 学习</a:t>
-            </a:r>
-            <a:endParaRPr lang="en-US" sz="1300" dirty="0"/>
-          </a:p>
-        </p:txBody>
-      </p:sp>
-      <p:sp>
-        <p:nvSpPr>
-          <p:cNvPr id="30" name="Shape 28"/>
-          <p:cNvSpPr/>
-          <p:nvPr/>
-        </p:nvSpPr>
-        <p:spPr>
-          <a:xfrm>
-            <a:off x="10602468" y="2743200"/>
-            <a:ext cx="0" cy="1591056"/>
-          </a:xfrm>
-          <a:prstGeom prst="line">
-            <a:avLst/>
-          </a:prstGeom>
-          <a:noFill/>
-          <a:ln w="22225">
+          <p:cNvPr id="31" name="Shape 21"/>
+          <p:cNvSpPr/>
+          <p:nvPr/>
+        </p:nvSpPr>
+        <p:spPr>
+          <a:xfrm>
+            <a:off x="9098280" y="4069080"/>
+            <a:ext cx="457200" cy="457200"/>
+          </a:xfrm>
+          <a:prstGeom prst="ellipse">
+            <a:avLst/>
+          </a:prstGeom>
+          <a:solidFill>
+            <a:srgbClr val="F4FAFB"/>
+          </a:solidFill>
+          <a:ln w="16510">
             <a:solidFill>
-              <a:srgbClr val="9FB6C0"/>
-            </a:solidFill>
-            <a:prstDash val="solid"/>
-            <a:tailEnd type="triangle"/>
-          </a:ln>
-        </p:spPr>
-      </p:sp>
-      <p:sp>
-        <p:nvSpPr>
-          <p:cNvPr id="31" name="Shape 29"/>
-          <p:cNvSpPr/>
-          <p:nvPr/>
-        </p:nvSpPr>
-        <p:spPr>
-          <a:xfrm>
-            <a:off x="9870948" y="4334256"/>
-            <a:ext cx="1463040" cy="1207008"/>
-          </a:xfrm>
-          <a:prstGeom prst="diamond">
-            <a:avLst/>
-          </a:prstGeom>
-          <a:solidFill>
-            <a:srgbClr val="FFF6E8"/>
-          </a:solidFill>
-          <a:ln w="19050">
-            <a:solidFill>
-              <a:srgbClr val="C9861A"/>
+              <a:srgbClr val="1BA39C"/>
             </a:solidFill>
             <a:prstDash val="solid"/>
           </a:ln>
         </p:spPr>
       </p:sp>
-      <p:sp>
-        <p:nvSpPr>
-          <p:cNvPr id="32" name="Text 30"/>
-          <p:cNvSpPr/>
-          <p:nvPr/>
-        </p:nvSpPr>
-        <p:spPr>
-          <a:xfrm>
-            <a:off x="9870948" y="4334256"/>
-            <a:ext cx="1463040" cy="1207008"/>
-          </a:xfrm>
-          <a:prstGeom prst="rect">
-            <a:avLst/>
-          </a:prstGeom>
-          <a:noFill/>
-          <a:ln/>
-        </p:spPr>
-        <p:txBody>
-          <a:bodyPr wrap="square" rtlCol="0" anchor="ctr"/>
-          <a:lstStyle/>
-          <a:p>
-            <a:pPr algn="ctr" indent="0" marL="0">
-              <a:buNone/>
-            </a:pPr>
-            <a:r>
-              <a:rPr lang="en-US" sz="1100" b="1" dirty="0">
-                <a:solidFill>
-                  <a:srgbClr val="8A6115"/>
-                </a:solidFill>
-                <a:latin typeface="Microsoft YaHei" pitchFamily="34" charset="0"/>
-                <a:ea typeface="Microsoft YaHei" pitchFamily="34" charset="-122"/>
-                <a:cs typeface="Microsoft YaHei" pitchFamily="34" charset="-120"/>
-              </a:rPr>
-              <a:t>样本 ≥ N</a:t>
-            </a:r>
-            <a:endParaRPr lang="en-US" sz="1100" dirty="0"/>
-          </a:p>
-          <a:p>
-            <a:pPr algn="ctr" indent="0" marL="0">
-              <a:buNone/>
-            </a:pPr>
-            <a:r>
-              <a:rPr lang="en-US" sz="1100" b="1" dirty="0">
-                <a:solidFill>
-                  <a:srgbClr val="8A6115"/>
-                </a:solidFill>
-                <a:latin typeface="Microsoft YaHei" pitchFamily="34" charset="0"/>
-                <a:ea typeface="Microsoft YaHei" pitchFamily="34" charset="-122"/>
-                <a:cs typeface="Microsoft YaHei" pitchFamily="34" charset="-120"/>
-              </a:rPr>
-              <a:t>且 PPV 达标？</a:t>
-            </a:r>
-            <a:endParaRPr lang="en-US" sz="1100" dirty="0"/>
-          </a:p>
-        </p:txBody>
-      </p:sp>
-      <p:sp>
-        <p:nvSpPr>
-          <p:cNvPr id="33" name="Shape 31"/>
-          <p:cNvSpPr/>
-          <p:nvPr/>
-        </p:nvSpPr>
-        <p:spPr>
-          <a:xfrm>
-            <a:off x="9870948" y="4937760"/>
-            <a:ext cx="-269748" cy="0"/>
-          </a:xfrm>
-          <a:prstGeom prst="line">
-            <a:avLst/>
-          </a:prstGeom>
-          <a:noFill/>
-          <a:ln w="22225">
-            <a:solidFill>
-              <a:srgbClr val="9FB6C0"/>
-            </a:solidFill>
-            <a:prstDash val="solid"/>
-            <a:tailEnd type="triangle"/>
-          </a:ln>
-        </p:spPr>
-      </p:sp>
-      <p:sp>
-        <p:nvSpPr>
-          <p:cNvPr id="34" name="Text 32"/>
-          <p:cNvSpPr/>
-          <p:nvPr/>
-        </p:nvSpPr>
-        <p:spPr>
-          <a:xfrm>
-            <a:off x="9601200" y="4553712"/>
-            <a:ext cx="457200" cy="237744"/>
-          </a:xfrm>
-          <a:prstGeom prst="rect">
-            <a:avLst/>
-          </a:prstGeom>
-          <a:noFill/>
-          <a:ln/>
-        </p:spPr>
-        <p:txBody>
-          <a:bodyPr wrap="square" rtlCol="0" anchor="ctr"/>
-          <a:lstStyle/>
-          <a:p>
-            <a:pPr algn="ctr" indent="0" marL="0">
-              <a:buNone/>
-            </a:pPr>
-            <a:r>
-              <a:rPr lang="en-US" sz="950" b="1" dirty="0">
-                <a:solidFill>
-                  <a:srgbClr val="71838F"/>
-                </a:solidFill>
-                <a:latin typeface="Microsoft YaHei" pitchFamily="34" charset="0"/>
-                <a:ea typeface="Microsoft YaHei" pitchFamily="34" charset="-122"/>
-                <a:cs typeface="Microsoft YaHei" pitchFamily="34" charset="-120"/>
-              </a:rPr>
-              <a:t>否</a:t>
-            </a:r>
-            <a:endParaRPr lang="en-US" sz="950" dirty="0"/>
-          </a:p>
-        </p:txBody>
-      </p:sp>
-      <p:sp>
-        <p:nvSpPr>
-          <p:cNvPr id="35" name="Shape 33"/>
-          <p:cNvSpPr/>
-          <p:nvPr/>
-        </p:nvSpPr>
-        <p:spPr>
-          <a:xfrm>
-            <a:off x="7680960" y="4617720"/>
-            <a:ext cx="1920240" cy="640080"/>
+      <p:pic>
+        <p:nvPicPr>
+          <p:cNvPr id="32" name="Image 8" descr="preencoded.png">    </p:cNvPr>
+          <p:cNvPicPr>
+            <a:picLocks noChangeAspect="1"/>
+          </p:cNvPicPr>
+          <p:nvPr/>
+        </p:nvPicPr>
+        <p:blipFill>
+          <a:blip r:embed="rId9"/>
+          <a:stretch>
+            <a:fillRect/>
+          </a:stretch>
+        </p:blipFill>
+        <p:spPr>
+          <a:xfrm>
+            <a:off x="9189720" y="4160520"/>
+            <a:ext cx="274320" cy="274320"/>
+          </a:xfrm>
+          <a:prstGeom prst="rect">
+            <a:avLst/>
+          </a:prstGeom>
+        </p:spPr>
+      </p:pic>
+      <p:sp>
+        <p:nvSpPr>
+          <p:cNvPr id="33" name="Text 22"/>
+          <p:cNvSpPr/>
+          <p:nvPr/>
+        </p:nvSpPr>
+        <p:spPr>
+          <a:xfrm>
+            <a:off x="9646920" y="3840480"/>
+            <a:ext cx="1691640" cy="914400"/>
+          </a:xfrm>
+          <a:prstGeom prst="rect">
+            <a:avLst/>
+          </a:prstGeom>
+          <a:noFill/>
+          <a:ln/>
+        </p:spPr>
+        <p:txBody>
+          <a:bodyPr wrap="square" rtlCol="0" anchor="ctr"/>
+          <a:lstStyle/>
+          <a:p>
+            <a:pPr indent="0" marL="0">
+              <a:lnSpc>
+                <a:spcPct val="100000"/>
+              </a:lnSpc>
+              <a:buNone/>
+            </a:pPr>
+            <a:r>
+              <a:rPr lang="en-US" sz="1300" b="1" dirty="0">
+                <a:solidFill>
+                  <a:srgbClr val="17313F"/>
+                </a:solidFill>
+                <a:latin typeface="Microsoft YaHei" pitchFamily="34" charset="0"/>
+                <a:ea typeface="Microsoft YaHei" pitchFamily="34" charset="-122"/>
+                <a:cs typeface="Microsoft YaHei" pitchFamily="34" charset="-120"/>
+              </a:rPr>
+              <a:t>持续学习</a:t>
+            </a:r>
+            <a:endParaRPr lang="en-US" sz="1300" dirty="0"/>
+          </a:p>
+        </p:txBody>
+      </p:sp>
+      <p:sp>
+        <p:nvSpPr>
+          <p:cNvPr id="34" name="Shape 23"/>
+          <p:cNvSpPr/>
+          <p:nvPr/>
+        </p:nvSpPr>
+        <p:spPr>
+          <a:xfrm>
+            <a:off x="548640" y="4983480"/>
+            <a:ext cx="11091672" cy="868680"/>
           </a:xfrm>
           <a:prstGeom prst="roundRect">
             <a:avLst>
-              <a:gd name="adj" fmla="val 14286"/>
+              <a:gd name="adj" fmla="val 12632"/>
             </a:avLst>
           </a:prstGeom>
           <a:solidFill>
             <a:srgbClr val="F4FAFB"/>
           </a:solidFill>
-          <a:ln w="12700">
-            <a:solidFill>
-              <a:srgbClr val="DCE8EE"/>
-            </a:solidFill>
-            <a:prstDash val="solid"/>
-          </a:ln>
-          <a:effectLst>
-            <a:outerShdw sx="100000" sy="100000" kx="0" ky="0" algn="bl" rotWithShape="0" blurRad="114300" dist="38100" dir="8100000">
-              <a:srgbClr val="0B1F2A">
-                <a:alpha val="16000"/>
-              </a:srgbClr>
-            </a:outerShdw>
-          </a:effectLst>
-        </p:spPr>
-      </p:sp>
-      <p:sp>
-        <p:nvSpPr>
-          <p:cNvPr id="36" name="Text 34"/>
-          <p:cNvSpPr/>
-          <p:nvPr/>
-        </p:nvSpPr>
-        <p:spPr>
-          <a:xfrm>
-            <a:off x="7726680" y="4617720"/>
-            <a:ext cx="1828800" cy="640080"/>
-          </a:xfrm>
-          <a:prstGeom prst="rect">
-            <a:avLst/>
-          </a:prstGeom>
-          <a:noFill/>
-          <a:ln/>
-        </p:spPr>
-        <p:txBody>
-          <a:bodyPr wrap="square" rtlCol="0" anchor="ctr"/>
-          <a:lstStyle/>
-          <a:p>
-            <a:pPr algn="ctr" indent="0" marL="0">
-              <a:lnSpc>
-                <a:spcPct val="105000"/>
-              </a:lnSpc>
-              <a:buNone/>
-            </a:pPr>
-            <a:r>
-              <a:rPr lang="en-US" sz="1300" b="1" dirty="0">
-                <a:solidFill>
-                  <a:srgbClr val="17313F"/>
-                </a:solidFill>
-                <a:latin typeface="Microsoft YaHei" pitchFamily="34" charset="0"/>
-                <a:ea typeface="Microsoft YaHei" pitchFamily="34" charset="-122"/>
-                <a:cs typeface="Microsoft YaHei" pitchFamily="34" charset="-120"/>
-              </a:rPr>
-              <a:t>继续观察</a:t>
-            </a:r>
-            <a:endParaRPr lang="en-US" sz="1300" dirty="0"/>
-          </a:p>
-        </p:txBody>
-      </p:sp>
-      <p:sp>
-        <p:nvSpPr>
-          <p:cNvPr id="37" name="Text 35"/>
-          <p:cNvSpPr/>
-          <p:nvPr/>
-        </p:nvSpPr>
-        <p:spPr>
-          <a:xfrm>
-            <a:off x="10698480" y="5394960"/>
-            <a:ext cx="640080" cy="237744"/>
-          </a:xfrm>
-          <a:prstGeom prst="rect">
-            <a:avLst/>
-          </a:prstGeom>
-          <a:noFill/>
-          <a:ln/>
-        </p:spPr>
-        <p:txBody>
-          <a:bodyPr wrap="square" rtlCol="0" anchor="ctr"/>
-          <a:lstStyle/>
-          <a:p>
-            <a:pPr indent="0" marL="0">
-              <a:buNone/>
-            </a:pPr>
-            <a:r>
-              <a:rPr lang="en-US" sz="950" b="1" dirty="0">
-                <a:solidFill>
-                  <a:srgbClr val="22875A"/>
-                </a:solidFill>
-                <a:latin typeface="Microsoft YaHei" pitchFamily="34" charset="0"/>
-                <a:ea typeface="Microsoft YaHei" pitchFamily="34" charset="-122"/>
-                <a:cs typeface="Microsoft YaHei" pitchFamily="34" charset="-120"/>
-              </a:rPr>
-              <a:t>是</a:t>
-            </a:r>
-            <a:endParaRPr lang="en-US" sz="950" dirty="0"/>
-          </a:p>
-        </p:txBody>
-      </p:sp>
-      <p:sp>
-        <p:nvSpPr>
-          <p:cNvPr id="38" name="Shape 36"/>
-          <p:cNvSpPr/>
-          <p:nvPr/>
-        </p:nvSpPr>
-        <p:spPr>
-          <a:xfrm>
-            <a:off x="10602468" y="5541264"/>
-            <a:ext cx="0" cy="448056"/>
-          </a:xfrm>
-          <a:prstGeom prst="line">
-            <a:avLst/>
-          </a:prstGeom>
-          <a:noFill/>
-          <a:ln w="21590">
+          <a:ln w="15240">
             <a:solidFill>
               <a:srgbClr val="1BA39C"/>
             </a:solidFill>
@@ -6042,63 +5529,40 @@
           </a:ln>
         </p:spPr>
       </p:sp>
-      <p:sp>
-        <p:nvSpPr>
-          <p:cNvPr id="39" name="Shape 37"/>
-          <p:cNvSpPr/>
-          <p:nvPr/>
-        </p:nvSpPr>
-        <p:spPr>
-          <a:xfrm>
-            <a:off x="3131820" y="5989320"/>
-            <a:ext cx="7470648" cy="0"/>
-          </a:xfrm>
-          <a:prstGeom prst="line">
-            <a:avLst/>
-          </a:prstGeom>
-          <a:noFill/>
-          <a:ln w="21590">
-            <a:solidFill>
-              <a:srgbClr val="1BA39C"/>
-            </a:solidFill>
-            <a:prstDash val="dash"/>
-          </a:ln>
-        </p:spPr>
-      </p:sp>
-      <p:sp>
-        <p:nvSpPr>
-          <p:cNvPr id="40" name="Shape 38"/>
-          <p:cNvSpPr/>
-          <p:nvPr/>
-        </p:nvSpPr>
-        <p:spPr>
-          <a:xfrm>
-            <a:off x="3131820" y="2743200"/>
-            <a:ext cx="0" cy="3246120"/>
-          </a:xfrm>
-          <a:prstGeom prst="line">
-            <a:avLst/>
-          </a:prstGeom>
-          <a:noFill/>
-          <a:ln w="21590">
-            <a:solidFill>
-              <a:srgbClr val="1BA39C"/>
-            </a:solidFill>
-            <a:prstDash val="dash"/>
-            <a:headEnd type="triangle"/>
-          </a:ln>
-        </p:spPr>
-      </p:sp>
-      <p:sp>
-        <p:nvSpPr>
-          <p:cNvPr id="41" name="Text 39"/>
-          <p:cNvSpPr/>
-          <p:nvPr/>
-        </p:nvSpPr>
-        <p:spPr>
-          <a:xfrm>
-            <a:off x="3383280" y="5596128"/>
-            <a:ext cx="8046720" cy="365760"/>
+      <p:pic>
+        <p:nvPicPr>
+          <p:cNvPr id="35" name="Image 9" descr="preencoded.png">    </p:cNvPr>
+          <p:cNvPicPr>
+            <a:picLocks noChangeAspect="1"/>
+          </p:cNvPicPr>
+          <p:nvPr/>
+        </p:nvPicPr>
+        <p:blipFill>
+          <a:blip r:embed="rId10"/>
+          <a:stretch>
+            <a:fillRect/>
+          </a:stretch>
+        </p:blipFill>
+        <p:spPr>
+          <a:xfrm>
+            <a:off x="822960" y="5212080"/>
+            <a:ext cx="411480" cy="411480"/>
+          </a:xfrm>
+          <a:prstGeom prst="rect">
+            <a:avLst/>
+          </a:prstGeom>
+        </p:spPr>
+      </p:pic>
+      <p:sp>
+        <p:nvSpPr>
+          <p:cNvPr id="36" name="Text 24"/>
+          <p:cNvSpPr/>
+          <p:nvPr/>
+        </p:nvSpPr>
+        <p:spPr>
+          <a:xfrm>
+            <a:off x="1417320" y="5029200"/>
+            <a:ext cx="10058400" cy="777240"/>
           </a:xfrm>
           <a:prstGeom prst="rect">
             <a:avLst/>
@@ -6111,10 +5575,13 @@
           <a:lstStyle/>
           <a:p>
             <a:pPr indent="0" marL="0">
-              <a:buNone/>
-            </a:pPr>
-            <a:r>
-              <a:rPr lang="en-US" sz="1150" b="1" dirty="0">
+              <a:lnSpc>
+                <a:spcPct val="110000"/>
+              </a:lnSpc>
+              <a:buNone/>
+            </a:pPr>
+            <a:r>
+              <a:rPr lang="en-US" sz="1350" b="1" dirty="0">
                 <a:solidFill>
                   <a:srgbClr val="1BA39C"/>
                 </a:solidFill>
@@ -6122,13 +5589,16 @@
                 <a:ea typeface="Microsoft YaHei" pitchFamily="34" charset="-122"/>
                 <a:cs typeface="Microsoft YaHei" pitchFamily="34" charset="-120"/>
               </a:rPr>
-              <a:t>新信号转正 / 调整分层  </a:t>
+              <a:t>回流校准：</a:t>
             </a:r>
             <a:pPr indent="0" marL="0">
-              <a:buNone/>
-            </a:pPr>
-            <a:r>
-              <a:rPr lang="en-US" sz="1150" dirty="0">
+              <a:lnSpc>
+                <a:spcPct val="110000"/>
+              </a:lnSpc>
+              <a:buNone/>
+            </a:pPr>
+            <a:r>
+              <a:rPr lang="en-US" sz="1350" dirty="0">
                 <a:solidFill>
                   <a:srgbClr val="17313F"/>
                 </a:solidFill>
@@ -6136,15 +5606,15 @@
                 <a:ea typeface="Microsoft YaHei" pitchFamily="34" charset="-122"/>
                 <a:cs typeface="Microsoft YaHei" pitchFamily="34" charset="-120"/>
               </a:rPr>
-              <a:t>—— 受统计校准 + 人工审批把关。</a:t>
-            </a:r>
-            <a:endParaRPr lang="en-US" sz="1150" dirty="0"/>
-          </a:p>
-        </p:txBody>
-      </p:sp>
-      <p:sp>
-        <p:nvSpPr>
-          <p:cNvPr id="42" name="Text 40"/>
+              <a:t>法务每一次复核都被结构化沉淀，反过来校准「该看谁、多急」—— 系统越用越准。</a:t>
+            </a:r>
+            <a:endParaRPr lang="en-US" sz="1350" dirty="0"/>
+          </a:p>
+        </p:txBody>
+      </p:sp>
+      <p:sp>
+        <p:nvSpPr>
+          <p:cNvPr id="37" name="Text 25"/>
           <p:cNvSpPr/>
           <p:nvPr/>
         </p:nvSpPr>
@@ -6183,7 +5653,7 @@
       </p:sp>
       <p:sp>
         <p:nvSpPr>
-          <p:cNvPr id="43" name="Text 41"/>
+          <p:cNvPr id="38" name="Text 26"/>
           <p:cNvSpPr/>
           <p:nvPr/>
         </p:nvSpPr>
@@ -6285,7 +5755,7 @@
                 <a:ea typeface="Microsoft YaHei" pitchFamily="34" charset="-122"/>
                 <a:cs typeface="Microsoft YaHei" pitchFamily="34" charset="-120"/>
               </a:rPr>
-              <a:t>三个核心创新</a:t>
+              <a:t>端到端流程</a:t>
             </a:r>
             <a:endParaRPr lang="en-US" sz="1200" dirty="0"/>
           </a:p>
@@ -6324,7 +5794,7 @@
                 <a:ea typeface="Microsoft YaHei" pitchFamily="34" charset="-122"/>
                 <a:cs typeface="Microsoft YaHei" pitchFamily="34" charset="-120"/>
               </a:rPr>
-              <a:t>从「静态规则」走向「会进化的助手」</a:t>
+              <a:t>一笔付款在系统中的流转</a:t>
             </a:r>
             <a:endParaRPr lang="en-US" sz="3000" dirty="0"/>
           </a:p>
@@ -6338,12 +5808,12 @@
         </p:nvSpPr>
         <p:spPr>
           <a:xfrm>
-            <a:off x="548640" y="2148840"/>
-            <a:ext cx="3474720" cy="3383280"/>
+            <a:off x="457200" y="1828800"/>
+            <a:ext cx="1554480" cy="914400"/>
           </a:xfrm>
           <a:prstGeom prst="roundRect">
             <a:avLst>
-              <a:gd name="adj" fmla="val 3784"/>
+              <a:gd name="adj" fmla="val 10000"/>
             </a:avLst>
           </a:prstGeom>
           <a:solidFill>
@@ -6366,113 +5836,33 @@
       </p:sp>
       <p:sp>
         <p:nvSpPr>
-          <p:cNvPr id="5" name="Shape 3"/>
-          <p:cNvSpPr/>
-          <p:nvPr/>
-        </p:nvSpPr>
-        <p:spPr>
-          <a:xfrm>
-            <a:off x="868680" y="2468880"/>
-            <a:ext cx="868680" cy="868680"/>
-          </a:xfrm>
-          <a:prstGeom prst="ellipse">
-            <a:avLst/>
-          </a:prstGeom>
-          <a:solidFill>
-            <a:srgbClr val="1BA39C"/>
-          </a:solidFill>
-          <a:ln/>
-        </p:spPr>
-      </p:sp>
-      <p:pic>
-        <p:nvPicPr>
-          <p:cNvPr id="6" name="Image 0" descr="preencoded.png">    </p:cNvPr>
-          <p:cNvPicPr>
-            <a:picLocks noChangeAspect="1"/>
-          </p:cNvPicPr>
-          <p:nvPr/>
-        </p:nvPicPr>
-        <p:blipFill>
-          <a:blip r:embed="rId1"/>
-          <a:stretch>
-            <a:fillRect/>
-          </a:stretch>
-        </p:blipFill>
-        <p:spPr>
-          <a:xfrm>
-            <a:off x="1069848" y="2670048"/>
-            <a:ext cx="466344" cy="466344"/>
-          </a:xfrm>
-          <a:prstGeom prst="rect">
-            <a:avLst/>
-          </a:prstGeom>
-        </p:spPr>
-      </p:pic>
-      <p:sp>
-        <p:nvSpPr>
-          <p:cNvPr id="7" name="Text 4"/>
-          <p:cNvSpPr/>
-          <p:nvPr/>
-        </p:nvSpPr>
-        <p:spPr>
-          <a:xfrm>
-            <a:off x="2834640" y="2423160"/>
-            <a:ext cx="1005840" cy="640080"/>
-          </a:xfrm>
-          <a:prstGeom prst="rect">
-            <a:avLst/>
-          </a:prstGeom>
-          <a:noFill/>
-          <a:ln/>
-        </p:spPr>
-        <p:txBody>
-          <a:bodyPr wrap="square" rtlCol="0" anchor="ctr"/>
-          <a:lstStyle/>
-          <a:p>
-            <a:pPr algn="r" indent="0" marL="0">
-              <a:buNone/>
-            </a:pPr>
-            <a:r>
-              <a:rPr lang="en-US" sz="3400" b="1" dirty="0">
-                <a:solidFill>
-                  <a:srgbClr val="CFE0E6"/>
-                </a:solidFill>
-                <a:latin typeface="Microsoft YaHei" pitchFamily="34" charset="0"/>
-                <a:ea typeface="Microsoft YaHei" pitchFamily="34" charset="-122"/>
-                <a:cs typeface="Microsoft YaHei" pitchFamily="34" charset="-120"/>
-              </a:rPr>
-              <a:t>01</a:t>
-            </a:r>
-            <a:endParaRPr lang="en-US" sz="3400" dirty="0"/>
-          </a:p>
-        </p:txBody>
-      </p:sp>
-      <p:sp>
-        <p:nvSpPr>
-          <p:cNvPr id="8" name="Text 5"/>
-          <p:cNvSpPr/>
-          <p:nvPr/>
-        </p:nvSpPr>
-        <p:spPr>
-          <a:xfrm>
-            <a:off x="868680" y="3520440"/>
-            <a:ext cx="2971800" cy="502920"/>
-          </a:xfrm>
-          <a:prstGeom prst="rect">
-            <a:avLst/>
-          </a:prstGeom>
-          <a:noFill/>
-          <a:ln/>
-        </p:spPr>
-        <p:txBody>
-          <a:bodyPr wrap="square" rtlCol="0" anchor="ctr"/>
-          <a:lstStyle/>
-          <a:p>
-            <a:pPr indent="0" marL="0">
-              <a:buNone/>
-            </a:pPr>
-            <a:r>
-              <a:rPr lang="en-US" sz="1800" b="1" dirty="0">
+          <p:cNvPr id="5" name="Text 3"/>
+          <p:cNvSpPr/>
+          <p:nvPr/>
+        </p:nvSpPr>
+        <p:spPr>
+          <a:xfrm>
+            <a:off x="502920" y="1828800"/>
+            <a:ext cx="1463040" cy="914400"/>
+          </a:xfrm>
+          <a:prstGeom prst="rect">
+            <a:avLst/>
+          </a:prstGeom>
+          <a:noFill/>
+          <a:ln/>
+        </p:spPr>
+        <p:txBody>
+          <a:bodyPr wrap="square" rtlCol="0" anchor="ctr"/>
+          <a:lstStyle/>
+          <a:p>
+            <a:pPr algn="ctr" indent="0" marL="0">
+              <a:lnSpc>
+                <a:spcPct val="105000"/>
+              </a:lnSpc>
+              <a:buNone/>
+            </a:pPr>
+            <a:r>
+              <a:rPr lang="en-US" sz="1300" b="1" dirty="0">
                 <a:solidFill>
                   <a:srgbClr val="17313F"/>
                 </a:solidFill>
@@ -6480,41 +5870,19 @@
                 <a:ea typeface="Microsoft YaHei" pitchFamily="34" charset="-122"/>
                 <a:cs typeface="Microsoft YaHei" pitchFamily="34" charset="-120"/>
               </a:rPr>
-              <a:t>AI 调查 Agent</a:t>
-            </a:r>
-            <a:endParaRPr lang="en-US" sz="1800" dirty="0"/>
-          </a:p>
-        </p:txBody>
-      </p:sp>
-      <p:sp>
-        <p:nvSpPr>
-          <p:cNvPr id="9" name="Text 6"/>
-          <p:cNvSpPr/>
-          <p:nvPr/>
-        </p:nvSpPr>
-        <p:spPr>
-          <a:xfrm>
-            <a:off x="886968" y="4069080"/>
-            <a:ext cx="2971800" cy="1371600"/>
-          </a:xfrm>
-          <a:prstGeom prst="rect">
-            <a:avLst/>
-          </a:prstGeom>
-          <a:noFill/>
-          <a:ln/>
-        </p:spPr>
-        <p:txBody>
-          <a:bodyPr wrap="square" rtlCol="0" anchor="ctr"/>
-          <a:lstStyle/>
-          <a:p>
-            <a:pPr indent="0" marL="0">
+              <a:t>订单流入</a:t>
+            </a:r>
+            <a:endParaRPr lang="en-US" sz="1300" dirty="0"/>
+          </a:p>
+          <a:p>
+            <a:pPr algn="ctr" indent="0" marL="0">
               <a:lnSpc>
-                <a:spcPct val="125000"/>
+                <a:spcPct val="105000"/>
               </a:lnSpc>
               <a:buNone/>
             </a:pPr>
             <a:r>
-              <a:rPr lang="en-US" sz="1250" dirty="0">
+              <a:rPr lang="en-US" sz="1050" dirty="0">
                 <a:solidFill>
                   <a:srgbClr val="71838F"/>
                 </a:solidFill>
@@ -6522,26 +5890,50 @@
                 <a:ea typeface="Microsoft YaHei" pitchFamily="34" charset="-122"/>
                 <a:cs typeface="Microsoft YaHei" pitchFamily="34" charset="-120"/>
               </a:rPr>
-              <a:t>自动多源取证（企查查 / 天眼查 / Dow Jones），把每件调查从 1 小时压到几分钟；人做最终判断。</a:t>
-            </a:r>
-            <a:endParaRPr lang="en-US" sz="1250" dirty="0"/>
-          </a:p>
-        </p:txBody>
-      </p:sp>
-      <p:sp>
-        <p:nvSpPr>
-          <p:cNvPr id="10" name="Shape 7"/>
-          <p:cNvSpPr/>
-          <p:nvPr/>
-        </p:nvSpPr>
-        <p:spPr>
-          <a:xfrm>
-            <a:off x="4315968" y="2148840"/>
-            <a:ext cx="3474720" cy="3383280"/>
+              <a:t>约 1 万 / 天</a:t>
+            </a:r>
+            <a:endParaRPr lang="en-US" sz="1300" dirty="0"/>
+          </a:p>
+        </p:txBody>
+      </p:sp>
+      <p:sp>
+        <p:nvSpPr>
+          <p:cNvPr id="6" name="Shape 4"/>
+          <p:cNvSpPr/>
+          <p:nvPr/>
+        </p:nvSpPr>
+        <p:spPr>
+          <a:xfrm>
+            <a:off x="2011680" y="2286000"/>
+            <a:ext cx="274320" cy="0"/>
+          </a:xfrm>
+          <a:prstGeom prst="line">
+            <a:avLst/>
+          </a:prstGeom>
+          <a:noFill/>
+          <a:ln w="22225">
+            <a:solidFill>
+              <a:srgbClr val="9FB6C0"/>
+            </a:solidFill>
+            <a:prstDash val="solid"/>
+            <a:tailEnd type="triangle"/>
+          </a:ln>
+        </p:spPr>
+      </p:sp>
+      <p:sp>
+        <p:nvSpPr>
+          <p:cNvPr id="7" name="Shape 5"/>
+          <p:cNvSpPr/>
+          <p:nvPr/>
+        </p:nvSpPr>
+        <p:spPr>
+          <a:xfrm>
+            <a:off x="2286000" y="1828800"/>
+            <a:ext cx="1691640" cy="914400"/>
           </a:xfrm>
           <a:prstGeom prst="roundRect">
             <a:avLst>
-              <a:gd name="adj" fmla="val 3784"/>
+              <a:gd name="adj" fmla="val 10000"/>
             </a:avLst>
           </a:prstGeom>
           <a:solidFill>
@@ -6564,182 +5956,248 @@
       </p:sp>
       <p:sp>
         <p:nvSpPr>
-          <p:cNvPr id="11" name="Shape 8"/>
-          <p:cNvSpPr/>
-          <p:nvPr/>
-        </p:nvSpPr>
-        <p:spPr>
-          <a:xfrm>
-            <a:off x="4636008" y="2468880"/>
-            <a:ext cx="868680" cy="868680"/>
-          </a:xfrm>
-          <a:prstGeom prst="ellipse">
+          <p:cNvPr id="8" name="Text 6"/>
+          <p:cNvSpPr/>
+          <p:nvPr/>
+        </p:nvSpPr>
+        <p:spPr>
+          <a:xfrm>
+            <a:off x="2331720" y="1828800"/>
+            <a:ext cx="1600200" cy="914400"/>
+          </a:xfrm>
+          <a:prstGeom prst="rect">
+            <a:avLst/>
+          </a:prstGeom>
+          <a:noFill/>
+          <a:ln/>
+        </p:spPr>
+        <p:txBody>
+          <a:bodyPr wrap="square" rtlCol="0" anchor="ctr"/>
+          <a:lstStyle/>
+          <a:p>
+            <a:pPr algn="ctr" indent="0" marL="0">
+              <a:lnSpc>
+                <a:spcPct val="105000"/>
+              </a:lnSpc>
+              <a:buNone/>
+            </a:pPr>
+            <a:r>
+              <a:rPr lang="en-US" sz="1300" b="1" dirty="0">
+                <a:solidFill>
+                  <a:srgbClr val="17313F"/>
+                </a:solidFill>
+                <a:latin typeface="Microsoft YaHei" pitchFamily="34" charset="0"/>
+                <a:ea typeface="Microsoft YaHei" pitchFamily="34" charset="-122"/>
+                <a:cs typeface="Microsoft YaHei" pitchFamily="34" charset="-120"/>
+              </a:rPr>
+              <a:t>检测 + 分层</a:t>
+            </a:r>
+            <a:endParaRPr lang="en-US" sz="1300" dirty="0"/>
+          </a:p>
+          <a:p>
+            <a:pPr algn="ctr" indent="0" marL="0">
+              <a:lnSpc>
+                <a:spcPct val="105000"/>
+              </a:lnSpc>
+              <a:buNone/>
+            </a:pPr>
+            <a:r>
+              <a:rPr lang="en-US" sz="1050" dirty="0">
+                <a:solidFill>
+                  <a:srgbClr val="71838F"/>
+                </a:solidFill>
+                <a:latin typeface="Microsoft YaHei" pitchFamily="34" charset="0"/>
+                <a:ea typeface="Microsoft YaHei" pitchFamily="34" charset="-122"/>
+                <a:cs typeface="Microsoft YaHei" pitchFamily="34" charset="-120"/>
+              </a:rPr>
+              <a:t>双入口</a:t>
+            </a:r>
+            <a:endParaRPr lang="en-US" sz="1300" dirty="0"/>
+          </a:p>
+        </p:txBody>
+      </p:sp>
+      <p:sp>
+        <p:nvSpPr>
+          <p:cNvPr id="9" name="Shape 7"/>
+          <p:cNvSpPr/>
+          <p:nvPr/>
+        </p:nvSpPr>
+        <p:spPr>
+          <a:xfrm>
+            <a:off x="3977640" y="2286000"/>
+            <a:ext cx="246888" cy="0"/>
+          </a:xfrm>
+          <a:prstGeom prst="line">
+            <a:avLst/>
+          </a:prstGeom>
+          <a:noFill/>
+          <a:ln w="22225">
+            <a:solidFill>
+              <a:srgbClr val="9FB6C0"/>
+            </a:solidFill>
+            <a:prstDash val="solid"/>
+            <a:tailEnd type="triangle"/>
+          </a:ln>
+        </p:spPr>
+      </p:sp>
+      <p:sp>
+        <p:nvSpPr>
+          <p:cNvPr id="10" name="Shape 8"/>
+          <p:cNvSpPr/>
+          <p:nvPr/>
+        </p:nvSpPr>
+        <p:spPr>
+          <a:xfrm>
+            <a:off x="4251960" y="1682496"/>
+            <a:ext cx="1463040" cy="1207008"/>
+          </a:xfrm>
+          <a:prstGeom prst="diamond">
             <a:avLst/>
           </a:prstGeom>
           <a:solidFill>
-            <a:srgbClr val="1BA39C"/>
+            <a:srgbClr val="FFF6E8"/>
           </a:solidFill>
-          <a:ln/>
-        </p:spPr>
-      </p:sp>
-      <p:pic>
-        <p:nvPicPr>
-          <p:cNvPr id="12" name="Image 1" descr="preencoded.png">    </p:cNvPr>
-          <p:cNvPicPr>
-            <a:picLocks noChangeAspect="1"/>
-          </p:cNvPicPr>
-          <p:nvPr/>
-        </p:nvPicPr>
-        <p:blipFill>
-          <a:blip r:embed="rId2"/>
-          <a:stretch>
-            <a:fillRect/>
-          </a:stretch>
-        </p:blipFill>
-        <p:spPr>
-          <a:xfrm>
-            <a:off x="4837176" y="2670048"/>
-            <a:ext cx="466344" cy="466344"/>
-          </a:xfrm>
-          <a:prstGeom prst="rect">
-            <a:avLst/>
-          </a:prstGeom>
-        </p:spPr>
-      </p:pic>
-      <p:sp>
-        <p:nvSpPr>
-          <p:cNvPr id="13" name="Text 9"/>
-          <p:cNvSpPr/>
-          <p:nvPr/>
-        </p:nvSpPr>
-        <p:spPr>
-          <a:xfrm>
-            <a:off x="6601968" y="2423160"/>
-            <a:ext cx="1005840" cy="640080"/>
-          </a:xfrm>
-          <a:prstGeom prst="rect">
-            <a:avLst/>
-          </a:prstGeom>
-          <a:noFill/>
-          <a:ln/>
-        </p:spPr>
-        <p:txBody>
-          <a:bodyPr wrap="square" rtlCol="0" anchor="ctr"/>
-          <a:lstStyle/>
-          <a:p>
-            <a:pPr algn="r" indent="0" marL="0">
-              <a:buNone/>
-            </a:pPr>
-            <a:r>
-              <a:rPr lang="en-US" sz="3400" b="1" dirty="0">
-                <a:solidFill>
-                  <a:srgbClr val="CFE0E6"/>
-                </a:solidFill>
-                <a:latin typeface="Microsoft YaHei" pitchFamily="34" charset="0"/>
-                <a:ea typeface="Microsoft YaHei" pitchFamily="34" charset="-122"/>
-                <a:cs typeface="Microsoft YaHei" pitchFamily="34" charset="-120"/>
-              </a:rPr>
-              <a:t>02</a:t>
-            </a:r>
-            <a:endParaRPr lang="en-US" sz="3400" dirty="0"/>
-          </a:p>
-        </p:txBody>
-      </p:sp>
-      <p:sp>
-        <p:nvSpPr>
-          <p:cNvPr id="14" name="Text 10"/>
-          <p:cNvSpPr/>
-          <p:nvPr/>
-        </p:nvSpPr>
-        <p:spPr>
-          <a:xfrm>
-            <a:off x="4636008" y="3520440"/>
-            <a:ext cx="2971800" cy="502920"/>
-          </a:xfrm>
-          <a:prstGeom prst="rect">
-            <a:avLst/>
-          </a:prstGeom>
-          <a:noFill/>
-          <a:ln/>
-        </p:spPr>
-        <p:txBody>
-          <a:bodyPr wrap="square" rtlCol="0" anchor="ctr"/>
-          <a:lstStyle/>
-          <a:p>
-            <a:pPr indent="0" marL="0">
-              <a:buNone/>
-            </a:pPr>
-            <a:r>
-              <a:rPr lang="en-US" sz="1800" b="1" dirty="0">
-                <a:solidFill>
-                  <a:srgbClr val="17313F"/>
-                </a:solidFill>
-                <a:latin typeface="Microsoft YaHei" pitchFamily="34" charset="0"/>
-                <a:ea typeface="Microsoft YaHei" pitchFamily="34" charset="-122"/>
-                <a:cs typeface="Microsoft YaHei" pitchFamily="34" charset="-120"/>
-              </a:rPr>
-              <a:t>自我进化</a:t>
-            </a:r>
-            <a:endParaRPr lang="en-US" sz="1800" dirty="0"/>
-          </a:p>
-        </p:txBody>
-      </p:sp>
-      <p:sp>
-        <p:nvSpPr>
-          <p:cNvPr id="15" name="Text 11"/>
-          <p:cNvSpPr/>
-          <p:nvPr/>
-        </p:nvSpPr>
-        <p:spPr>
-          <a:xfrm>
-            <a:off x="4654296" y="4069080"/>
-            <a:ext cx="2971800" cy="1371600"/>
-          </a:xfrm>
-          <a:prstGeom prst="rect">
-            <a:avLst/>
-          </a:prstGeom>
-          <a:noFill/>
-          <a:ln/>
-        </p:spPr>
-        <p:txBody>
-          <a:bodyPr wrap="square" rtlCol="0" anchor="ctr"/>
-          <a:lstStyle/>
-          <a:p>
-            <a:pPr indent="0" marL="0">
-              <a:lnSpc>
-                <a:spcPct val="125000"/>
-              </a:lnSpc>
-              <a:buNone/>
-            </a:pPr>
-            <a:r>
-              <a:rPr lang="en-US" sz="1250" dirty="0">
-                <a:solidFill>
-                  <a:srgbClr val="71838F"/>
-                </a:solidFill>
-                <a:latin typeface="Microsoft YaHei" pitchFamily="34" charset="0"/>
-                <a:ea typeface="Microsoft YaHei" pitchFamily="34" charset="-122"/>
-                <a:cs typeface="Microsoft YaHei" pitchFamily="34" charset="-120"/>
-              </a:rPr>
-              <a:t>Agent 从已确认案例中发现规则集里还没有的新信号 —— 但只能进「候选」，须校准 + 审批才生效。</a:t>
-            </a:r>
-            <a:endParaRPr lang="en-US" sz="1250" dirty="0"/>
-          </a:p>
-        </p:txBody>
-      </p:sp>
-      <p:sp>
-        <p:nvSpPr>
-          <p:cNvPr id="16" name="Shape 12"/>
-          <p:cNvSpPr/>
-          <p:nvPr/>
-        </p:nvSpPr>
-        <p:spPr>
-          <a:xfrm>
-            <a:off x="8083296" y="2148840"/>
-            <a:ext cx="3474720" cy="3383280"/>
+          <a:ln w="19050">
+            <a:solidFill>
+              <a:srgbClr val="C9861A"/>
+            </a:solidFill>
+            <a:prstDash val="solid"/>
+          </a:ln>
+        </p:spPr>
+      </p:sp>
+      <p:sp>
+        <p:nvSpPr>
+          <p:cNvPr id="11" name="Text 9"/>
+          <p:cNvSpPr/>
+          <p:nvPr/>
+        </p:nvSpPr>
+        <p:spPr>
+          <a:xfrm>
+            <a:off x="4251960" y="1682496"/>
+            <a:ext cx="1463040" cy="1207008"/>
+          </a:xfrm>
+          <a:prstGeom prst="rect">
+            <a:avLst/>
+          </a:prstGeom>
+          <a:noFill/>
+          <a:ln/>
+        </p:spPr>
+        <p:txBody>
+          <a:bodyPr wrap="square" rtlCol="0" anchor="ctr"/>
+          <a:lstStyle/>
+          <a:p>
+            <a:pPr algn="ctr" indent="0" marL="0">
+              <a:buNone/>
+            </a:pPr>
+            <a:r>
+              <a:rPr lang="en-US" sz="1100" b="1" dirty="0">
+                <a:solidFill>
+                  <a:srgbClr val="8A6115"/>
+                </a:solidFill>
+                <a:latin typeface="Microsoft YaHei" pitchFamily="34" charset="0"/>
+                <a:ea typeface="Microsoft YaHei" pitchFamily="34" charset="-122"/>
+                <a:cs typeface="Microsoft YaHei" pitchFamily="34" charset="-120"/>
+              </a:rPr>
+              <a:t>分层</a:t>
+            </a:r>
+            <a:endParaRPr lang="en-US" sz="1100" dirty="0"/>
+          </a:p>
+          <a:p>
+            <a:pPr algn="ctr" indent="0" marL="0">
+              <a:buNone/>
+            </a:pPr>
+            <a:r>
+              <a:rPr lang="en-US" sz="1100" b="1" dirty="0">
+                <a:solidFill>
+                  <a:srgbClr val="8A6115"/>
+                </a:solidFill>
+                <a:latin typeface="Microsoft YaHei" pitchFamily="34" charset="0"/>
+                <a:ea typeface="Microsoft YaHei" pitchFamily="34" charset="-122"/>
+                <a:cs typeface="Microsoft YaHei" pitchFamily="34" charset="-120"/>
+              </a:rPr>
+              <a:t>等级？</a:t>
+            </a:r>
+            <a:endParaRPr lang="en-US" sz="1100" dirty="0"/>
+          </a:p>
+        </p:txBody>
+      </p:sp>
+      <p:sp>
+        <p:nvSpPr>
+          <p:cNvPr id="12" name="Shape 10"/>
+          <p:cNvSpPr/>
+          <p:nvPr/>
+        </p:nvSpPr>
+        <p:spPr>
+          <a:xfrm>
+            <a:off x="5715000" y="2286000"/>
+            <a:ext cx="274320" cy="0"/>
+          </a:xfrm>
+          <a:prstGeom prst="line">
+            <a:avLst/>
+          </a:prstGeom>
+          <a:noFill/>
+          <a:ln w="22225">
+            <a:solidFill>
+              <a:srgbClr val="9FB6C0"/>
+            </a:solidFill>
+            <a:prstDash val="solid"/>
+            <a:tailEnd type="triangle"/>
+          </a:ln>
+        </p:spPr>
+      </p:sp>
+      <p:sp>
+        <p:nvSpPr>
+          <p:cNvPr id="13" name="Text 11"/>
+          <p:cNvSpPr/>
+          <p:nvPr/>
+        </p:nvSpPr>
+        <p:spPr>
+          <a:xfrm>
+            <a:off x="5440680" y="1481328"/>
+            <a:ext cx="822960" cy="256032"/>
+          </a:xfrm>
+          <a:prstGeom prst="rect">
+            <a:avLst/>
+          </a:prstGeom>
+          <a:noFill/>
+          <a:ln/>
+        </p:spPr>
+        <p:txBody>
+          <a:bodyPr wrap="square" rtlCol="0" anchor="ctr"/>
+          <a:lstStyle/>
+          <a:p>
+            <a:pPr algn="ctr" indent="0" marL="0">
+              <a:buNone/>
+            </a:pPr>
+            <a:r>
+              <a:rPr lang="en-US" sz="950" b="1" dirty="0">
+                <a:solidFill>
+                  <a:srgbClr val="D84B4B"/>
+                </a:solidFill>
+                <a:latin typeface="Microsoft YaHei" pitchFamily="34" charset="0"/>
+                <a:ea typeface="Microsoft YaHei" pitchFamily="34" charset="-122"/>
+                <a:cs typeface="Microsoft YaHei" pitchFamily="34" charset="-120"/>
+              </a:rPr>
+              <a:t>T1 / T2</a:t>
+            </a:r>
+            <a:endParaRPr lang="en-US" sz="950" dirty="0"/>
+          </a:p>
+        </p:txBody>
+      </p:sp>
+      <p:sp>
+        <p:nvSpPr>
+          <p:cNvPr id="14" name="Shape 12"/>
+          <p:cNvSpPr/>
+          <p:nvPr/>
+        </p:nvSpPr>
+        <p:spPr>
+          <a:xfrm>
+            <a:off x="5989320" y="1828800"/>
+            <a:ext cx="1691640" cy="914400"/>
           </a:xfrm>
           <a:prstGeom prst="roundRect">
             <a:avLst>
-              <a:gd name="adj" fmla="val 3784"/>
+              <a:gd name="adj" fmla="val 10000"/>
             </a:avLst>
           </a:prstGeom>
           <a:solidFill>
@@ -6762,97 +6220,325 @@
       </p:sp>
       <p:sp>
         <p:nvSpPr>
-          <p:cNvPr id="17" name="Shape 13"/>
-          <p:cNvSpPr/>
-          <p:nvPr/>
-        </p:nvSpPr>
-        <p:spPr>
-          <a:xfrm>
-            <a:off x="8403336" y="2468880"/>
-            <a:ext cx="868680" cy="868680"/>
-          </a:xfrm>
-          <a:prstGeom prst="ellipse">
+          <p:cNvPr id="15" name="Text 13"/>
+          <p:cNvSpPr/>
+          <p:nvPr/>
+        </p:nvSpPr>
+        <p:spPr>
+          <a:xfrm>
+            <a:off x="6035040" y="1828800"/>
+            <a:ext cx="1600200" cy="914400"/>
+          </a:xfrm>
+          <a:prstGeom prst="rect">
+            <a:avLst/>
+          </a:prstGeom>
+          <a:noFill/>
+          <a:ln/>
+        </p:spPr>
+        <p:txBody>
+          <a:bodyPr wrap="square" rtlCol="0" anchor="ctr"/>
+          <a:lstStyle/>
+          <a:p>
+            <a:pPr algn="ctr" indent="0" marL="0">
+              <a:lnSpc>
+                <a:spcPct val="105000"/>
+              </a:lnSpc>
+              <a:buNone/>
+            </a:pPr>
+            <a:r>
+              <a:rPr lang="en-US" sz="1300" b="1" dirty="0">
+                <a:solidFill>
+                  <a:srgbClr val="17313F"/>
+                </a:solidFill>
+                <a:latin typeface="Microsoft YaHei" pitchFamily="34" charset="0"/>
+                <a:ea typeface="Microsoft YaHei" pitchFamily="34" charset="-122"/>
+                <a:cs typeface="Microsoft YaHei" pitchFamily="34" charset="-120"/>
+              </a:rPr>
+              <a:t>AI 调查</a:t>
+            </a:r>
+            <a:endParaRPr lang="en-US" sz="1300" dirty="0"/>
+          </a:p>
+          <a:p>
+            <a:pPr algn="ctr" indent="0" marL="0">
+              <a:lnSpc>
+                <a:spcPct val="105000"/>
+              </a:lnSpc>
+              <a:buNone/>
+            </a:pPr>
+            <a:r>
+              <a:rPr lang="en-US" sz="1050" dirty="0">
+                <a:solidFill>
+                  <a:srgbClr val="71838F"/>
+                </a:solidFill>
+                <a:latin typeface="Microsoft YaHei" pitchFamily="34" charset="0"/>
+                <a:ea typeface="Microsoft YaHei" pitchFamily="34" charset="-122"/>
+                <a:cs typeface="Microsoft YaHei" pitchFamily="34" charset="-120"/>
+              </a:rPr>
+              <a:t>生成证据包</a:t>
+            </a:r>
+            <a:endParaRPr lang="en-US" sz="1300" dirty="0"/>
+          </a:p>
+        </p:txBody>
+      </p:sp>
+      <p:sp>
+        <p:nvSpPr>
+          <p:cNvPr id="16" name="Shape 14"/>
+          <p:cNvSpPr/>
+          <p:nvPr/>
+        </p:nvSpPr>
+        <p:spPr>
+          <a:xfrm>
+            <a:off x="7680960" y="2286000"/>
+            <a:ext cx="246888" cy="0"/>
+          </a:xfrm>
+          <a:prstGeom prst="line">
+            <a:avLst/>
+          </a:prstGeom>
+          <a:noFill/>
+          <a:ln w="22225">
+            <a:solidFill>
+              <a:srgbClr val="9FB6C0"/>
+            </a:solidFill>
+            <a:prstDash val="solid"/>
+            <a:tailEnd type="triangle"/>
+          </a:ln>
+        </p:spPr>
+      </p:sp>
+      <p:sp>
+        <p:nvSpPr>
+          <p:cNvPr id="17" name="Shape 15"/>
+          <p:cNvSpPr/>
+          <p:nvPr/>
+        </p:nvSpPr>
+        <p:spPr>
+          <a:xfrm>
+            <a:off x="8001000" y="1682496"/>
+            <a:ext cx="1463040" cy="1207008"/>
+          </a:xfrm>
+          <a:prstGeom prst="diamond">
             <a:avLst/>
           </a:prstGeom>
           <a:solidFill>
-            <a:srgbClr val="1BA39C"/>
+            <a:srgbClr val="FFF6E8"/>
           </a:solidFill>
-          <a:ln/>
-        </p:spPr>
-      </p:sp>
-      <p:pic>
-        <p:nvPicPr>
-          <p:cNvPr id="18" name="Image 2" descr="preencoded.png">    </p:cNvPr>
-          <p:cNvPicPr>
-            <a:picLocks noChangeAspect="1"/>
-          </p:cNvPicPr>
-          <p:nvPr/>
-        </p:nvPicPr>
-        <p:blipFill>
-          <a:blip r:embed="rId3"/>
-          <a:stretch>
-            <a:fillRect/>
-          </a:stretch>
-        </p:blipFill>
-        <p:spPr>
-          <a:xfrm>
-            <a:off x="8604504" y="2670048"/>
-            <a:ext cx="466344" cy="466344"/>
-          </a:xfrm>
-          <a:prstGeom prst="rect">
-            <a:avLst/>
-          </a:prstGeom>
-        </p:spPr>
-      </p:pic>
-      <p:sp>
-        <p:nvSpPr>
-          <p:cNvPr id="19" name="Text 14"/>
-          <p:cNvSpPr/>
-          <p:nvPr/>
-        </p:nvSpPr>
-        <p:spPr>
-          <a:xfrm>
-            <a:off x="10369296" y="2423160"/>
-            <a:ext cx="1005840" cy="640080"/>
-          </a:xfrm>
-          <a:prstGeom prst="rect">
-            <a:avLst/>
-          </a:prstGeom>
-          <a:noFill/>
-          <a:ln/>
-        </p:spPr>
-        <p:txBody>
-          <a:bodyPr wrap="square" rtlCol="0" anchor="ctr"/>
-          <a:lstStyle/>
-          <a:p>
-            <a:pPr algn="r" indent="0" marL="0">
-              <a:buNone/>
-            </a:pPr>
-            <a:r>
-              <a:rPr lang="en-US" sz="3400" b="1" dirty="0">
-                <a:solidFill>
-                  <a:srgbClr val="CFE0E6"/>
-                </a:solidFill>
-                <a:latin typeface="Microsoft YaHei" pitchFamily="34" charset="0"/>
-                <a:ea typeface="Microsoft YaHei" pitchFamily="34" charset="-122"/>
-                <a:cs typeface="Microsoft YaHei" pitchFamily="34" charset="-120"/>
-              </a:rPr>
-              <a:t>03</a:t>
-            </a:r>
-            <a:endParaRPr lang="en-US" sz="3400" dirty="0"/>
-          </a:p>
-        </p:txBody>
-      </p:sp>
-      <p:sp>
-        <p:nvSpPr>
-          <p:cNvPr id="20" name="Text 15"/>
-          <p:cNvSpPr/>
-          <p:nvPr/>
-        </p:nvSpPr>
-        <p:spPr>
-          <a:xfrm>
-            <a:off x="8403336" y="3520440"/>
-            <a:ext cx="2971800" cy="502920"/>
+          <a:ln w="19050">
+            <a:solidFill>
+              <a:srgbClr val="C9861A"/>
+            </a:solidFill>
+            <a:prstDash val="solid"/>
+          </a:ln>
+        </p:spPr>
+      </p:sp>
+      <p:sp>
+        <p:nvSpPr>
+          <p:cNvPr id="18" name="Text 16"/>
+          <p:cNvSpPr/>
+          <p:nvPr/>
+        </p:nvSpPr>
+        <p:spPr>
+          <a:xfrm>
+            <a:off x="8001000" y="1682496"/>
+            <a:ext cx="1463040" cy="1207008"/>
+          </a:xfrm>
+          <a:prstGeom prst="rect">
+            <a:avLst/>
+          </a:prstGeom>
+          <a:noFill/>
+          <a:ln/>
+        </p:spPr>
+        <p:txBody>
+          <a:bodyPr wrap="square" rtlCol="0" anchor="ctr"/>
+          <a:lstStyle/>
+          <a:p>
+            <a:pPr algn="ctr" indent="0" marL="0">
+              <a:buNone/>
+            </a:pPr>
+            <a:r>
+              <a:rPr lang="en-US" sz="1100" b="1" dirty="0">
+                <a:solidFill>
+                  <a:srgbClr val="8A6115"/>
+                </a:solidFill>
+                <a:latin typeface="Microsoft YaHei" pitchFamily="34" charset="0"/>
+                <a:ea typeface="Microsoft YaHei" pitchFamily="34" charset="-122"/>
+                <a:cs typeface="Microsoft YaHei" pitchFamily="34" charset="-120"/>
+              </a:rPr>
+              <a:t>是否</a:t>
+            </a:r>
+            <a:endParaRPr lang="en-US" sz="1100" dirty="0"/>
+          </a:p>
+          <a:p>
+            <a:pPr algn="ctr" indent="0" marL="0">
+              <a:buNone/>
+            </a:pPr>
+            <a:r>
+              <a:rPr lang="en-US" sz="1100" b="1" dirty="0">
+                <a:solidFill>
+                  <a:srgbClr val="8A6115"/>
+                </a:solidFill>
+                <a:latin typeface="Microsoft YaHei" pitchFamily="34" charset="0"/>
+                <a:ea typeface="Microsoft YaHei" pitchFamily="34" charset="-122"/>
+                <a:cs typeface="Microsoft YaHei" pitchFamily="34" charset="-120"/>
+              </a:rPr>
+              <a:t>洗钱？</a:t>
+            </a:r>
+            <a:endParaRPr lang="en-US" sz="1100" dirty="0"/>
+          </a:p>
+        </p:txBody>
+      </p:sp>
+      <p:sp>
+        <p:nvSpPr>
+          <p:cNvPr id="19" name="Shape 17"/>
+          <p:cNvSpPr/>
+          <p:nvPr/>
+        </p:nvSpPr>
+        <p:spPr>
+          <a:xfrm>
+            <a:off x="9464040" y="2286000"/>
+            <a:ext cx="246888" cy="0"/>
+          </a:xfrm>
+          <a:prstGeom prst="line">
+            <a:avLst/>
+          </a:prstGeom>
+          <a:noFill/>
+          <a:ln w="22225">
+            <a:solidFill>
+              <a:srgbClr val="9FB6C0"/>
+            </a:solidFill>
+            <a:prstDash val="solid"/>
+            <a:tailEnd type="triangle"/>
+          </a:ln>
+        </p:spPr>
+      </p:sp>
+      <p:sp>
+        <p:nvSpPr>
+          <p:cNvPr id="20" name="Shape 18"/>
+          <p:cNvSpPr/>
+          <p:nvPr/>
+        </p:nvSpPr>
+        <p:spPr>
+          <a:xfrm>
+            <a:off x="9710928" y="1828800"/>
+            <a:ext cx="1783080" cy="914400"/>
+          </a:xfrm>
+          <a:prstGeom prst="roundRect">
+            <a:avLst>
+              <a:gd name="adj" fmla="val 10000"/>
+            </a:avLst>
+          </a:prstGeom>
+          <a:solidFill>
+            <a:srgbClr val="F4FAFB"/>
+          </a:solidFill>
+          <a:ln w="12700">
+            <a:solidFill>
+              <a:srgbClr val="DCE8EE"/>
+            </a:solidFill>
+            <a:prstDash val="solid"/>
+          </a:ln>
+          <a:effectLst>
+            <a:outerShdw sx="100000" sy="100000" kx="0" ky="0" algn="bl" rotWithShape="0" blurRad="114300" dist="38100" dir="8100000">
+              <a:srgbClr val="0B1F2A">
+                <a:alpha val="16000"/>
+              </a:srgbClr>
+            </a:outerShdw>
+          </a:effectLst>
+        </p:spPr>
+      </p:sp>
+      <p:sp>
+        <p:nvSpPr>
+          <p:cNvPr id="21" name="Text 19"/>
+          <p:cNvSpPr/>
+          <p:nvPr/>
+        </p:nvSpPr>
+        <p:spPr>
+          <a:xfrm>
+            <a:off x="9756648" y="1828800"/>
+            <a:ext cx="1691640" cy="914400"/>
+          </a:xfrm>
+          <a:prstGeom prst="rect">
+            <a:avLst/>
+          </a:prstGeom>
+          <a:noFill/>
+          <a:ln/>
+        </p:spPr>
+        <p:txBody>
+          <a:bodyPr wrap="square" rtlCol="0" anchor="ctr"/>
+          <a:lstStyle/>
+          <a:p>
+            <a:pPr algn="ctr" indent="0" marL="0">
+              <a:lnSpc>
+                <a:spcPct val="105000"/>
+              </a:lnSpc>
+              <a:buNone/>
+            </a:pPr>
+            <a:r>
+              <a:rPr lang="en-US" sz="1300" b="1" dirty="0">
+                <a:solidFill>
+                  <a:srgbClr val="17313F"/>
+                </a:solidFill>
+                <a:latin typeface="Microsoft YaHei" pitchFamily="34" charset="0"/>
+                <a:ea typeface="Microsoft YaHei" pitchFamily="34" charset="-122"/>
+                <a:cs typeface="Microsoft YaHei" pitchFamily="34" charset="-120"/>
+              </a:rPr>
+              <a:t>进化与学习</a:t>
+            </a:r>
+            <a:endParaRPr lang="en-US" sz="1300" dirty="0"/>
+          </a:p>
+          <a:p>
+            <a:pPr algn="ctr" indent="0" marL="0">
+              <a:lnSpc>
+                <a:spcPct val="105000"/>
+              </a:lnSpc>
+              <a:buNone/>
+            </a:pPr>
+            <a:r>
+              <a:rPr lang="en-US" sz="1050" dirty="0">
+                <a:solidFill>
+                  <a:srgbClr val="71838F"/>
+                </a:solidFill>
+                <a:latin typeface="Microsoft YaHei" pitchFamily="34" charset="0"/>
+                <a:ea typeface="Microsoft YaHei" pitchFamily="34" charset="-122"/>
+                <a:cs typeface="Microsoft YaHei" pitchFamily="34" charset="-120"/>
+              </a:rPr>
+              <a:t>校准 · 发现</a:t>
+            </a:r>
+            <a:endParaRPr lang="en-US" sz="1300" dirty="0"/>
+          </a:p>
+        </p:txBody>
+      </p:sp>
+      <p:sp>
+        <p:nvSpPr>
+          <p:cNvPr id="22" name="Shape 20"/>
+          <p:cNvSpPr/>
+          <p:nvPr/>
+        </p:nvSpPr>
+        <p:spPr>
+          <a:xfrm>
+            <a:off x="4983480" y="2889504"/>
+            <a:ext cx="0" cy="539496"/>
+          </a:xfrm>
+          <a:prstGeom prst="line">
+            <a:avLst/>
+          </a:prstGeom>
+          <a:noFill/>
+          <a:ln w="22225">
+            <a:solidFill>
+              <a:srgbClr val="9FB6C0"/>
+            </a:solidFill>
+            <a:prstDash val="solid"/>
+            <a:tailEnd type="triangle"/>
+          </a:ln>
+        </p:spPr>
+      </p:sp>
+      <p:sp>
+        <p:nvSpPr>
+          <p:cNvPr id="23" name="Text 21"/>
+          <p:cNvSpPr/>
+          <p:nvPr/>
+        </p:nvSpPr>
+        <p:spPr>
+          <a:xfrm>
+            <a:off x="5074920" y="2907792"/>
+            <a:ext cx="548640" cy="256032"/>
           </a:xfrm>
           <a:prstGeom prst="rect">
             <a:avLst/>
@@ -6868,7 +6554,83 @@
               <a:buNone/>
             </a:pPr>
             <a:r>
-              <a:rPr lang="en-US" sz="1800" b="1" dirty="0">
+              <a:rPr lang="en-US" sz="950" b="1" dirty="0">
+                <a:solidFill>
+                  <a:srgbClr val="5D8AA8"/>
+                </a:solidFill>
+                <a:latin typeface="Microsoft YaHei" pitchFamily="34" charset="0"/>
+                <a:ea typeface="Microsoft YaHei" pitchFamily="34" charset="-122"/>
+                <a:cs typeface="Microsoft YaHei" pitchFamily="34" charset="-120"/>
+              </a:rPr>
+              <a:t>T3</a:t>
+            </a:r>
+            <a:endParaRPr lang="en-US" sz="950" dirty="0"/>
+          </a:p>
+        </p:txBody>
+      </p:sp>
+      <p:sp>
+        <p:nvSpPr>
+          <p:cNvPr id="24" name="Shape 22"/>
+          <p:cNvSpPr/>
+          <p:nvPr/>
+        </p:nvSpPr>
+        <p:spPr>
+          <a:xfrm>
+            <a:off x="4069080" y="3429000"/>
+            <a:ext cx="1828800" cy="685800"/>
+          </a:xfrm>
+          <a:prstGeom prst="roundRect">
+            <a:avLst>
+              <a:gd name="adj" fmla="val 13333"/>
+            </a:avLst>
+          </a:prstGeom>
+          <a:solidFill>
+            <a:srgbClr val="F4FAFB"/>
+          </a:solidFill>
+          <a:ln w="12700">
+            <a:solidFill>
+              <a:srgbClr val="DCE8EE"/>
+            </a:solidFill>
+            <a:prstDash val="solid"/>
+          </a:ln>
+          <a:effectLst>
+            <a:outerShdw sx="100000" sy="100000" kx="0" ky="0" algn="bl" rotWithShape="0" blurRad="114300" dist="38100" dir="8100000">
+              <a:srgbClr val="0B1F2A">
+                <a:alpha val="16000"/>
+              </a:srgbClr>
+            </a:outerShdw>
+          </a:effectLst>
+        </p:spPr>
+      </p:sp>
+      <p:sp>
+        <p:nvSpPr>
+          <p:cNvPr id="25" name="Text 23"/>
+          <p:cNvSpPr/>
+          <p:nvPr/>
+        </p:nvSpPr>
+        <p:spPr>
+          <a:xfrm>
+            <a:off x="4114800" y="3429000"/>
+            <a:ext cx="1737360" cy="685800"/>
+          </a:xfrm>
+          <a:prstGeom prst="rect">
+            <a:avLst/>
+          </a:prstGeom>
+          <a:noFill/>
+          <a:ln/>
+        </p:spPr>
+        <p:txBody>
+          <a:bodyPr wrap="square" rtlCol="0" anchor="ctr"/>
+          <a:lstStyle/>
+          <a:p>
+            <a:pPr algn="ctr" indent="0" marL="0">
+              <a:lnSpc>
+                <a:spcPct val="105000"/>
+              </a:lnSpc>
+              <a:buNone/>
+            </a:pPr>
+            <a:r>
+              <a:rPr lang="en-US" sz="1300" b="1" dirty="0">
                 <a:solidFill>
                   <a:srgbClr val="17313F"/>
                 </a:solidFill>
@@ -6876,22 +6638,46 @@
                 <a:ea typeface="Microsoft YaHei" pitchFamily="34" charset="-122"/>
                 <a:cs typeface="Microsoft YaHei" pitchFamily="34" charset="-120"/>
               </a:rPr>
-              <a:t>信号台账 + 校准</a:t>
-            </a:r>
-            <a:endParaRPr lang="en-US" sz="1800" dirty="0"/>
-          </a:p>
-        </p:txBody>
-      </p:sp>
-      <p:sp>
-        <p:nvSpPr>
-          <p:cNvPr id="21" name="Text 16"/>
-          <p:cNvSpPr/>
-          <p:nvPr/>
-        </p:nvSpPr>
-        <p:spPr>
-          <a:xfrm>
-            <a:off x="8421624" y="4069080"/>
-            <a:ext cx="2971800" cy="1371600"/>
+              <a:t>批量评分排序</a:t>
+            </a:r>
+            <a:endParaRPr lang="en-US" sz="1300" dirty="0"/>
+          </a:p>
+        </p:txBody>
+      </p:sp>
+      <p:sp>
+        <p:nvSpPr>
+          <p:cNvPr id="26" name="Shape 24"/>
+          <p:cNvSpPr/>
+          <p:nvPr/>
+        </p:nvSpPr>
+        <p:spPr>
+          <a:xfrm>
+            <a:off x="8732520" y="2889504"/>
+            <a:ext cx="0" cy="539496"/>
+          </a:xfrm>
+          <a:prstGeom prst="line">
+            <a:avLst/>
+          </a:prstGeom>
+          <a:noFill/>
+          <a:ln w="22225">
+            <a:solidFill>
+              <a:srgbClr val="9FB6C0"/>
+            </a:solidFill>
+            <a:prstDash val="solid"/>
+            <a:tailEnd type="triangle"/>
+          </a:ln>
+        </p:spPr>
+      </p:sp>
+      <p:sp>
+        <p:nvSpPr>
+          <p:cNvPr id="27" name="Text 25"/>
+          <p:cNvSpPr/>
+          <p:nvPr/>
+        </p:nvSpPr>
+        <p:spPr>
+          <a:xfrm>
+            <a:off x="8796528" y="2907792"/>
+            <a:ext cx="914400" cy="256032"/>
           </a:xfrm>
           <a:prstGeom prst="rect">
             <a:avLst/>
@@ -6904,13 +6690,254 @@
           <a:lstStyle/>
           <a:p>
             <a:pPr indent="0" marL="0">
+              <a:buNone/>
+            </a:pPr>
+            <a:r>
+              <a:rPr lang="en-US" sz="950" b="1" dirty="0">
+                <a:solidFill>
+                  <a:srgbClr val="22875A"/>
+                </a:solidFill>
+                <a:latin typeface="Microsoft YaHei" pitchFamily="34" charset="0"/>
+                <a:ea typeface="Microsoft YaHei" pitchFamily="34" charset="-122"/>
+                <a:cs typeface="Microsoft YaHei" pitchFamily="34" charset="-120"/>
+              </a:rPr>
+              <a:t>是 / 否</a:t>
+            </a:r>
+            <a:endParaRPr lang="en-US" sz="950" dirty="0"/>
+          </a:p>
+        </p:txBody>
+      </p:sp>
+      <p:sp>
+        <p:nvSpPr>
+          <p:cNvPr id="28" name="Shape 26"/>
+          <p:cNvSpPr/>
+          <p:nvPr/>
+        </p:nvSpPr>
+        <p:spPr>
+          <a:xfrm>
+            <a:off x="7772400" y="3429000"/>
+            <a:ext cx="1920240" cy="685800"/>
+          </a:xfrm>
+          <a:prstGeom prst="roundRect">
+            <a:avLst>
+              <a:gd name="adj" fmla="val 13333"/>
+            </a:avLst>
+          </a:prstGeom>
+          <a:solidFill>
+            <a:srgbClr val="F4FAFB"/>
+          </a:solidFill>
+          <a:ln w="12700">
+            <a:solidFill>
+              <a:srgbClr val="DCE8EE"/>
+            </a:solidFill>
+            <a:prstDash val="solid"/>
+          </a:ln>
+          <a:effectLst>
+            <a:outerShdw sx="100000" sy="100000" kx="0" ky="0" algn="bl" rotWithShape="0" blurRad="114300" dist="38100" dir="8100000">
+              <a:srgbClr val="0B1F2A">
+                <a:alpha val="16000"/>
+              </a:srgbClr>
+            </a:outerShdw>
+          </a:effectLst>
+        </p:spPr>
+      </p:sp>
+      <p:sp>
+        <p:nvSpPr>
+          <p:cNvPr id="29" name="Text 27"/>
+          <p:cNvSpPr/>
+          <p:nvPr/>
+        </p:nvSpPr>
+        <p:spPr>
+          <a:xfrm>
+            <a:off x="7818120" y="3429000"/>
+            <a:ext cx="1828800" cy="685800"/>
+          </a:xfrm>
+          <a:prstGeom prst="rect">
+            <a:avLst/>
+          </a:prstGeom>
+          <a:noFill/>
+          <a:ln/>
+        </p:spPr>
+        <p:txBody>
+          <a:bodyPr wrap="square" rtlCol="0" anchor="ctr"/>
+          <a:lstStyle/>
+          <a:p>
+            <a:pPr algn="ctr" indent="0" marL="0">
               <a:lnSpc>
-                <a:spcPct val="125000"/>
+                <a:spcPct val="105000"/>
               </a:lnSpc>
               <a:buNone/>
             </a:pPr>
             <a:r>
-              <a:rPr lang="en-US" sz="1250" dirty="0">
+              <a:rPr lang="en-US" sz="1300" b="1" dirty="0">
+                <a:solidFill>
+                  <a:srgbClr val="17313F"/>
+                </a:solidFill>
+                <a:latin typeface="Microsoft YaHei" pitchFamily="34" charset="0"/>
+                <a:ea typeface="Microsoft YaHei" pitchFamily="34" charset="-122"/>
+                <a:cs typeface="Microsoft YaHei" pitchFamily="34" charset="-120"/>
+              </a:rPr>
+              <a:t>记录结论 → 学习</a:t>
+            </a:r>
+            <a:endParaRPr lang="en-US" sz="1300" dirty="0"/>
+          </a:p>
+        </p:txBody>
+      </p:sp>
+      <p:sp>
+        <p:nvSpPr>
+          <p:cNvPr id="30" name="Shape 28"/>
+          <p:cNvSpPr/>
+          <p:nvPr/>
+        </p:nvSpPr>
+        <p:spPr>
+          <a:xfrm>
+            <a:off x="10602468" y="2743200"/>
+            <a:ext cx="0" cy="1591056"/>
+          </a:xfrm>
+          <a:prstGeom prst="line">
+            <a:avLst/>
+          </a:prstGeom>
+          <a:noFill/>
+          <a:ln w="22225">
+            <a:solidFill>
+              <a:srgbClr val="9FB6C0"/>
+            </a:solidFill>
+            <a:prstDash val="solid"/>
+            <a:tailEnd type="triangle"/>
+          </a:ln>
+        </p:spPr>
+      </p:sp>
+      <p:sp>
+        <p:nvSpPr>
+          <p:cNvPr id="31" name="Shape 29"/>
+          <p:cNvSpPr/>
+          <p:nvPr/>
+        </p:nvSpPr>
+        <p:spPr>
+          <a:xfrm>
+            <a:off x="9870948" y="4334256"/>
+            <a:ext cx="1463040" cy="1207008"/>
+          </a:xfrm>
+          <a:prstGeom prst="diamond">
+            <a:avLst/>
+          </a:prstGeom>
+          <a:solidFill>
+            <a:srgbClr val="FFF6E8"/>
+          </a:solidFill>
+          <a:ln w="19050">
+            <a:solidFill>
+              <a:srgbClr val="C9861A"/>
+            </a:solidFill>
+            <a:prstDash val="solid"/>
+          </a:ln>
+        </p:spPr>
+      </p:sp>
+      <p:sp>
+        <p:nvSpPr>
+          <p:cNvPr id="32" name="Text 30"/>
+          <p:cNvSpPr/>
+          <p:nvPr/>
+        </p:nvSpPr>
+        <p:spPr>
+          <a:xfrm>
+            <a:off x="9870948" y="4334256"/>
+            <a:ext cx="1463040" cy="1207008"/>
+          </a:xfrm>
+          <a:prstGeom prst="rect">
+            <a:avLst/>
+          </a:prstGeom>
+          <a:noFill/>
+          <a:ln/>
+        </p:spPr>
+        <p:txBody>
+          <a:bodyPr wrap="square" rtlCol="0" anchor="ctr"/>
+          <a:lstStyle/>
+          <a:p>
+            <a:pPr algn="ctr" indent="0" marL="0">
+              <a:buNone/>
+            </a:pPr>
+            <a:r>
+              <a:rPr lang="en-US" sz="1100" b="1" dirty="0">
+                <a:solidFill>
+                  <a:srgbClr val="8A6115"/>
+                </a:solidFill>
+                <a:latin typeface="Microsoft YaHei" pitchFamily="34" charset="0"/>
+                <a:ea typeface="Microsoft YaHei" pitchFamily="34" charset="-122"/>
+                <a:cs typeface="Microsoft YaHei" pitchFamily="34" charset="-120"/>
+              </a:rPr>
+              <a:t>样本 ≥ N</a:t>
+            </a:r>
+            <a:endParaRPr lang="en-US" sz="1100" dirty="0"/>
+          </a:p>
+          <a:p>
+            <a:pPr algn="ctr" indent="0" marL="0">
+              <a:buNone/>
+            </a:pPr>
+            <a:r>
+              <a:rPr lang="en-US" sz="1100" b="1" dirty="0">
+                <a:solidFill>
+                  <a:srgbClr val="8A6115"/>
+                </a:solidFill>
+                <a:latin typeface="Microsoft YaHei" pitchFamily="34" charset="0"/>
+                <a:ea typeface="Microsoft YaHei" pitchFamily="34" charset="-122"/>
+                <a:cs typeface="Microsoft YaHei" pitchFamily="34" charset="-120"/>
+              </a:rPr>
+              <a:t>且 PPV 达标？</a:t>
+            </a:r>
+            <a:endParaRPr lang="en-US" sz="1100" dirty="0"/>
+          </a:p>
+        </p:txBody>
+      </p:sp>
+      <p:sp>
+        <p:nvSpPr>
+          <p:cNvPr id="33" name="Shape 31"/>
+          <p:cNvSpPr/>
+          <p:nvPr/>
+        </p:nvSpPr>
+        <p:spPr>
+          <a:xfrm>
+            <a:off x="9870948" y="4937760"/>
+            <a:ext cx="-269748" cy="0"/>
+          </a:xfrm>
+          <a:prstGeom prst="line">
+            <a:avLst/>
+          </a:prstGeom>
+          <a:noFill/>
+          <a:ln w="22225">
+            <a:solidFill>
+              <a:srgbClr val="9FB6C0"/>
+            </a:solidFill>
+            <a:prstDash val="solid"/>
+            <a:tailEnd type="triangle"/>
+          </a:ln>
+        </p:spPr>
+      </p:sp>
+      <p:sp>
+        <p:nvSpPr>
+          <p:cNvPr id="34" name="Text 32"/>
+          <p:cNvSpPr/>
+          <p:nvPr/>
+        </p:nvSpPr>
+        <p:spPr>
+          <a:xfrm>
+            <a:off x="9601200" y="4553712"/>
+            <a:ext cx="457200" cy="237744"/>
+          </a:xfrm>
+          <a:prstGeom prst="rect">
+            <a:avLst/>
+          </a:prstGeom>
+          <a:noFill/>
+          <a:ln/>
+        </p:spPr>
+        <p:txBody>
+          <a:bodyPr wrap="square" rtlCol="0" anchor="ctr"/>
+          <a:lstStyle/>
+          <a:p>
+            <a:pPr algn="ctr" indent="0" marL="0">
+              <a:buNone/>
+            </a:pPr>
+            <a:r>
+              <a:rPr lang="en-US" sz="950" b="1" dirty="0">
                 <a:solidFill>
                   <a:srgbClr val="71838F"/>
                 </a:solidFill>
@@ -6918,15 +6945,253 @@
                 <a:ea typeface="Microsoft YaHei" pitchFamily="34" charset="-122"/>
                 <a:cs typeface="Microsoft YaHei" pitchFamily="34" charset="-120"/>
               </a:rPr>
-              <a:t>每个信号靠真实命中率自动升级 / 降级，不靠拍脑袋；所有变更可审计。</a:t>
-            </a:r>
-            <a:endParaRPr lang="en-US" sz="1250" dirty="0"/>
-          </a:p>
-        </p:txBody>
-      </p:sp>
-      <p:sp>
-        <p:nvSpPr>
-          <p:cNvPr id="22" name="Text 17"/>
+              <a:t>否</a:t>
+            </a:r>
+            <a:endParaRPr lang="en-US" sz="950" dirty="0"/>
+          </a:p>
+        </p:txBody>
+      </p:sp>
+      <p:sp>
+        <p:nvSpPr>
+          <p:cNvPr id="35" name="Shape 33"/>
+          <p:cNvSpPr/>
+          <p:nvPr/>
+        </p:nvSpPr>
+        <p:spPr>
+          <a:xfrm>
+            <a:off x="7680960" y="4617720"/>
+            <a:ext cx="1920240" cy="640080"/>
+          </a:xfrm>
+          <a:prstGeom prst="roundRect">
+            <a:avLst>
+              <a:gd name="adj" fmla="val 14286"/>
+            </a:avLst>
+          </a:prstGeom>
+          <a:solidFill>
+            <a:srgbClr val="F4FAFB"/>
+          </a:solidFill>
+          <a:ln w="12700">
+            <a:solidFill>
+              <a:srgbClr val="DCE8EE"/>
+            </a:solidFill>
+            <a:prstDash val="solid"/>
+          </a:ln>
+          <a:effectLst>
+            <a:outerShdw sx="100000" sy="100000" kx="0" ky="0" algn="bl" rotWithShape="0" blurRad="114300" dist="38100" dir="8100000">
+              <a:srgbClr val="0B1F2A">
+                <a:alpha val="16000"/>
+              </a:srgbClr>
+            </a:outerShdw>
+          </a:effectLst>
+        </p:spPr>
+      </p:sp>
+      <p:sp>
+        <p:nvSpPr>
+          <p:cNvPr id="36" name="Text 34"/>
+          <p:cNvSpPr/>
+          <p:nvPr/>
+        </p:nvSpPr>
+        <p:spPr>
+          <a:xfrm>
+            <a:off x="7726680" y="4617720"/>
+            <a:ext cx="1828800" cy="640080"/>
+          </a:xfrm>
+          <a:prstGeom prst="rect">
+            <a:avLst/>
+          </a:prstGeom>
+          <a:noFill/>
+          <a:ln/>
+        </p:spPr>
+        <p:txBody>
+          <a:bodyPr wrap="square" rtlCol="0" anchor="ctr"/>
+          <a:lstStyle/>
+          <a:p>
+            <a:pPr algn="ctr" indent="0" marL="0">
+              <a:lnSpc>
+                <a:spcPct val="105000"/>
+              </a:lnSpc>
+              <a:buNone/>
+            </a:pPr>
+            <a:r>
+              <a:rPr lang="en-US" sz="1300" b="1" dirty="0">
+                <a:solidFill>
+                  <a:srgbClr val="17313F"/>
+                </a:solidFill>
+                <a:latin typeface="Microsoft YaHei" pitchFamily="34" charset="0"/>
+                <a:ea typeface="Microsoft YaHei" pitchFamily="34" charset="-122"/>
+                <a:cs typeface="Microsoft YaHei" pitchFamily="34" charset="-120"/>
+              </a:rPr>
+              <a:t>继续观察</a:t>
+            </a:r>
+            <a:endParaRPr lang="en-US" sz="1300" dirty="0"/>
+          </a:p>
+        </p:txBody>
+      </p:sp>
+      <p:sp>
+        <p:nvSpPr>
+          <p:cNvPr id="37" name="Text 35"/>
+          <p:cNvSpPr/>
+          <p:nvPr/>
+        </p:nvSpPr>
+        <p:spPr>
+          <a:xfrm>
+            <a:off x="10698480" y="5394960"/>
+            <a:ext cx="640080" cy="237744"/>
+          </a:xfrm>
+          <a:prstGeom prst="rect">
+            <a:avLst/>
+          </a:prstGeom>
+          <a:noFill/>
+          <a:ln/>
+        </p:spPr>
+        <p:txBody>
+          <a:bodyPr wrap="square" rtlCol="0" anchor="ctr"/>
+          <a:lstStyle/>
+          <a:p>
+            <a:pPr indent="0" marL="0">
+              <a:buNone/>
+            </a:pPr>
+            <a:r>
+              <a:rPr lang="en-US" sz="950" b="1" dirty="0">
+                <a:solidFill>
+                  <a:srgbClr val="22875A"/>
+                </a:solidFill>
+                <a:latin typeface="Microsoft YaHei" pitchFamily="34" charset="0"/>
+                <a:ea typeface="Microsoft YaHei" pitchFamily="34" charset="-122"/>
+                <a:cs typeface="Microsoft YaHei" pitchFamily="34" charset="-120"/>
+              </a:rPr>
+              <a:t>是</a:t>
+            </a:r>
+            <a:endParaRPr lang="en-US" sz="950" dirty="0"/>
+          </a:p>
+        </p:txBody>
+      </p:sp>
+      <p:sp>
+        <p:nvSpPr>
+          <p:cNvPr id="38" name="Shape 36"/>
+          <p:cNvSpPr/>
+          <p:nvPr/>
+        </p:nvSpPr>
+        <p:spPr>
+          <a:xfrm>
+            <a:off x="10602468" y="5541264"/>
+            <a:ext cx="0" cy="448056"/>
+          </a:xfrm>
+          <a:prstGeom prst="line">
+            <a:avLst/>
+          </a:prstGeom>
+          <a:noFill/>
+          <a:ln w="21590">
+            <a:solidFill>
+              <a:srgbClr val="1BA39C"/>
+            </a:solidFill>
+            <a:prstDash val="dash"/>
+          </a:ln>
+        </p:spPr>
+      </p:sp>
+      <p:sp>
+        <p:nvSpPr>
+          <p:cNvPr id="39" name="Shape 37"/>
+          <p:cNvSpPr/>
+          <p:nvPr/>
+        </p:nvSpPr>
+        <p:spPr>
+          <a:xfrm>
+            <a:off x="3131820" y="5989320"/>
+            <a:ext cx="7470648" cy="0"/>
+          </a:xfrm>
+          <a:prstGeom prst="line">
+            <a:avLst/>
+          </a:prstGeom>
+          <a:noFill/>
+          <a:ln w="21590">
+            <a:solidFill>
+              <a:srgbClr val="1BA39C"/>
+            </a:solidFill>
+            <a:prstDash val="dash"/>
+          </a:ln>
+        </p:spPr>
+      </p:sp>
+      <p:sp>
+        <p:nvSpPr>
+          <p:cNvPr id="40" name="Shape 38"/>
+          <p:cNvSpPr/>
+          <p:nvPr/>
+        </p:nvSpPr>
+        <p:spPr>
+          <a:xfrm>
+            <a:off x="3131820" y="2743200"/>
+            <a:ext cx="0" cy="3246120"/>
+          </a:xfrm>
+          <a:prstGeom prst="line">
+            <a:avLst/>
+          </a:prstGeom>
+          <a:noFill/>
+          <a:ln w="21590">
+            <a:solidFill>
+              <a:srgbClr val="1BA39C"/>
+            </a:solidFill>
+            <a:prstDash val="dash"/>
+            <a:headEnd type="triangle"/>
+          </a:ln>
+        </p:spPr>
+      </p:sp>
+      <p:sp>
+        <p:nvSpPr>
+          <p:cNvPr id="41" name="Text 39"/>
+          <p:cNvSpPr/>
+          <p:nvPr/>
+        </p:nvSpPr>
+        <p:spPr>
+          <a:xfrm>
+            <a:off x="3383280" y="5596128"/>
+            <a:ext cx="8046720" cy="365760"/>
+          </a:xfrm>
+          <a:prstGeom prst="rect">
+            <a:avLst/>
+          </a:prstGeom>
+          <a:noFill/>
+          <a:ln/>
+        </p:spPr>
+        <p:txBody>
+          <a:bodyPr wrap="square" rtlCol="0" anchor="ctr"/>
+          <a:lstStyle/>
+          <a:p>
+            <a:pPr indent="0" marL="0">
+              <a:buNone/>
+            </a:pPr>
+            <a:r>
+              <a:rPr lang="en-US" sz="1150" b="1" dirty="0">
+                <a:solidFill>
+                  <a:srgbClr val="1BA39C"/>
+                </a:solidFill>
+                <a:latin typeface="Microsoft YaHei" pitchFamily="34" charset="0"/>
+                <a:ea typeface="Microsoft YaHei" pitchFamily="34" charset="-122"/>
+                <a:cs typeface="Microsoft YaHei" pitchFamily="34" charset="-120"/>
+              </a:rPr>
+              <a:t>新信号转正 / 调整分层  </a:t>
+            </a:r>
+            <a:pPr indent="0" marL="0">
+              <a:buNone/>
+            </a:pPr>
+            <a:r>
+              <a:rPr lang="en-US" sz="1150" dirty="0">
+                <a:solidFill>
+                  <a:srgbClr val="17313F"/>
+                </a:solidFill>
+                <a:latin typeface="Microsoft YaHei" pitchFamily="34" charset="0"/>
+                <a:ea typeface="Microsoft YaHei" pitchFamily="34" charset="-122"/>
+                <a:cs typeface="Microsoft YaHei" pitchFamily="34" charset="-120"/>
+              </a:rPr>
+              <a:t>—— 受统计校准 + 人工审批把关。</a:t>
+            </a:r>
+            <a:endParaRPr lang="en-US" sz="1150" dirty="0"/>
+          </a:p>
+        </p:txBody>
+      </p:sp>
+      <p:sp>
+        <p:nvSpPr>
+          <p:cNvPr id="42" name="Text 40"/>
           <p:cNvSpPr/>
           <p:nvPr/>
         </p:nvSpPr>
@@ -6965,7 +7230,7 @@
       </p:sp>
       <p:sp>
         <p:nvSpPr>
-          <p:cNvPr id="23" name="Text 18"/>
+          <p:cNvPr id="43" name="Text 41"/>
           <p:cNvSpPr/>
           <p:nvPr/>
         </p:nvSpPr>
@@ -7067,7 +7332,7 @@
                 <a:ea typeface="Microsoft YaHei" pitchFamily="34" charset="-122"/>
                 <a:cs typeface="Microsoft YaHei" pitchFamily="34" charset="-120"/>
               </a:rPr>
-              <a:t>重点创新 · 自我进化（Hermes Agent）</a:t>
+              <a:t>三个核心创新</a:t>
             </a:r>
             <a:endParaRPr lang="en-US" sz="1200" dirty="0"/>
           </a:p>
@@ -7106,7 +7371,7 @@
                 <a:ea typeface="Microsoft YaHei" pitchFamily="34" charset="-122"/>
                 <a:cs typeface="Microsoft YaHei" pitchFamily="34" charset="-120"/>
               </a:rPr>
-              <a:t>系统自己「发现」新风险，但分级仍需把关</a:t>
+              <a:t>从「静态规则」走向「会进化的助手」</a:t>
             </a:r>
             <a:endParaRPr lang="en-US" sz="3000" dirty="0"/>
           </a:p>
@@ -7114,80 +7379,48 @@
       </p:sp>
       <p:sp>
         <p:nvSpPr>
-          <p:cNvPr id="4" name="Text 2"/>
-          <p:cNvSpPr/>
-          <p:nvPr/>
-        </p:nvSpPr>
-        <p:spPr>
-          <a:xfrm>
-            <a:off x="548640" y="1600200"/>
-            <a:ext cx="10972800" cy="457200"/>
-          </a:xfrm>
-          <a:prstGeom prst="rect">
-            <a:avLst/>
-          </a:prstGeom>
-          <a:noFill/>
-          <a:ln/>
-        </p:spPr>
-        <p:txBody>
-          <a:bodyPr wrap="square" rtlCol="0" anchor="ctr"/>
-          <a:lstStyle/>
-          <a:p>
-            <a:pPr indent="0" marL="0">
-              <a:buNone/>
-            </a:pPr>
-            <a:r>
-              <a:rPr lang="en-US" sz="1400" dirty="0">
-                <a:solidFill>
-                  <a:srgbClr val="71838F"/>
-                </a:solidFill>
-                <a:latin typeface="Microsoft YaHei" pitchFamily="34" charset="0"/>
-                <a:ea typeface="Microsoft YaHei" pitchFamily="34" charset="-122"/>
-                <a:cs typeface="Microsoft YaHei" pitchFamily="34" charset="-120"/>
-              </a:rPr>
-              <a:t>过去信号全靠法务凭经验预先定义；现在 Agent 从积累的案例中主动提出新假设。</a:t>
-            </a:r>
-            <a:endParaRPr lang="en-US" sz="1400" dirty="0"/>
-          </a:p>
-        </p:txBody>
-      </p:sp>
-      <p:sp>
-        <p:nvSpPr>
-          <p:cNvPr id="5" name="Shape 3"/>
-          <p:cNvSpPr/>
-          <p:nvPr/>
-        </p:nvSpPr>
-        <p:spPr>
-          <a:xfrm>
-            <a:off x="548640" y="2286000"/>
-            <a:ext cx="2468880" cy="1828800"/>
+          <p:cNvPr id="4" name="Shape 2"/>
+          <p:cNvSpPr/>
+          <p:nvPr/>
+        </p:nvSpPr>
+        <p:spPr>
+          <a:xfrm>
+            <a:off x="548640" y="2148840"/>
+            <a:ext cx="3474720" cy="3383280"/>
           </a:xfrm>
           <a:prstGeom prst="roundRect">
             <a:avLst>
-              <a:gd name="adj" fmla="val 6000"/>
+              <a:gd name="adj" fmla="val 3784"/>
             </a:avLst>
           </a:prstGeom>
           <a:solidFill>
             <a:srgbClr val="F4FAFB"/>
           </a:solidFill>
-          <a:ln w="19050">
+          <a:ln w="12700">
             <a:solidFill>
-              <a:srgbClr val="1BA39C"/>
+              <a:srgbClr val="DCE8EE"/>
             </a:solidFill>
             <a:prstDash val="solid"/>
           </a:ln>
-        </p:spPr>
-      </p:sp>
-      <p:sp>
-        <p:nvSpPr>
-          <p:cNvPr id="6" name="Shape 4"/>
-          <p:cNvSpPr/>
-          <p:nvPr/>
-        </p:nvSpPr>
-        <p:spPr>
-          <a:xfrm>
-            <a:off x="1463040" y="2487168"/>
-            <a:ext cx="640080" cy="640080"/>
+          <a:effectLst>
+            <a:outerShdw sx="100000" sy="100000" kx="0" ky="0" algn="bl" rotWithShape="0" blurRad="114300" dist="38100" dir="8100000">
+              <a:srgbClr val="0B1F2A">
+                <a:alpha val="16000"/>
+              </a:srgbClr>
+            </a:outerShdw>
+          </a:effectLst>
+        </p:spPr>
+      </p:sp>
+      <p:sp>
+        <p:nvSpPr>
+          <p:cNvPr id="5" name="Shape 3"/>
+          <p:cNvSpPr/>
+          <p:nvPr/>
+        </p:nvSpPr>
+        <p:spPr>
+          <a:xfrm>
+            <a:off x="868680" y="2468880"/>
+            <a:ext cx="868680" cy="868680"/>
           </a:xfrm>
           <a:prstGeom prst="ellipse">
             <a:avLst/>
@@ -7200,7 +7433,7 @@
       </p:sp>
       <p:pic>
         <p:nvPicPr>
-          <p:cNvPr id="7" name="Image 0" descr="preencoded.png">    </p:cNvPr>
+          <p:cNvPr id="6" name="Image 0" descr="preencoded.png">    </p:cNvPr>
           <p:cNvPicPr>
             <a:picLocks noChangeAspect="1"/>
           </p:cNvPicPr>
@@ -7214,8 +7447,8 @@
         </p:blipFill>
         <p:spPr>
           <a:xfrm>
-            <a:off x="1591056" y="2615184"/>
-            <a:ext cx="384048" cy="384048"/>
+            <a:off x="1069848" y="2670048"/>
+            <a:ext cx="466344" cy="466344"/>
           </a:xfrm>
           <a:prstGeom prst="rect">
             <a:avLst/>
@@ -7224,75 +7457,111 @@
       </p:pic>
       <p:sp>
         <p:nvSpPr>
+          <p:cNvPr id="7" name="Text 4"/>
+          <p:cNvSpPr/>
+          <p:nvPr/>
+        </p:nvSpPr>
+        <p:spPr>
+          <a:xfrm>
+            <a:off x="2834640" y="2423160"/>
+            <a:ext cx="1005840" cy="640080"/>
+          </a:xfrm>
+          <a:prstGeom prst="rect">
+            <a:avLst/>
+          </a:prstGeom>
+          <a:noFill/>
+          <a:ln/>
+        </p:spPr>
+        <p:txBody>
+          <a:bodyPr wrap="square" rtlCol="0" anchor="ctr"/>
+          <a:lstStyle/>
+          <a:p>
+            <a:pPr algn="r" indent="0" marL="0">
+              <a:buNone/>
+            </a:pPr>
+            <a:r>
+              <a:rPr lang="en-US" sz="3400" b="1" dirty="0">
+                <a:solidFill>
+                  <a:srgbClr val="CFE0E6"/>
+                </a:solidFill>
+                <a:latin typeface="Microsoft YaHei" pitchFamily="34" charset="0"/>
+                <a:ea typeface="Microsoft YaHei" pitchFamily="34" charset="-122"/>
+                <a:cs typeface="Microsoft YaHei" pitchFamily="34" charset="-120"/>
+              </a:rPr>
+              <a:t>01</a:t>
+            </a:r>
+            <a:endParaRPr lang="en-US" sz="3400" dirty="0"/>
+          </a:p>
+        </p:txBody>
+      </p:sp>
+      <p:sp>
+        <p:nvSpPr>
           <p:cNvPr id="8" name="Text 5"/>
           <p:cNvSpPr/>
           <p:nvPr/>
         </p:nvSpPr>
         <p:spPr>
           <a:xfrm>
-            <a:off x="640080" y="3200400"/>
-            <a:ext cx="2286000" cy="411480"/>
-          </a:xfrm>
-          <a:prstGeom prst="rect">
-            <a:avLst/>
-          </a:prstGeom>
-          <a:noFill/>
-          <a:ln/>
-        </p:spPr>
-        <p:txBody>
-          <a:bodyPr wrap="square" rtlCol="0" anchor="ctr"/>
-          <a:lstStyle/>
-          <a:p>
-            <a:pPr algn="ctr" indent="0" marL="0">
+            <a:off x="868680" y="3520440"/>
+            <a:ext cx="2971800" cy="502920"/>
+          </a:xfrm>
+          <a:prstGeom prst="rect">
+            <a:avLst/>
+          </a:prstGeom>
+          <a:noFill/>
+          <a:ln/>
+        </p:spPr>
+        <p:txBody>
+          <a:bodyPr wrap="square" rtlCol="0" anchor="ctr"/>
+          <a:lstStyle/>
+          <a:p>
+            <a:pPr indent="0" marL="0">
+              <a:buNone/>
+            </a:pPr>
+            <a:r>
+              <a:rPr lang="en-US" sz="1800" b="1" dirty="0">
+                <a:solidFill>
+                  <a:srgbClr val="17313F"/>
+                </a:solidFill>
+                <a:latin typeface="Microsoft YaHei" pitchFamily="34" charset="0"/>
+                <a:ea typeface="Microsoft YaHei" pitchFamily="34" charset="-122"/>
+                <a:cs typeface="Microsoft YaHei" pitchFamily="34" charset="-120"/>
+              </a:rPr>
+              <a:t>AI 调查 Agent</a:t>
+            </a:r>
+            <a:endParaRPr lang="en-US" sz="1800" dirty="0"/>
+          </a:p>
+        </p:txBody>
+      </p:sp>
+      <p:sp>
+        <p:nvSpPr>
+          <p:cNvPr id="9" name="Text 6"/>
+          <p:cNvSpPr/>
+          <p:nvPr/>
+        </p:nvSpPr>
+        <p:spPr>
+          <a:xfrm>
+            <a:off x="886968" y="4069080"/>
+            <a:ext cx="2971800" cy="1371600"/>
+          </a:xfrm>
+          <a:prstGeom prst="rect">
+            <a:avLst/>
+          </a:prstGeom>
+          <a:noFill/>
+          <a:ln/>
+        </p:spPr>
+        <p:txBody>
+          <a:bodyPr wrap="square" rtlCol="0" anchor="ctr"/>
+          <a:lstStyle/>
+          <a:p>
+            <a:pPr indent="0" marL="0">
               <a:lnSpc>
-                <a:spcPct val="100000"/>
+                <a:spcPct val="125000"/>
               </a:lnSpc>
               <a:buNone/>
             </a:pPr>
             <a:r>
-              <a:rPr lang="en-US" sz="1450" b="1" dirty="0">
-                <a:solidFill>
-                  <a:srgbClr val="17313F"/>
-                </a:solidFill>
-                <a:latin typeface="Microsoft YaHei" pitchFamily="34" charset="0"/>
-                <a:ea typeface="Microsoft YaHei" pitchFamily="34" charset="-122"/>
-                <a:cs typeface="Microsoft YaHei" pitchFamily="34" charset="-120"/>
-              </a:rPr>
-              <a:t>Agent 发现</a:t>
-            </a:r>
-            <a:endParaRPr lang="en-US" sz="1450" dirty="0"/>
-          </a:p>
-        </p:txBody>
-      </p:sp>
-      <p:sp>
-        <p:nvSpPr>
-          <p:cNvPr id="9" name="Text 6"/>
-          <p:cNvSpPr/>
-          <p:nvPr/>
-        </p:nvSpPr>
-        <p:spPr>
-          <a:xfrm>
-            <a:off x="658368" y="3639312"/>
-            <a:ext cx="2249424" cy="411480"/>
-          </a:xfrm>
-          <a:prstGeom prst="rect">
-            <a:avLst/>
-          </a:prstGeom>
-          <a:noFill/>
-          <a:ln/>
-        </p:spPr>
-        <p:txBody>
-          <a:bodyPr wrap="square" rtlCol="0" anchor="ctr"/>
-          <a:lstStyle/>
-          <a:p>
-            <a:pPr algn="ctr" indent="0" marL="0">
-              <a:lnSpc>
-                <a:spcPct val="100000"/>
-              </a:lnSpc>
-              <a:buNone/>
-            </a:pPr>
-            <a:r>
-              <a:rPr lang="en-US" sz="1150" dirty="0">
+              <a:rPr lang="en-US" sz="1250" dirty="0">
                 <a:solidFill>
                   <a:srgbClr val="71838F"/>
                 </a:solidFill>
@@ -7300,15 +7569,69 @@
                 <a:ea typeface="Microsoft YaHei" pitchFamily="34" charset="-122"/>
                 <a:cs typeface="Microsoft YaHei" pitchFamily="34" charset="-120"/>
               </a:rPr>
-              <a:t>学出反复出现的新模式</a:t>
-            </a:r>
-            <a:endParaRPr lang="en-US" sz="1150" dirty="0"/>
-          </a:p>
-        </p:txBody>
+              <a:t>自动多源取证（企查查 / 天眼查 / Dow Jones），把每件调查从 1 小时压到几分钟；人做最终判断。</a:t>
+            </a:r>
+            <a:endParaRPr lang="en-US" sz="1250" dirty="0"/>
+          </a:p>
+        </p:txBody>
+      </p:sp>
+      <p:sp>
+        <p:nvSpPr>
+          <p:cNvPr id="10" name="Shape 7"/>
+          <p:cNvSpPr/>
+          <p:nvPr/>
+        </p:nvSpPr>
+        <p:spPr>
+          <a:xfrm>
+            <a:off x="4315968" y="2148840"/>
+            <a:ext cx="3474720" cy="3383280"/>
+          </a:xfrm>
+          <a:prstGeom prst="roundRect">
+            <a:avLst>
+              <a:gd name="adj" fmla="val 3784"/>
+            </a:avLst>
+          </a:prstGeom>
+          <a:solidFill>
+            <a:srgbClr val="F4FAFB"/>
+          </a:solidFill>
+          <a:ln w="12700">
+            <a:solidFill>
+              <a:srgbClr val="DCE8EE"/>
+            </a:solidFill>
+            <a:prstDash val="solid"/>
+          </a:ln>
+          <a:effectLst>
+            <a:outerShdw sx="100000" sy="100000" kx="0" ky="0" algn="bl" rotWithShape="0" blurRad="114300" dist="38100" dir="8100000">
+              <a:srgbClr val="0B1F2A">
+                <a:alpha val="16000"/>
+              </a:srgbClr>
+            </a:outerShdw>
+          </a:effectLst>
+        </p:spPr>
+      </p:sp>
+      <p:sp>
+        <p:nvSpPr>
+          <p:cNvPr id="11" name="Shape 8"/>
+          <p:cNvSpPr/>
+          <p:nvPr/>
+        </p:nvSpPr>
+        <p:spPr>
+          <a:xfrm>
+            <a:off x="4636008" y="2468880"/>
+            <a:ext cx="868680" cy="868680"/>
+          </a:xfrm>
+          <a:prstGeom prst="ellipse">
+            <a:avLst/>
+          </a:prstGeom>
+          <a:solidFill>
+            <a:srgbClr val="1BA39C"/>
+          </a:solidFill>
+          <a:ln/>
+        </p:spPr>
       </p:sp>
       <p:pic>
         <p:nvPicPr>
-          <p:cNvPr id="10" name="Image 1" descr="preencoded.png">    </p:cNvPr>
+          <p:cNvPr id="12" name="Image 1" descr="preencoded.png">    </p:cNvPr>
           <p:cNvPicPr>
             <a:picLocks noChangeAspect="1"/>
           </p:cNvPicPr>
@@ -7322,8 +7645,8 @@
         </p:blipFill>
         <p:spPr>
           <a:xfrm>
-            <a:off x="3054096" y="3063240"/>
-            <a:ext cx="292608" cy="292608"/>
+            <a:off x="4837176" y="2670048"/>
+            <a:ext cx="466344" cy="466344"/>
           </a:xfrm>
           <a:prstGeom prst="rect">
             <a:avLst/>
@@ -7332,54 +7655,181 @@
       </p:pic>
       <p:sp>
         <p:nvSpPr>
-          <p:cNvPr id="11" name="Shape 7"/>
-          <p:cNvSpPr/>
-          <p:nvPr/>
-        </p:nvSpPr>
-        <p:spPr>
-          <a:xfrm>
-            <a:off x="3337560" y="2286000"/>
-            <a:ext cx="2468880" cy="1828800"/>
+          <p:cNvPr id="13" name="Text 9"/>
+          <p:cNvSpPr/>
+          <p:nvPr/>
+        </p:nvSpPr>
+        <p:spPr>
+          <a:xfrm>
+            <a:off x="6601968" y="2423160"/>
+            <a:ext cx="1005840" cy="640080"/>
+          </a:xfrm>
+          <a:prstGeom prst="rect">
+            <a:avLst/>
+          </a:prstGeom>
+          <a:noFill/>
+          <a:ln/>
+        </p:spPr>
+        <p:txBody>
+          <a:bodyPr wrap="square" rtlCol="0" anchor="ctr"/>
+          <a:lstStyle/>
+          <a:p>
+            <a:pPr algn="r" indent="0" marL="0">
+              <a:buNone/>
+            </a:pPr>
+            <a:r>
+              <a:rPr lang="en-US" sz="3400" b="1" dirty="0">
+                <a:solidFill>
+                  <a:srgbClr val="CFE0E6"/>
+                </a:solidFill>
+                <a:latin typeface="Microsoft YaHei" pitchFamily="34" charset="0"/>
+                <a:ea typeface="Microsoft YaHei" pitchFamily="34" charset="-122"/>
+                <a:cs typeface="Microsoft YaHei" pitchFamily="34" charset="-120"/>
+              </a:rPr>
+              <a:t>02</a:t>
+            </a:r>
+            <a:endParaRPr lang="en-US" sz="3400" dirty="0"/>
+          </a:p>
+        </p:txBody>
+      </p:sp>
+      <p:sp>
+        <p:nvSpPr>
+          <p:cNvPr id="14" name="Text 10"/>
+          <p:cNvSpPr/>
+          <p:nvPr/>
+        </p:nvSpPr>
+        <p:spPr>
+          <a:xfrm>
+            <a:off x="4636008" y="3520440"/>
+            <a:ext cx="2971800" cy="502920"/>
+          </a:xfrm>
+          <a:prstGeom prst="rect">
+            <a:avLst/>
+          </a:prstGeom>
+          <a:noFill/>
+          <a:ln/>
+        </p:spPr>
+        <p:txBody>
+          <a:bodyPr wrap="square" rtlCol="0" anchor="ctr"/>
+          <a:lstStyle/>
+          <a:p>
+            <a:pPr indent="0" marL="0">
+              <a:buNone/>
+            </a:pPr>
+            <a:r>
+              <a:rPr lang="en-US" sz="1800" b="1" dirty="0">
+                <a:solidFill>
+                  <a:srgbClr val="17313F"/>
+                </a:solidFill>
+                <a:latin typeface="Microsoft YaHei" pitchFamily="34" charset="0"/>
+                <a:ea typeface="Microsoft YaHei" pitchFamily="34" charset="-122"/>
+                <a:cs typeface="Microsoft YaHei" pitchFamily="34" charset="-120"/>
+              </a:rPr>
+              <a:t>自我进化</a:t>
+            </a:r>
+            <a:endParaRPr lang="en-US" sz="1800" dirty="0"/>
+          </a:p>
+        </p:txBody>
+      </p:sp>
+      <p:sp>
+        <p:nvSpPr>
+          <p:cNvPr id="15" name="Text 11"/>
+          <p:cNvSpPr/>
+          <p:nvPr/>
+        </p:nvSpPr>
+        <p:spPr>
+          <a:xfrm>
+            <a:off x="4654296" y="4069080"/>
+            <a:ext cx="2971800" cy="1371600"/>
+          </a:xfrm>
+          <a:prstGeom prst="rect">
+            <a:avLst/>
+          </a:prstGeom>
+          <a:noFill/>
+          <a:ln/>
+        </p:spPr>
+        <p:txBody>
+          <a:bodyPr wrap="square" rtlCol="0" anchor="ctr"/>
+          <a:lstStyle/>
+          <a:p>
+            <a:pPr indent="0" marL="0">
+              <a:lnSpc>
+                <a:spcPct val="125000"/>
+              </a:lnSpc>
+              <a:buNone/>
+            </a:pPr>
+            <a:r>
+              <a:rPr lang="en-US" sz="1250" dirty="0">
+                <a:solidFill>
+                  <a:srgbClr val="71838F"/>
+                </a:solidFill>
+                <a:latin typeface="Microsoft YaHei" pitchFamily="34" charset="0"/>
+                <a:ea typeface="Microsoft YaHei" pitchFamily="34" charset="-122"/>
+                <a:cs typeface="Microsoft YaHei" pitchFamily="34" charset="-120"/>
+              </a:rPr>
+              <a:t>Agent 从已确认案例中发现规则集里还没有的新信号 —— 但只能进「候选」，须校准 + 审批才生效。</a:t>
+            </a:r>
+            <a:endParaRPr lang="en-US" sz="1250" dirty="0"/>
+          </a:p>
+        </p:txBody>
+      </p:sp>
+      <p:sp>
+        <p:nvSpPr>
+          <p:cNvPr id="16" name="Shape 12"/>
+          <p:cNvSpPr/>
+          <p:nvPr/>
+        </p:nvSpPr>
+        <p:spPr>
+          <a:xfrm>
+            <a:off x="8083296" y="2148840"/>
+            <a:ext cx="3474720" cy="3383280"/>
           </a:xfrm>
           <a:prstGeom prst="roundRect">
             <a:avLst>
-              <a:gd name="adj" fmla="val 6000"/>
+              <a:gd name="adj" fmla="val 3784"/>
             </a:avLst>
           </a:prstGeom>
           <a:solidFill>
             <a:srgbClr val="F4FAFB"/>
           </a:solidFill>
-          <a:ln w="19050">
+          <a:ln w="12700">
             <a:solidFill>
-              <a:srgbClr val="C9861A"/>
+              <a:srgbClr val="DCE8EE"/>
             </a:solidFill>
             <a:prstDash val="solid"/>
           </a:ln>
-        </p:spPr>
-      </p:sp>
-      <p:sp>
-        <p:nvSpPr>
-          <p:cNvPr id="12" name="Shape 8"/>
-          <p:cNvSpPr/>
-          <p:nvPr/>
-        </p:nvSpPr>
-        <p:spPr>
-          <a:xfrm>
-            <a:off x="4251960" y="2487168"/>
-            <a:ext cx="640080" cy="640080"/>
+          <a:effectLst>
+            <a:outerShdw sx="100000" sy="100000" kx="0" ky="0" algn="bl" rotWithShape="0" blurRad="114300" dist="38100" dir="8100000">
+              <a:srgbClr val="0B1F2A">
+                <a:alpha val="16000"/>
+              </a:srgbClr>
+            </a:outerShdw>
+          </a:effectLst>
+        </p:spPr>
+      </p:sp>
+      <p:sp>
+        <p:nvSpPr>
+          <p:cNvPr id="17" name="Shape 13"/>
+          <p:cNvSpPr/>
+          <p:nvPr/>
+        </p:nvSpPr>
+        <p:spPr>
+          <a:xfrm>
+            <a:off x="8403336" y="2468880"/>
+            <a:ext cx="868680" cy="868680"/>
           </a:xfrm>
           <a:prstGeom prst="ellipse">
             <a:avLst/>
           </a:prstGeom>
           <a:solidFill>
-            <a:srgbClr val="C9861A"/>
+            <a:srgbClr val="1BA39C"/>
           </a:solidFill>
           <a:ln/>
         </p:spPr>
       </p:sp>
       <p:pic>
         <p:nvPicPr>
-          <p:cNvPr id="13" name="Image 2" descr="preencoded.png">    </p:cNvPr>
+          <p:cNvPr id="18" name="Image 2" descr="preencoded.png">    </p:cNvPr>
           <p:cNvPicPr>
             <a:picLocks noChangeAspect="1"/>
           </p:cNvPicPr>
@@ -7393,8 +7843,8 @@
         </p:blipFill>
         <p:spPr>
           <a:xfrm>
-            <a:off x="4379976" y="2615184"/>
-            <a:ext cx="384048" cy="384048"/>
+            <a:off x="8604504" y="2670048"/>
+            <a:ext cx="466344" cy="466344"/>
           </a:xfrm>
           <a:prstGeom prst="rect">
             <a:avLst/>
@@ -7403,33 +7853,69 @@
       </p:pic>
       <p:sp>
         <p:nvSpPr>
-          <p:cNvPr id="14" name="Text 9"/>
-          <p:cNvSpPr/>
-          <p:nvPr/>
-        </p:nvSpPr>
-        <p:spPr>
-          <a:xfrm>
-            <a:off x="3429000" y="3200400"/>
-            <a:ext cx="2286000" cy="411480"/>
-          </a:xfrm>
-          <a:prstGeom prst="rect">
-            <a:avLst/>
-          </a:prstGeom>
-          <a:noFill/>
-          <a:ln/>
-        </p:spPr>
-        <p:txBody>
-          <a:bodyPr wrap="square" rtlCol="0" anchor="ctr"/>
-          <a:lstStyle/>
-          <a:p>
-            <a:pPr algn="ctr" indent="0" marL="0">
-              <a:lnSpc>
-                <a:spcPct val="100000"/>
-              </a:lnSpc>
-              <a:buNone/>
-            </a:pPr>
-            <a:r>
-              <a:rPr lang="en-US" sz="1450" b="1" dirty="0">
+          <p:cNvPr id="19" name="Text 14"/>
+          <p:cNvSpPr/>
+          <p:nvPr/>
+        </p:nvSpPr>
+        <p:spPr>
+          <a:xfrm>
+            <a:off x="10369296" y="2423160"/>
+            <a:ext cx="1005840" cy="640080"/>
+          </a:xfrm>
+          <a:prstGeom prst="rect">
+            <a:avLst/>
+          </a:prstGeom>
+          <a:noFill/>
+          <a:ln/>
+        </p:spPr>
+        <p:txBody>
+          <a:bodyPr wrap="square" rtlCol="0" anchor="ctr"/>
+          <a:lstStyle/>
+          <a:p>
+            <a:pPr algn="r" indent="0" marL="0">
+              <a:buNone/>
+            </a:pPr>
+            <a:r>
+              <a:rPr lang="en-US" sz="3400" b="1" dirty="0">
+                <a:solidFill>
+                  <a:srgbClr val="CFE0E6"/>
+                </a:solidFill>
+                <a:latin typeface="Microsoft YaHei" pitchFamily="34" charset="0"/>
+                <a:ea typeface="Microsoft YaHei" pitchFamily="34" charset="-122"/>
+                <a:cs typeface="Microsoft YaHei" pitchFamily="34" charset="-120"/>
+              </a:rPr>
+              <a:t>03</a:t>
+            </a:r>
+            <a:endParaRPr lang="en-US" sz="3400" dirty="0"/>
+          </a:p>
+        </p:txBody>
+      </p:sp>
+      <p:sp>
+        <p:nvSpPr>
+          <p:cNvPr id="20" name="Text 15"/>
+          <p:cNvSpPr/>
+          <p:nvPr/>
+        </p:nvSpPr>
+        <p:spPr>
+          <a:xfrm>
+            <a:off x="8403336" y="3520440"/>
+            <a:ext cx="2971800" cy="502920"/>
+          </a:xfrm>
+          <a:prstGeom prst="rect">
+            <a:avLst/>
+          </a:prstGeom>
+          <a:noFill/>
+          <a:ln/>
+        </p:spPr>
+        <p:txBody>
+          <a:bodyPr wrap="square" rtlCol="0" anchor="ctr"/>
+          <a:lstStyle/>
+          <a:p>
+            <a:pPr indent="0" marL="0">
+              <a:buNone/>
+            </a:pPr>
+            <a:r>
+              <a:rPr lang="en-US" sz="1800" b="1" dirty="0">
                 <a:solidFill>
                   <a:srgbClr val="17313F"/>
                 </a:solidFill>
@@ -7437,473 +7923,22 @@
                 <a:ea typeface="Microsoft YaHei" pitchFamily="34" charset="-122"/>
                 <a:cs typeface="Microsoft YaHei" pitchFamily="34" charset="-120"/>
               </a:rPr>
-              <a:t>进入候选</a:t>
-            </a:r>
-            <a:endParaRPr lang="en-US" sz="1450" dirty="0"/>
-          </a:p>
-        </p:txBody>
-      </p:sp>
-      <p:sp>
-        <p:nvSpPr>
-          <p:cNvPr id="15" name="Text 10"/>
-          <p:cNvSpPr/>
-          <p:nvPr/>
-        </p:nvSpPr>
-        <p:spPr>
-          <a:xfrm>
-            <a:off x="3447288" y="3639312"/>
-            <a:ext cx="2249424" cy="411480"/>
-          </a:xfrm>
-          <a:prstGeom prst="rect">
-            <a:avLst/>
-          </a:prstGeom>
-          <a:noFill/>
-          <a:ln/>
-        </p:spPr>
-        <p:txBody>
-          <a:bodyPr wrap="square" rtlCol="0" anchor="ctr"/>
-          <a:lstStyle/>
-          <a:p>
-            <a:pPr algn="ctr" indent="0" marL="0">
-              <a:lnSpc>
-                <a:spcPct val="100000"/>
-              </a:lnSpc>
-              <a:buNone/>
-            </a:pPr>
-            <a:r>
-              <a:rPr lang="en-US" sz="1150" dirty="0">
-                <a:solidFill>
-                  <a:srgbClr val="71838F"/>
-                </a:solidFill>
-                <a:latin typeface="Microsoft YaHei" pitchFamily="34" charset="0"/>
-                <a:ea typeface="Microsoft YaHei" pitchFamily="34" charset="-122"/>
-                <a:cs typeface="Microsoft YaHei" pitchFamily="34" charset="-120"/>
-              </a:rPr>
-              <a:t>标记待验证、先观察</a:t>
-            </a:r>
-            <a:endParaRPr lang="en-US" sz="1150" dirty="0"/>
-          </a:p>
-        </p:txBody>
-      </p:sp>
-      <p:pic>
-        <p:nvPicPr>
-          <p:cNvPr id="16" name="Image 3" descr="preencoded.png">    </p:cNvPr>
-          <p:cNvPicPr>
-            <a:picLocks noChangeAspect="1"/>
-          </p:cNvPicPr>
-          <p:nvPr/>
-        </p:nvPicPr>
-        <p:blipFill>
-          <a:blip r:embed="rId4"/>
-          <a:stretch>
-            <a:fillRect/>
-          </a:stretch>
-        </p:blipFill>
-        <p:spPr>
-          <a:xfrm>
-            <a:off x="5843016" y="3063240"/>
-            <a:ext cx="292608" cy="292608"/>
-          </a:xfrm>
-          <a:prstGeom prst="rect">
-            <a:avLst/>
-          </a:prstGeom>
-        </p:spPr>
-      </p:pic>
-      <p:sp>
-        <p:nvSpPr>
-          <p:cNvPr id="17" name="Shape 11"/>
-          <p:cNvSpPr/>
-          <p:nvPr/>
-        </p:nvSpPr>
-        <p:spPr>
-          <a:xfrm>
-            <a:off x="6126480" y="2286000"/>
-            <a:ext cx="2468880" cy="1828800"/>
-          </a:xfrm>
-          <a:prstGeom prst="roundRect">
-            <a:avLst>
-              <a:gd name="adj" fmla="val 6000"/>
-            </a:avLst>
-          </a:prstGeom>
-          <a:solidFill>
-            <a:srgbClr val="F4FAFB"/>
-          </a:solidFill>
-          <a:ln w="19050">
-            <a:solidFill>
-              <a:srgbClr val="5D8AA8"/>
-            </a:solidFill>
-            <a:prstDash val="solid"/>
-          </a:ln>
-        </p:spPr>
-      </p:sp>
-      <p:sp>
-        <p:nvSpPr>
-          <p:cNvPr id="18" name="Shape 12"/>
-          <p:cNvSpPr/>
-          <p:nvPr/>
-        </p:nvSpPr>
-        <p:spPr>
-          <a:xfrm>
-            <a:off x="7040880" y="2487168"/>
-            <a:ext cx="640080" cy="640080"/>
-          </a:xfrm>
-          <a:prstGeom prst="ellipse">
-            <a:avLst/>
-          </a:prstGeom>
-          <a:solidFill>
-            <a:srgbClr val="5D8AA8"/>
-          </a:solidFill>
-          <a:ln/>
-        </p:spPr>
-      </p:sp>
-      <p:pic>
-        <p:nvPicPr>
-          <p:cNvPr id="19" name="Image 4" descr="preencoded.png">    </p:cNvPr>
-          <p:cNvPicPr>
-            <a:picLocks noChangeAspect="1"/>
-          </p:cNvPicPr>
-          <p:nvPr/>
-        </p:nvPicPr>
-        <p:blipFill>
-          <a:blip r:embed="rId5"/>
-          <a:stretch>
-            <a:fillRect/>
-          </a:stretch>
-        </p:blipFill>
-        <p:spPr>
-          <a:xfrm>
-            <a:off x="7168896" y="2615184"/>
-            <a:ext cx="384048" cy="384048"/>
-          </a:xfrm>
-          <a:prstGeom prst="rect">
-            <a:avLst/>
-          </a:prstGeom>
-        </p:spPr>
-      </p:pic>
-      <p:sp>
-        <p:nvSpPr>
-          <p:cNvPr id="20" name="Text 13"/>
-          <p:cNvSpPr/>
-          <p:nvPr/>
-        </p:nvSpPr>
-        <p:spPr>
-          <a:xfrm>
-            <a:off x="6217920" y="3200400"/>
-            <a:ext cx="2286000" cy="411480"/>
-          </a:xfrm>
-          <a:prstGeom prst="rect">
-            <a:avLst/>
-          </a:prstGeom>
-          <a:noFill/>
-          <a:ln/>
-        </p:spPr>
-        <p:txBody>
-          <a:bodyPr wrap="square" rtlCol="0" anchor="ctr"/>
-          <a:lstStyle/>
-          <a:p>
-            <a:pPr algn="ctr" indent="0" marL="0">
-              <a:lnSpc>
-                <a:spcPct val="100000"/>
-              </a:lnSpc>
-              <a:buNone/>
-            </a:pPr>
-            <a:r>
-              <a:rPr lang="en-US" sz="1450" b="1" dirty="0">
-                <a:solidFill>
-                  <a:srgbClr val="17313F"/>
-                </a:solidFill>
-                <a:latin typeface="Microsoft YaHei" pitchFamily="34" charset="0"/>
-                <a:ea typeface="Microsoft YaHei" pitchFamily="34" charset="-122"/>
-                <a:cs typeface="Microsoft YaHei" pitchFamily="34" charset="-120"/>
-              </a:rPr>
-              <a:t>统计校准</a:t>
-            </a:r>
-            <a:endParaRPr lang="en-US" sz="1450" dirty="0"/>
-          </a:p>
-        </p:txBody>
-      </p:sp>
-      <p:sp>
-        <p:nvSpPr>
-          <p:cNvPr id="21" name="Text 14"/>
-          <p:cNvSpPr/>
-          <p:nvPr/>
-        </p:nvSpPr>
-        <p:spPr>
-          <a:xfrm>
-            <a:off x="6236208" y="3639312"/>
-            <a:ext cx="2249424" cy="411480"/>
-          </a:xfrm>
-          <a:prstGeom prst="rect">
-            <a:avLst/>
-          </a:prstGeom>
-          <a:noFill/>
-          <a:ln/>
-        </p:spPr>
-        <p:txBody>
-          <a:bodyPr wrap="square" rtlCol="0" anchor="ctr"/>
-          <a:lstStyle/>
-          <a:p>
-            <a:pPr algn="ctr" indent="0" marL="0">
-              <a:lnSpc>
-                <a:spcPct val="100000"/>
-              </a:lnSpc>
-              <a:buNone/>
-            </a:pPr>
-            <a:r>
-              <a:rPr lang="en-US" sz="1150" dirty="0">
-                <a:solidFill>
-                  <a:srgbClr val="71838F"/>
-                </a:solidFill>
-                <a:latin typeface="Microsoft YaHei" pitchFamily="34" charset="0"/>
-                <a:ea typeface="Microsoft YaHei" pitchFamily="34" charset="-122"/>
-                <a:cs typeface="Microsoft YaHei" pitchFamily="34" charset="-120"/>
-              </a:rPr>
-              <a:t>用真实命中率验证</a:t>
-            </a:r>
-            <a:endParaRPr lang="en-US" sz="1150" dirty="0"/>
-          </a:p>
-        </p:txBody>
-      </p:sp>
-      <p:pic>
-        <p:nvPicPr>
-          <p:cNvPr id="22" name="Image 5" descr="preencoded.png">    </p:cNvPr>
-          <p:cNvPicPr>
-            <a:picLocks noChangeAspect="1"/>
-          </p:cNvPicPr>
-          <p:nvPr/>
-        </p:nvPicPr>
-        <p:blipFill>
-          <a:blip r:embed="rId6"/>
-          <a:stretch>
-            <a:fillRect/>
-          </a:stretch>
-        </p:blipFill>
-        <p:spPr>
-          <a:xfrm>
-            <a:off x="8631936" y="3063240"/>
-            <a:ext cx="292608" cy="292608"/>
-          </a:xfrm>
-          <a:prstGeom prst="rect">
-            <a:avLst/>
-          </a:prstGeom>
-        </p:spPr>
-      </p:pic>
-      <p:sp>
-        <p:nvSpPr>
-          <p:cNvPr id="23" name="Shape 15"/>
-          <p:cNvSpPr/>
-          <p:nvPr/>
-        </p:nvSpPr>
-        <p:spPr>
-          <a:xfrm>
-            <a:off x="8915400" y="2286000"/>
-            <a:ext cx="2468880" cy="1828800"/>
-          </a:xfrm>
-          <a:prstGeom prst="roundRect">
-            <a:avLst>
-              <a:gd name="adj" fmla="val 6000"/>
-            </a:avLst>
-          </a:prstGeom>
-          <a:solidFill>
-            <a:srgbClr val="F4FAFB"/>
-          </a:solidFill>
-          <a:ln w="19050">
-            <a:solidFill>
-              <a:srgbClr val="22875A"/>
-            </a:solidFill>
-            <a:prstDash val="solid"/>
-          </a:ln>
-        </p:spPr>
-      </p:sp>
-      <p:sp>
-        <p:nvSpPr>
-          <p:cNvPr id="24" name="Shape 16"/>
-          <p:cNvSpPr/>
-          <p:nvPr/>
-        </p:nvSpPr>
-        <p:spPr>
-          <a:xfrm>
-            <a:off x="9829800" y="2487168"/>
-            <a:ext cx="640080" cy="640080"/>
-          </a:xfrm>
-          <a:prstGeom prst="ellipse">
-            <a:avLst/>
-          </a:prstGeom>
-          <a:solidFill>
-            <a:srgbClr val="22875A"/>
-          </a:solidFill>
-          <a:ln/>
-        </p:spPr>
-      </p:sp>
-      <p:pic>
-        <p:nvPicPr>
-          <p:cNvPr id="25" name="Image 6" descr="preencoded.png">    </p:cNvPr>
-          <p:cNvPicPr>
-            <a:picLocks noChangeAspect="1"/>
-          </p:cNvPicPr>
-          <p:nvPr/>
-        </p:nvPicPr>
-        <p:blipFill>
-          <a:blip r:embed="rId7"/>
-          <a:stretch>
-            <a:fillRect/>
-          </a:stretch>
-        </p:blipFill>
-        <p:spPr>
-          <a:xfrm>
-            <a:off x="9957816" y="2615184"/>
-            <a:ext cx="384048" cy="384048"/>
-          </a:xfrm>
-          <a:prstGeom prst="rect">
-            <a:avLst/>
-          </a:prstGeom>
-        </p:spPr>
-      </p:pic>
-      <p:sp>
-        <p:nvSpPr>
-          <p:cNvPr id="26" name="Text 17"/>
-          <p:cNvSpPr/>
-          <p:nvPr/>
-        </p:nvSpPr>
-        <p:spPr>
-          <a:xfrm>
-            <a:off x="9006840" y="3200400"/>
-            <a:ext cx="2286000" cy="411480"/>
-          </a:xfrm>
-          <a:prstGeom prst="rect">
-            <a:avLst/>
-          </a:prstGeom>
-          <a:noFill/>
-          <a:ln/>
-        </p:spPr>
-        <p:txBody>
-          <a:bodyPr wrap="square" rtlCol="0" anchor="ctr"/>
-          <a:lstStyle/>
-          <a:p>
-            <a:pPr algn="ctr" indent="0" marL="0">
-              <a:lnSpc>
-                <a:spcPct val="100000"/>
-              </a:lnSpc>
-              <a:buNone/>
-            </a:pPr>
-            <a:r>
-              <a:rPr lang="en-US" sz="1450" b="1" dirty="0">
-                <a:solidFill>
-                  <a:srgbClr val="17313F"/>
-                </a:solidFill>
-                <a:latin typeface="Microsoft YaHei" pitchFamily="34" charset="0"/>
-                <a:ea typeface="Microsoft YaHei" pitchFamily="34" charset="-122"/>
-                <a:cs typeface="Microsoft YaHei" pitchFamily="34" charset="-120"/>
-              </a:rPr>
-              <a:t>人工审批</a:t>
-            </a:r>
-            <a:endParaRPr lang="en-US" sz="1450" dirty="0"/>
-          </a:p>
-        </p:txBody>
-      </p:sp>
-      <p:sp>
-        <p:nvSpPr>
-          <p:cNvPr id="27" name="Text 18"/>
-          <p:cNvSpPr/>
-          <p:nvPr/>
-        </p:nvSpPr>
-        <p:spPr>
-          <a:xfrm>
-            <a:off x="9025128" y="3639312"/>
-            <a:ext cx="2249424" cy="411480"/>
-          </a:xfrm>
-          <a:prstGeom prst="rect">
-            <a:avLst/>
-          </a:prstGeom>
-          <a:noFill/>
-          <a:ln/>
-        </p:spPr>
-        <p:txBody>
-          <a:bodyPr wrap="square" rtlCol="0" anchor="ctr"/>
-          <a:lstStyle/>
-          <a:p>
-            <a:pPr algn="ctr" indent="0" marL="0">
-              <a:lnSpc>
-                <a:spcPct val="100000"/>
-              </a:lnSpc>
-              <a:buNone/>
-            </a:pPr>
-            <a:r>
-              <a:rPr lang="en-US" sz="1150" dirty="0">
-                <a:solidFill>
-                  <a:srgbClr val="71838F"/>
-                </a:solidFill>
-                <a:latin typeface="Microsoft YaHei" pitchFamily="34" charset="0"/>
-                <a:ea typeface="Microsoft YaHei" pitchFamily="34" charset="-122"/>
-                <a:cs typeface="Microsoft YaHei" pitchFamily="34" charset="-120"/>
-              </a:rPr>
-              <a:t>委员会签字才生效</a:t>
-            </a:r>
-            <a:endParaRPr lang="en-US" sz="1150" dirty="0"/>
-          </a:p>
-        </p:txBody>
-      </p:sp>
-      <p:sp>
-        <p:nvSpPr>
-          <p:cNvPr id="28" name="Shape 19"/>
-          <p:cNvSpPr/>
-          <p:nvPr/>
-        </p:nvSpPr>
-        <p:spPr>
-          <a:xfrm>
-            <a:off x="548640" y="4526280"/>
-            <a:ext cx="11091672" cy="1188720"/>
-          </a:xfrm>
-          <a:prstGeom prst="roundRect">
-            <a:avLst>
-              <a:gd name="adj" fmla="val 9231"/>
-            </a:avLst>
-          </a:prstGeom>
-          <a:solidFill>
-            <a:srgbClr val="FFF6E8"/>
-          </a:solidFill>
-          <a:ln w="15240">
-            <a:solidFill>
-              <a:srgbClr val="F0D8A8"/>
-            </a:solidFill>
-            <a:prstDash val="solid"/>
-          </a:ln>
-        </p:spPr>
-      </p:sp>
-      <p:pic>
-        <p:nvPicPr>
-          <p:cNvPr id="29" name="Image 7" descr="preencoded.png">    </p:cNvPr>
-          <p:cNvPicPr>
-            <a:picLocks noChangeAspect="1"/>
-          </p:cNvPicPr>
-          <p:nvPr/>
-        </p:nvPicPr>
-        <p:blipFill>
-          <a:blip r:embed="rId8"/>
-          <a:stretch>
-            <a:fillRect/>
-          </a:stretch>
-        </p:blipFill>
-        <p:spPr>
-          <a:xfrm>
-            <a:off x="868680" y="4864608"/>
-            <a:ext cx="457200" cy="457200"/>
-          </a:xfrm>
-          <a:prstGeom prst="rect">
-            <a:avLst/>
-          </a:prstGeom>
-        </p:spPr>
-      </p:pic>
-      <p:sp>
-        <p:nvSpPr>
-          <p:cNvPr id="30" name="Text 20"/>
-          <p:cNvSpPr/>
-          <p:nvPr/>
-        </p:nvSpPr>
-        <p:spPr>
-          <a:xfrm>
-            <a:off x="1508760" y="4617720"/>
-            <a:ext cx="9921240" cy="1005840"/>
+              <a:t>信号台账 + 校准</a:t>
+            </a:r>
+            <a:endParaRPr lang="en-US" sz="1800" dirty="0"/>
+          </a:p>
+        </p:txBody>
+      </p:sp>
+      <p:sp>
+        <p:nvSpPr>
+          <p:cNvPr id="21" name="Text 16"/>
+          <p:cNvSpPr/>
+          <p:nvPr/>
+        </p:nvSpPr>
+        <p:spPr>
+          <a:xfrm>
+            <a:off x="8421624" y="4069080"/>
+            <a:ext cx="2971800" cy="1371600"/>
           </a:xfrm>
           <a:prstGeom prst="rect">
             <a:avLst/>
@@ -7917,45 +7952,28 @@
           <a:p>
             <a:pPr indent="0" marL="0">
               <a:lnSpc>
-                <a:spcPct val="120000"/>
+                <a:spcPct val="125000"/>
               </a:lnSpc>
               <a:buNone/>
             </a:pPr>
             <a:r>
-              <a:rPr lang="en-US" sz="1350" b="1" dirty="0">
-                <a:solidFill>
-                  <a:srgbClr val="C9861A"/>
-                </a:solidFill>
-                <a:latin typeface="Microsoft YaHei" pitchFamily="34" charset="0"/>
-                <a:ea typeface="Microsoft YaHei" pitchFamily="34" charset="-122"/>
-                <a:cs typeface="Microsoft YaHei" pitchFamily="34" charset="-120"/>
-              </a:rPr>
-              <a:t>合规底线：</a:t>
-            </a:r>
-            <a:pPr indent="0" marL="0">
-              <a:lnSpc>
-                <a:spcPct val="120000"/>
-              </a:lnSpc>
-              <a:buNone/>
-            </a:pPr>
-            <a:r>
-              <a:rPr lang="en-US" sz="1350" dirty="0">
-                <a:solidFill>
-                  <a:srgbClr val="17313F"/>
-                </a:solidFill>
-                <a:latin typeface="Microsoft YaHei" pitchFamily="34" charset="0"/>
-                <a:ea typeface="Microsoft YaHei" pitchFamily="34" charset="-122"/>
-                <a:cs typeface="Microsoft YaHei" pitchFamily="34" charset="-120"/>
-              </a:rPr>
-              <a:t>自我进化只能「发现假设」，绝不能黑盒改告警等级。任何影响分级的变更，都必须经过可审计的统计校准 + 人工审批。</a:t>
-            </a:r>
-            <a:endParaRPr lang="en-US" sz="1350" dirty="0"/>
-          </a:p>
-        </p:txBody>
-      </p:sp>
-      <p:sp>
-        <p:nvSpPr>
-          <p:cNvPr id="31" name="Text 21"/>
+              <a:rPr lang="en-US" sz="1250" dirty="0">
+                <a:solidFill>
+                  <a:srgbClr val="71838F"/>
+                </a:solidFill>
+                <a:latin typeface="Microsoft YaHei" pitchFamily="34" charset="0"/>
+                <a:ea typeface="Microsoft YaHei" pitchFamily="34" charset="-122"/>
+                <a:cs typeface="Microsoft YaHei" pitchFamily="34" charset="-120"/>
+              </a:rPr>
+              <a:t>每个信号靠真实命中率自动升级 / 降级，不靠拍脑袋；所有变更可审计。</a:t>
+            </a:r>
+            <a:endParaRPr lang="en-US" sz="1250" dirty="0"/>
+          </a:p>
+        </p:txBody>
+      </p:sp>
+      <p:sp>
+        <p:nvSpPr>
+          <p:cNvPr id="22" name="Text 17"/>
           <p:cNvSpPr/>
           <p:nvPr/>
         </p:nvSpPr>
@@ -7994,7 +8012,7 @@
       </p:sp>
       <p:sp>
         <p:nvSpPr>
-          <p:cNvPr id="32" name="Text 22"/>
+          <p:cNvPr id="23" name="Text 18"/>
           <p:cNvSpPr/>
           <p:nvPr/>
         </p:nvSpPr>
@@ -8042,6 +8060,1035 @@
 <file path=ppt/slides/slide8.xml><?xml version="1.0" encoding="utf-8"?>
 <p:sld xmlns:a="http://schemas.openxmlformats.org/drawingml/2006/main" xmlns:r="http://schemas.openxmlformats.org/officeDocument/2006/relationships" xmlns:p="http://schemas.openxmlformats.org/presentationml/2006/main">
   <p:cSld name="Slide 8">
+    <p:bg>
+      <p:bgPr>
+        <a:solidFill>
+          <a:srgbClr val="FFFFFF"/>
+        </a:solidFill>
+      </p:bgPr>
+    </p:bg>
+    <p:spTree>
+      <p:nvGrpSpPr>
+        <p:cNvPr id="1" name=""/>
+        <p:cNvGrpSpPr/>
+        <p:nvPr/>
+      </p:nvGrpSpPr>
+      <p:grpSpPr>
+        <a:xfrm>
+          <a:off x="0" y="0"/>
+          <a:ext cx="0" cy="0"/>
+          <a:chOff x="0" y="0"/>
+          <a:chExt cx="0" cy="0"/>
+        </a:xfrm>
+      </p:grpSpPr>
+      <p:sp>
+        <p:nvSpPr>
+          <p:cNvPr id="2" name="Text 0"/>
+          <p:cNvSpPr/>
+          <p:nvPr/>
+        </p:nvSpPr>
+        <p:spPr>
+          <a:xfrm>
+            <a:off x="548640" y="457200"/>
+            <a:ext cx="9144000" cy="274320"/>
+          </a:xfrm>
+          <a:prstGeom prst="rect">
+            <a:avLst/>
+          </a:prstGeom>
+          <a:noFill/>
+          <a:ln/>
+        </p:spPr>
+        <p:txBody>
+          <a:bodyPr wrap="square" rtlCol="0" anchor="ctr"/>
+          <a:lstStyle/>
+          <a:p>
+            <a:pPr indent="0" marL="0">
+              <a:buNone/>
+            </a:pPr>
+            <a:r>
+              <a:rPr lang="en-US" sz="1200" b="1" spc="200" kern="0" dirty="0">
+                <a:solidFill>
+                  <a:srgbClr val="1BA39C"/>
+                </a:solidFill>
+                <a:latin typeface="Microsoft YaHei" pitchFamily="34" charset="0"/>
+                <a:ea typeface="Microsoft YaHei" pitchFamily="34" charset="-122"/>
+                <a:cs typeface="Microsoft YaHei" pitchFamily="34" charset="-120"/>
+              </a:rPr>
+              <a:t>重点创新 · 自我进化（Hermes Agent）</a:t>
+            </a:r>
+            <a:endParaRPr lang="en-US" sz="1200" dirty="0"/>
+          </a:p>
+        </p:txBody>
+      </p:sp>
+      <p:sp>
+        <p:nvSpPr>
+          <p:cNvPr id="3" name="Text 1"/>
+          <p:cNvSpPr/>
+          <p:nvPr/>
+        </p:nvSpPr>
+        <p:spPr>
+          <a:xfrm>
+            <a:off x="548640" y="749808"/>
+            <a:ext cx="11064240" cy="822960"/>
+          </a:xfrm>
+          <a:prstGeom prst="rect">
+            <a:avLst/>
+          </a:prstGeom>
+          <a:noFill/>
+          <a:ln/>
+        </p:spPr>
+        <p:txBody>
+          <a:bodyPr wrap="square" rtlCol="0" anchor="ctr"/>
+          <a:lstStyle/>
+          <a:p>
+            <a:pPr indent="0" marL="0">
+              <a:buNone/>
+            </a:pPr>
+            <a:r>
+              <a:rPr lang="en-US" sz="3000" b="1" dirty="0">
+                <a:solidFill>
+                  <a:srgbClr val="17313F"/>
+                </a:solidFill>
+                <a:latin typeface="Microsoft YaHei" pitchFamily="34" charset="0"/>
+                <a:ea typeface="Microsoft YaHei" pitchFamily="34" charset="-122"/>
+                <a:cs typeface="Microsoft YaHei" pitchFamily="34" charset="-120"/>
+              </a:rPr>
+              <a:t>系统自己「发现」新风险，但分级仍需把关</a:t>
+            </a:r>
+            <a:endParaRPr lang="en-US" sz="3000" dirty="0"/>
+          </a:p>
+        </p:txBody>
+      </p:sp>
+      <p:sp>
+        <p:nvSpPr>
+          <p:cNvPr id="4" name="Text 2"/>
+          <p:cNvSpPr/>
+          <p:nvPr/>
+        </p:nvSpPr>
+        <p:spPr>
+          <a:xfrm>
+            <a:off x="548640" y="1600200"/>
+            <a:ext cx="10972800" cy="457200"/>
+          </a:xfrm>
+          <a:prstGeom prst="rect">
+            <a:avLst/>
+          </a:prstGeom>
+          <a:noFill/>
+          <a:ln/>
+        </p:spPr>
+        <p:txBody>
+          <a:bodyPr wrap="square" rtlCol="0" anchor="ctr"/>
+          <a:lstStyle/>
+          <a:p>
+            <a:pPr indent="0" marL="0">
+              <a:buNone/>
+            </a:pPr>
+            <a:r>
+              <a:rPr lang="en-US" sz="1400" dirty="0">
+                <a:solidFill>
+                  <a:srgbClr val="71838F"/>
+                </a:solidFill>
+                <a:latin typeface="Microsoft YaHei" pitchFamily="34" charset="0"/>
+                <a:ea typeface="Microsoft YaHei" pitchFamily="34" charset="-122"/>
+                <a:cs typeface="Microsoft YaHei" pitchFamily="34" charset="-120"/>
+              </a:rPr>
+              <a:t>过去信号全靠法务凭经验预先定义；现在 Agent 从积累的案例中主动提出新假设。</a:t>
+            </a:r>
+            <a:endParaRPr lang="en-US" sz="1400" dirty="0"/>
+          </a:p>
+        </p:txBody>
+      </p:sp>
+      <p:sp>
+        <p:nvSpPr>
+          <p:cNvPr id="5" name="Shape 3"/>
+          <p:cNvSpPr/>
+          <p:nvPr/>
+        </p:nvSpPr>
+        <p:spPr>
+          <a:xfrm>
+            <a:off x="548640" y="2286000"/>
+            <a:ext cx="2468880" cy="1828800"/>
+          </a:xfrm>
+          <a:prstGeom prst="roundRect">
+            <a:avLst>
+              <a:gd name="adj" fmla="val 6000"/>
+            </a:avLst>
+          </a:prstGeom>
+          <a:solidFill>
+            <a:srgbClr val="F4FAFB"/>
+          </a:solidFill>
+          <a:ln w="19050">
+            <a:solidFill>
+              <a:srgbClr val="1BA39C"/>
+            </a:solidFill>
+            <a:prstDash val="solid"/>
+          </a:ln>
+        </p:spPr>
+      </p:sp>
+      <p:sp>
+        <p:nvSpPr>
+          <p:cNvPr id="6" name="Shape 4"/>
+          <p:cNvSpPr/>
+          <p:nvPr/>
+        </p:nvSpPr>
+        <p:spPr>
+          <a:xfrm>
+            <a:off x="1463040" y="2487168"/>
+            <a:ext cx="640080" cy="640080"/>
+          </a:xfrm>
+          <a:prstGeom prst="ellipse">
+            <a:avLst/>
+          </a:prstGeom>
+          <a:solidFill>
+            <a:srgbClr val="1BA39C"/>
+          </a:solidFill>
+          <a:ln/>
+        </p:spPr>
+      </p:sp>
+      <p:pic>
+        <p:nvPicPr>
+          <p:cNvPr id="7" name="Image 0" descr="preencoded.png">    </p:cNvPr>
+          <p:cNvPicPr>
+            <a:picLocks noChangeAspect="1"/>
+          </p:cNvPicPr>
+          <p:nvPr/>
+        </p:nvPicPr>
+        <p:blipFill>
+          <a:blip r:embed="rId1"/>
+          <a:stretch>
+            <a:fillRect/>
+          </a:stretch>
+        </p:blipFill>
+        <p:spPr>
+          <a:xfrm>
+            <a:off x="1591056" y="2615184"/>
+            <a:ext cx="384048" cy="384048"/>
+          </a:xfrm>
+          <a:prstGeom prst="rect">
+            <a:avLst/>
+          </a:prstGeom>
+        </p:spPr>
+      </p:pic>
+      <p:sp>
+        <p:nvSpPr>
+          <p:cNvPr id="8" name="Text 5"/>
+          <p:cNvSpPr/>
+          <p:nvPr/>
+        </p:nvSpPr>
+        <p:spPr>
+          <a:xfrm>
+            <a:off x="640080" y="3200400"/>
+            <a:ext cx="2286000" cy="411480"/>
+          </a:xfrm>
+          <a:prstGeom prst="rect">
+            <a:avLst/>
+          </a:prstGeom>
+          <a:noFill/>
+          <a:ln/>
+        </p:spPr>
+        <p:txBody>
+          <a:bodyPr wrap="square" rtlCol="0" anchor="ctr"/>
+          <a:lstStyle/>
+          <a:p>
+            <a:pPr algn="ctr" indent="0" marL="0">
+              <a:lnSpc>
+                <a:spcPct val="100000"/>
+              </a:lnSpc>
+              <a:buNone/>
+            </a:pPr>
+            <a:r>
+              <a:rPr lang="en-US" sz="1450" b="1" dirty="0">
+                <a:solidFill>
+                  <a:srgbClr val="17313F"/>
+                </a:solidFill>
+                <a:latin typeface="Microsoft YaHei" pitchFamily="34" charset="0"/>
+                <a:ea typeface="Microsoft YaHei" pitchFamily="34" charset="-122"/>
+                <a:cs typeface="Microsoft YaHei" pitchFamily="34" charset="-120"/>
+              </a:rPr>
+              <a:t>Agent 发现</a:t>
+            </a:r>
+            <a:endParaRPr lang="en-US" sz="1450" dirty="0"/>
+          </a:p>
+        </p:txBody>
+      </p:sp>
+      <p:sp>
+        <p:nvSpPr>
+          <p:cNvPr id="9" name="Text 6"/>
+          <p:cNvSpPr/>
+          <p:nvPr/>
+        </p:nvSpPr>
+        <p:spPr>
+          <a:xfrm>
+            <a:off x="658368" y="3639312"/>
+            <a:ext cx="2249424" cy="411480"/>
+          </a:xfrm>
+          <a:prstGeom prst="rect">
+            <a:avLst/>
+          </a:prstGeom>
+          <a:noFill/>
+          <a:ln/>
+        </p:spPr>
+        <p:txBody>
+          <a:bodyPr wrap="square" rtlCol="0" anchor="ctr"/>
+          <a:lstStyle/>
+          <a:p>
+            <a:pPr algn="ctr" indent="0" marL="0">
+              <a:lnSpc>
+                <a:spcPct val="100000"/>
+              </a:lnSpc>
+              <a:buNone/>
+            </a:pPr>
+            <a:r>
+              <a:rPr lang="en-US" sz="1150" dirty="0">
+                <a:solidFill>
+                  <a:srgbClr val="71838F"/>
+                </a:solidFill>
+                <a:latin typeface="Microsoft YaHei" pitchFamily="34" charset="0"/>
+                <a:ea typeface="Microsoft YaHei" pitchFamily="34" charset="-122"/>
+                <a:cs typeface="Microsoft YaHei" pitchFamily="34" charset="-120"/>
+              </a:rPr>
+              <a:t>学出反复出现的新模式</a:t>
+            </a:r>
+            <a:endParaRPr lang="en-US" sz="1150" dirty="0"/>
+          </a:p>
+        </p:txBody>
+      </p:sp>
+      <p:pic>
+        <p:nvPicPr>
+          <p:cNvPr id="10" name="Image 1" descr="preencoded.png">    </p:cNvPr>
+          <p:cNvPicPr>
+            <a:picLocks noChangeAspect="1"/>
+          </p:cNvPicPr>
+          <p:nvPr/>
+        </p:nvPicPr>
+        <p:blipFill>
+          <a:blip r:embed="rId2"/>
+          <a:stretch>
+            <a:fillRect/>
+          </a:stretch>
+        </p:blipFill>
+        <p:spPr>
+          <a:xfrm>
+            <a:off x="3054096" y="3063240"/>
+            <a:ext cx="292608" cy="292608"/>
+          </a:xfrm>
+          <a:prstGeom prst="rect">
+            <a:avLst/>
+          </a:prstGeom>
+        </p:spPr>
+      </p:pic>
+      <p:sp>
+        <p:nvSpPr>
+          <p:cNvPr id="11" name="Shape 7"/>
+          <p:cNvSpPr/>
+          <p:nvPr/>
+        </p:nvSpPr>
+        <p:spPr>
+          <a:xfrm>
+            <a:off x="3337560" y="2286000"/>
+            <a:ext cx="2468880" cy="1828800"/>
+          </a:xfrm>
+          <a:prstGeom prst="roundRect">
+            <a:avLst>
+              <a:gd name="adj" fmla="val 6000"/>
+            </a:avLst>
+          </a:prstGeom>
+          <a:solidFill>
+            <a:srgbClr val="F4FAFB"/>
+          </a:solidFill>
+          <a:ln w="19050">
+            <a:solidFill>
+              <a:srgbClr val="C9861A"/>
+            </a:solidFill>
+            <a:prstDash val="solid"/>
+          </a:ln>
+        </p:spPr>
+      </p:sp>
+      <p:sp>
+        <p:nvSpPr>
+          <p:cNvPr id="12" name="Shape 8"/>
+          <p:cNvSpPr/>
+          <p:nvPr/>
+        </p:nvSpPr>
+        <p:spPr>
+          <a:xfrm>
+            <a:off x="4251960" y="2487168"/>
+            <a:ext cx="640080" cy="640080"/>
+          </a:xfrm>
+          <a:prstGeom prst="ellipse">
+            <a:avLst/>
+          </a:prstGeom>
+          <a:solidFill>
+            <a:srgbClr val="C9861A"/>
+          </a:solidFill>
+          <a:ln/>
+        </p:spPr>
+      </p:sp>
+      <p:pic>
+        <p:nvPicPr>
+          <p:cNvPr id="13" name="Image 2" descr="preencoded.png">    </p:cNvPr>
+          <p:cNvPicPr>
+            <a:picLocks noChangeAspect="1"/>
+          </p:cNvPicPr>
+          <p:nvPr/>
+        </p:nvPicPr>
+        <p:blipFill>
+          <a:blip r:embed="rId3"/>
+          <a:stretch>
+            <a:fillRect/>
+          </a:stretch>
+        </p:blipFill>
+        <p:spPr>
+          <a:xfrm>
+            <a:off x="4379976" y="2615184"/>
+            <a:ext cx="384048" cy="384048"/>
+          </a:xfrm>
+          <a:prstGeom prst="rect">
+            <a:avLst/>
+          </a:prstGeom>
+        </p:spPr>
+      </p:pic>
+      <p:sp>
+        <p:nvSpPr>
+          <p:cNvPr id="14" name="Text 9"/>
+          <p:cNvSpPr/>
+          <p:nvPr/>
+        </p:nvSpPr>
+        <p:spPr>
+          <a:xfrm>
+            <a:off x="3429000" y="3200400"/>
+            <a:ext cx="2286000" cy="411480"/>
+          </a:xfrm>
+          <a:prstGeom prst="rect">
+            <a:avLst/>
+          </a:prstGeom>
+          <a:noFill/>
+          <a:ln/>
+        </p:spPr>
+        <p:txBody>
+          <a:bodyPr wrap="square" rtlCol="0" anchor="ctr"/>
+          <a:lstStyle/>
+          <a:p>
+            <a:pPr algn="ctr" indent="0" marL="0">
+              <a:lnSpc>
+                <a:spcPct val="100000"/>
+              </a:lnSpc>
+              <a:buNone/>
+            </a:pPr>
+            <a:r>
+              <a:rPr lang="en-US" sz="1450" b="1" dirty="0">
+                <a:solidFill>
+                  <a:srgbClr val="17313F"/>
+                </a:solidFill>
+                <a:latin typeface="Microsoft YaHei" pitchFamily="34" charset="0"/>
+                <a:ea typeface="Microsoft YaHei" pitchFamily="34" charset="-122"/>
+                <a:cs typeface="Microsoft YaHei" pitchFamily="34" charset="-120"/>
+              </a:rPr>
+              <a:t>进入候选</a:t>
+            </a:r>
+            <a:endParaRPr lang="en-US" sz="1450" dirty="0"/>
+          </a:p>
+        </p:txBody>
+      </p:sp>
+      <p:sp>
+        <p:nvSpPr>
+          <p:cNvPr id="15" name="Text 10"/>
+          <p:cNvSpPr/>
+          <p:nvPr/>
+        </p:nvSpPr>
+        <p:spPr>
+          <a:xfrm>
+            <a:off x="3447288" y="3639312"/>
+            <a:ext cx="2249424" cy="411480"/>
+          </a:xfrm>
+          <a:prstGeom prst="rect">
+            <a:avLst/>
+          </a:prstGeom>
+          <a:noFill/>
+          <a:ln/>
+        </p:spPr>
+        <p:txBody>
+          <a:bodyPr wrap="square" rtlCol="0" anchor="ctr"/>
+          <a:lstStyle/>
+          <a:p>
+            <a:pPr algn="ctr" indent="0" marL="0">
+              <a:lnSpc>
+                <a:spcPct val="100000"/>
+              </a:lnSpc>
+              <a:buNone/>
+            </a:pPr>
+            <a:r>
+              <a:rPr lang="en-US" sz="1150" dirty="0">
+                <a:solidFill>
+                  <a:srgbClr val="71838F"/>
+                </a:solidFill>
+                <a:latin typeface="Microsoft YaHei" pitchFamily="34" charset="0"/>
+                <a:ea typeface="Microsoft YaHei" pitchFamily="34" charset="-122"/>
+                <a:cs typeface="Microsoft YaHei" pitchFamily="34" charset="-120"/>
+              </a:rPr>
+              <a:t>标记待验证、先观察</a:t>
+            </a:r>
+            <a:endParaRPr lang="en-US" sz="1150" dirty="0"/>
+          </a:p>
+        </p:txBody>
+      </p:sp>
+      <p:pic>
+        <p:nvPicPr>
+          <p:cNvPr id="16" name="Image 3" descr="preencoded.png">    </p:cNvPr>
+          <p:cNvPicPr>
+            <a:picLocks noChangeAspect="1"/>
+          </p:cNvPicPr>
+          <p:nvPr/>
+        </p:nvPicPr>
+        <p:blipFill>
+          <a:blip r:embed="rId4"/>
+          <a:stretch>
+            <a:fillRect/>
+          </a:stretch>
+        </p:blipFill>
+        <p:spPr>
+          <a:xfrm>
+            <a:off x="5843016" y="3063240"/>
+            <a:ext cx="292608" cy="292608"/>
+          </a:xfrm>
+          <a:prstGeom prst="rect">
+            <a:avLst/>
+          </a:prstGeom>
+        </p:spPr>
+      </p:pic>
+      <p:sp>
+        <p:nvSpPr>
+          <p:cNvPr id="17" name="Shape 11"/>
+          <p:cNvSpPr/>
+          <p:nvPr/>
+        </p:nvSpPr>
+        <p:spPr>
+          <a:xfrm>
+            <a:off x="6126480" y="2286000"/>
+            <a:ext cx="2468880" cy="1828800"/>
+          </a:xfrm>
+          <a:prstGeom prst="roundRect">
+            <a:avLst>
+              <a:gd name="adj" fmla="val 6000"/>
+            </a:avLst>
+          </a:prstGeom>
+          <a:solidFill>
+            <a:srgbClr val="F4FAFB"/>
+          </a:solidFill>
+          <a:ln w="19050">
+            <a:solidFill>
+              <a:srgbClr val="5D8AA8"/>
+            </a:solidFill>
+            <a:prstDash val="solid"/>
+          </a:ln>
+        </p:spPr>
+      </p:sp>
+      <p:sp>
+        <p:nvSpPr>
+          <p:cNvPr id="18" name="Shape 12"/>
+          <p:cNvSpPr/>
+          <p:nvPr/>
+        </p:nvSpPr>
+        <p:spPr>
+          <a:xfrm>
+            <a:off x="7040880" y="2487168"/>
+            <a:ext cx="640080" cy="640080"/>
+          </a:xfrm>
+          <a:prstGeom prst="ellipse">
+            <a:avLst/>
+          </a:prstGeom>
+          <a:solidFill>
+            <a:srgbClr val="5D8AA8"/>
+          </a:solidFill>
+          <a:ln/>
+        </p:spPr>
+      </p:sp>
+      <p:pic>
+        <p:nvPicPr>
+          <p:cNvPr id="19" name="Image 4" descr="preencoded.png">    </p:cNvPr>
+          <p:cNvPicPr>
+            <a:picLocks noChangeAspect="1"/>
+          </p:cNvPicPr>
+          <p:nvPr/>
+        </p:nvPicPr>
+        <p:blipFill>
+          <a:blip r:embed="rId5"/>
+          <a:stretch>
+            <a:fillRect/>
+          </a:stretch>
+        </p:blipFill>
+        <p:spPr>
+          <a:xfrm>
+            <a:off x="7168896" y="2615184"/>
+            <a:ext cx="384048" cy="384048"/>
+          </a:xfrm>
+          <a:prstGeom prst="rect">
+            <a:avLst/>
+          </a:prstGeom>
+        </p:spPr>
+      </p:pic>
+      <p:sp>
+        <p:nvSpPr>
+          <p:cNvPr id="20" name="Text 13"/>
+          <p:cNvSpPr/>
+          <p:nvPr/>
+        </p:nvSpPr>
+        <p:spPr>
+          <a:xfrm>
+            <a:off x="6217920" y="3200400"/>
+            <a:ext cx="2286000" cy="411480"/>
+          </a:xfrm>
+          <a:prstGeom prst="rect">
+            <a:avLst/>
+          </a:prstGeom>
+          <a:noFill/>
+          <a:ln/>
+        </p:spPr>
+        <p:txBody>
+          <a:bodyPr wrap="square" rtlCol="0" anchor="ctr"/>
+          <a:lstStyle/>
+          <a:p>
+            <a:pPr algn="ctr" indent="0" marL="0">
+              <a:lnSpc>
+                <a:spcPct val="100000"/>
+              </a:lnSpc>
+              <a:buNone/>
+            </a:pPr>
+            <a:r>
+              <a:rPr lang="en-US" sz="1450" b="1" dirty="0">
+                <a:solidFill>
+                  <a:srgbClr val="17313F"/>
+                </a:solidFill>
+                <a:latin typeface="Microsoft YaHei" pitchFamily="34" charset="0"/>
+                <a:ea typeface="Microsoft YaHei" pitchFamily="34" charset="-122"/>
+                <a:cs typeface="Microsoft YaHei" pitchFamily="34" charset="-120"/>
+              </a:rPr>
+              <a:t>统计校准</a:t>
+            </a:r>
+            <a:endParaRPr lang="en-US" sz="1450" dirty="0"/>
+          </a:p>
+        </p:txBody>
+      </p:sp>
+      <p:sp>
+        <p:nvSpPr>
+          <p:cNvPr id="21" name="Text 14"/>
+          <p:cNvSpPr/>
+          <p:nvPr/>
+        </p:nvSpPr>
+        <p:spPr>
+          <a:xfrm>
+            <a:off x="6236208" y="3639312"/>
+            <a:ext cx="2249424" cy="411480"/>
+          </a:xfrm>
+          <a:prstGeom prst="rect">
+            <a:avLst/>
+          </a:prstGeom>
+          <a:noFill/>
+          <a:ln/>
+        </p:spPr>
+        <p:txBody>
+          <a:bodyPr wrap="square" rtlCol="0" anchor="ctr"/>
+          <a:lstStyle/>
+          <a:p>
+            <a:pPr algn="ctr" indent="0" marL="0">
+              <a:lnSpc>
+                <a:spcPct val="100000"/>
+              </a:lnSpc>
+              <a:buNone/>
+            </a:pPr>
+            <a:r>
+              <a:rPr lang="en-US" sz="1150" dirty="0">
+                <a:solidFill>
+                  <a:srgbClr val="71838F"/>
+                </a:solidFill>
+                <a:latin typeface="Microsoft YaHei" pitchFamily="34" charset="0"/>
+                <a:ea typeface="Microsoft YaHei" pitchFamily="34" charset="-122"/>
+                <a:cs typeface="Microsoft YaHei" pitchFamily="34" charset="-120"/>
+              </a:rPr>
+              <a:t>用真实命中率验证</a:t>
+            </a:r>
+            <a:endParaRPr lang="en-US" sz="1150" dirty="0"/>
+          </a:p>
+        </p:txBody>
+      </p:sp>
+      <p:pic>
+        <p:nvPicPr>
+          <p:cNvPr id="22" name="Image 5" descr="preencoded.png">    </p:cNvPr>
+          <p:cNvPicPr>
+            <a:picLocks noChangeAspect="1"/>
+          </p:cNvPicPr>
+          <p:nvPr/>
+        </p:nvPicPr>
+        <p:blipFill>
+          <a:blip r:embed="rId6"/>
+          <a:stretch>
+            <a:fillRect/>
+          </a:stretch>
+        </p:blipFill>
+        <p:spPr>
+          <a:xfrm>
+            <a:off x="8631936" y="3063240"/>
+            <a:ext cx="292608" cy="292608"/>
+          </a:xfrm>
+          <a:prstGeom prst="rect">
+            <a:avLst/>
+          </a:prstGeom>
+        </p:spPr>
+      </p:pic>
+      <p:sp>
+        <p:nvSpPr>
+          <p:cNvPr id="23" name="Shape 15"/>
+          <p:cNvSpPr/>
+          <p:nvPr/>
+        </p:nvSpPr>
+        <p:spPr>
+          <a:xfrm>
+            <a:off x="8915400" y="2286000"/>
+            <a:ext cx="2468880" cy="1828800"/>
+          </a:xfrm>
+          <a:prstGeom prst="roundRect">
+            <a:avLst>
+              <a:gd name="adj" fmla="val 6000"/>
+            </a:avLst>
+          </a:prstGeom>
+          <a:solidFill>
+            <a:srgbClr val="F4FAFB"/>
+          </a:solidFill>
+          <a:ln w="19050">
+            <a:solidFill>
+              <a:srgbClr val="22875A"/>
+            </a:solidFill>
+            <a:prstDash val="solid"/>
+          </a:ln>
+        </p:spPr>
+      </p:sp>
+      <p:sp>
+        <p:nvSpPr>
+          <p:cNvPr id="24" name="Shape 16"/>
+          <p:cNvSpPr/>
+          <p:nvPr/>
+        </p:nvSpPr>
+        <p:spPr>
+          <a:xfrm>
+            <a:off x="9829800" y="2487168"/>
+            <a:ext cx="640080" cy="640080"/>
+          </a:xfrm>
+          <a:prstGeom prst="ellipse">
+            <a:avLst/>
+          </a:prstGeom>
+          <a:solidFill>
+            <a:srgbClr val="22875A"/>
+          </a:solidFill>
+          <a:ln/>
+        </p:spPr>
+      </p:sp>
+      <p:pic>
+        <p:nvPicPr>
+          <p:cNvPr id="25" name="Image 6" descr="preencoded.png">    </p:cNvPr>
+          <p:cNvPicPr>
+            <a:picLocks noChangeAspect="1"/>
+          </p:cNvPicPr>
+          <p:nvPr/>
+        </p:nvPicPr>
+        <p:blipFill>
+          <a:blip r:embed="rId7"/>
+          <a:stretch>
+            <a:fillRect/>
+          </a:stretch>
+        </p:blipFill>
+        <p:spPr>
+          <a:xfrm>
+            <a:off x="9957816" y="2615184"/>
+            <a:ext cx="384048" cy="384048"/>
+          </a:xfrm>
+          <a:prstGeom prst="rect">
+            <a:avLst/>
+          </a:prstGeom>
+        </p:spPr>
+      </p:pic>
+      <p:sp>
+        <p:nvSpPr>
+          <p:cNvPr id="26" name="Text 17"/>
+          <p:cNvSpPr/>
+          <p:nvPr/>
+        </p:nvSpPr>
+        <p:spPr>
+          <a:xfrm>
+            <a:off x="9006840" y="3200400"/>
+            <a:ext cx="2286000" cy="411480"/>
+          </a:xfrm>
+          <a:prstGeom prst="rect">
+            <a:avLst/>
+          </a:prstGeom>
+          <a:noFill/>
+          <a:ln/>
+        </p:spPr>
+        <p:txBody>
+          <a:bodyPr wrap="square" rtlCol="0" anchor="ctr"/>
+          <a:lstStyle/>
+          <a:p>
+            <a:pPr algn="ctr" indent="0" marL="0">
+              <a:lnSpc>
+                <a:spcPct val="100000"/>
+              </a:lnSpc>
+              <a:buNone/>
+            </a:pPr>
+            <a:r>
+              <a:rPr lang="en-US" sz="1450" b="1" dirty="0">
+                <a:solidFill>
+                  <a:srgbClr val="17313F"/>
+                </a:solidFill>
+                <a:latin typeface="Microsoft YaHei" pitchFamily="34" charset="0"/>
+                <a:ea typeface="Microsoft YaHei" pitchFamily="34" charset="-122"/>
+                <a:cs typeface="Microsoft YaHei" pitchFamily="34" charset="-120"/>
+              </a:rPr>
+              <a:t>人工审批</a:t>
+            </a:r>
+            <a:endParaRPr lang="en-US" sz="1450" dirty="0"/>
+          </a:p>
+        </p:txBody>
+      </p:sp>
+      <p:sp>
+        <p:nvSpPr>
+          <p:cNvPr id="27" name="Text 18"/>
+          <p:cNvSpPr/>
+          <p:nvPr/>
+        </p:nvSpPr>
+        <p:spPr>
+          <a:xfrm>
+            <a:off x="9025128" y="3639312"/>
+            <a:ext cx="2249424" cy="411480"/>
+          </a:xfrm>
+          <a:prstGeom prst="rect">
+            <a:avLst/>
+          </a:prstGeom>
+          <a:noFill/>
+          <a:ln/>
+        </p:spPr>
+        <p:txBody>
+          <a:bodyPr wrap="square" rtlCol="0" anchor="ctr"/>
+          <a:lstStyle/>
+          <a:p>
+            <a:pPr algn="ctr" indent="0" marL="0">
+              <a:lnSpc>
+                <a:spcPct val="100000"/>
+              </a:lnSpc>
+              <a:buNone/>
+            </a:pPr>
+            <a:r>
+              <a:rPr lang="en-US" sz="1150" dirty="0">
+                <a:solidFill>
+                  <a:srgbClr val="71838F"/>
+                </a:solidFill>
+                <a:latin typeface="Microsoft YaHei" pitchFamily="34" charset="0"/>
+                <a:ea typeface="Microsoft YaHei" pitchFamily="34" charset="-122"/>
+                <a:cs typeface="Microsoft YaHei" pitchFamily="34" charset="-120"/>
+              </a:rPr>
+              <a:t>委员会签字才生效</a:t>
+            </a:r>
+            <a:endParaRPr lang="en-US" sz="1150" dirty="0"/>
+          </a:p>
+        </p:txBody>
+      </p:sp>
+      <p:sp>
+        <p:nvSpPr>
+          <p:cNvPr id="28" name="Shape 19"/>
+          <p:cNvSpPr/>
+          <p:nvPr/>
+        </p:nvSpPr>
+        <p:spPr>
+          <a:xfrm>
+            <a:off x="548640" y="4526280"/>
+            <a:ext cx="11091672" cy="1188720"/>
+          </a:xfrm>
+          <a:prstGeom prst="roundRect">
+            <a:avLst>
+              <a:gd name="adj" fmla="val 9231"/>
+            </a:avLst>
+          </a:prstGeom>
+          <a:solidFill>
+            <a:srgbClr val="FFF6E8"/>
+          </a:solidFill>
+          <a:ln w="15240">
+            <a:solidFill>
+              <a:srgbClr val="F0D8A8"/>
+            </a:solidFill>
+            <a:prstDash val="solid"/>
+          </a:ln>
+        </p:spPr>
+      </p:sp>
+      <p:pic>
+        <p:nvPicPr>
+          <p:cNvPr id="29" name="Image 7" descr="preencoded.png">    </p:cNvPr>
+          <p:cNvPicPr>
+            <a:picLocks noChangeAspect="1"/>
+          </p:cNvPicPr>
+          <p:nvPr/>
+        </p:nvPicPr>
+        <p:blipFill>
+          <a:blip r:embed="rId8"/>
+          <a:stretch>
+            <a:fillRect/>
+          </a:stretch>
+        </p:blipFill>
+        <p:spPr>
+          <a:xfrm>
+            <a:off x="868680" y="4864608"/>
+            <a:ext cx="457200" cy="457200"/>
+          </a:xfrm>
+          <a:prstGeom prst="rect">
+            <a:avLst/>
+          </a:prstGeom>
+        </p:spPr>
+      </p:pic>
+      <p:sp>
+        <p:nvSpPr>
+          <p:cNvPr id="30" name="Text 20"/>
+          <p:cNvSpPr/>
+          <p:nvPr/>
+        </p:nvSpPr>
+        <p:spPr>
+          <a:xfrm>
+            <a:off x="1508760" y="4617720"/>
+            <a:ext cx="9921240" cy="1005840"/>
+          </a:xfrm>
+          <a:prstGeom prst="rect">
+            <a:avLst/>
+          </a:prstGeom>
+          <a:noFill/>
+          <a:ln/>
+        </p:spPr>
+        <p:txBody>
+          <a:bodyPr wrap="square" rtlCol="0" anchor="ctr"/>
+          <a:lstStyle/>
+          <a:p>
+            <a:pPr indent="0" marL="0">
+              <a:lnSpc>
+                <a:spcPct val="120000"/>
+              </a:lnSpc>
+              <a:buNone/>
+            </a:pPr>
+            <a:r>
+              <a:rPr lang="en-US" sz="1350" b="1" dirty="0">
+                <a:solidFill>
+                  <a:srgbClr val="C9861A"/>
+                </a:solidFill>
+                <a:latin typeface="Microsoft YaHei" pitchFamily="34" charset="0"/>
+                <a:ea typeface="Microsoft YaHei" pitchFamily="34" charset="-122"/>
+                <a:cs typeface="Microsoft YaHei" pitchFamily="34" charset="-120"/>
+              </a:rPr>
+              <a:t>合规底线：</a:t>
+            </a:r>
+            <a:pPr indent="0" marL="0">
+              <a:lnSpc>
+                <a:spcPct val="120000"/>
+              </a:lnSpc>
+              <a:buNone/>
+            </a:pPr>
+            <a:r>
+              <a:rPr lang="en-US" sz="1350" dirty="0">
+                <a:solidFill>
+                  <a:srgbClr val="17313F"/>
+                </a:solidFill>
+                <a:latin typeface="Microsoft YaHei" pitchFamily="34" charset="0"/>
+                <a:ea typeface="Microsoft YaHei" pitchFamily="34" charset="-122"/>
+                <a:cs typeface="Microsoft YaHei" pitchFamily="34" charset="-120"/>
+              </a:rPr>
+              <a:t>自我进化只能「发现假设」，绝不能黑盒改告警等级。任何影响分级的变更，都必须经过可审计的统计校准 + 人工审批。</a:t>
+            </a:r>
+            <a:endParaRPr lang="en-US" sz="1350" dirty="0"/>
+          </a:p>
+        </p:txBody>
+      </p:sp>
+      <p:sp>
+        <p:nvSpPr>
+          <p:cNvPr id="31" name="Text 21"/>
+          <p:cNvSpPr/>
+          <p:nvPr/>
+        </p:nvSpPr>
+        <p:spPr>
+          <a:xfrm>
+            <a:off x="11368735" y="6400800"/>
+            <a:ext cx="457200" cy="274320"/>
+          </a:xfrm>
+          <a:prstGeom prst="rect">
+            <a:avLst/>
+          </a:prstGeom>
+          <a:noFill/>
+          <a:ln/>
+        </p:spPr>
+        <p:txBody>
+          <a:bodyPr wrap="square" rtlCol="0" anchor="ctr"/>
+          <a:lstStyle/>
+          <a:p>
+            <a:pPr algn="r" indent="0" marL="0">
+              <a:buNone/>
+            </a:pPr>
+            <a:r>
+              <a:rPr lang="en-US" sz="1000" dirty="0">
+                <a:solidFill>
+                  <a:srgbClr val="71838F"/>
+                </a:solidFill>
+                <a:latin typeface="Microsoft YaHei" pitchFamily="34" charset="0"/>
+                <a:ea typeface="Microsoft YaHei" pitchFamily="34" charset="-122"/>
+                <a:cs typeface="Microsoft YaHei" pitchFamily="34" charset="-120"/>
+              </a:rPr>
+              <a:t>08</a:t>
+            </a:r>
+            <a:endParaRPr lang="en-US" sz="1000" dirty="0"/>
+          </a:p>
+        </p:txBody>
+      </p:sp>
+      <p:sp>
+        <p:nvSpPr>
+          <p:cNvPr id="32" name="Text 22"/>
+          <p:cNvSpPr/>
+          <p:nvPr/>
+        </p:nvSpPr>
+        <p:spPr>
+          <a:xfrm>
+            <a:off x="548640" y="6400800"/>
+            <a:ext cx="5486400" cy="274320"/>
+          </a:xfrm>
+          <a:prstGeom prst="rect">
+            <a:avLst/>
+          </a:prstGeom>
+          <a:noFill/>
+          <a:ln/>
+        </p:spPr>
+        <p:txBody>
+          <a:bodyPr wrap="square" rtlCol="0" anchor="ctr"/>
+          <a:lstStyle/>
+          <a:p>
+            <a:pPr indent="0" marL="0">
+              <a:buNone/>
+            </a:pPr>
+            <a:r>
+              <a:rPr lang="en-US" sz="900" dirty="0">
+                <a:solidFill>
+                  <a:srgbClr val="71838F"/>
+                </a:solidFill>
+                <a:latin typeface="Microsoft YaHei" pitchFamily="34" charset="0"/>
+                <a:ea typeface="Microsoft YaHei" pitchFamily="34" charset="-122"/>
+                <a:cs typeface="Microsoft YaHei" pitchFamily="34" charset="-120"/>
+              </a:rPr>
+              <a:t>AML 付款风险识别系统</a:t>
+            </a:r>
+            <a:endParaRPr lang="en-US" sz="900" dirty="0"/>
+          </a:p>
+        </p:txBody>
+      </p:sp>
+    </p:spTree>
+  </p:cSld>
+  <p:clrMapOvr>
+    <a:masterClrMapping/>
+  </p:clrMapOvr>
+</p:sld>
+</file>
+
+<file path=ppt/slides/slide9.xml><?xml version="1.0" encoding="utf-8"?>
+<p:sld xmlns:a="http://schemas.openxmlformats.org/drawingml/2006/main" xmlns:r="http://schemas.openxmlformats.org/officeDocument/2006/relationships" xmlns:p="http://schemas.openxmlformats.org/presentationml/2006/main">
+  <p:cSld name="Slide 9">
     <p:bg>
       <p:bgPr>
         <a:solidFill>

--- a/ppt/AML-System-Walkthrough-Legal-CN.pptx
+++ b/ppt/AML-System-Walkthrough-Legal-CN.pptx
@@ -2963,7 +2963,7 @@
                 <a:ea typeface="Microsoft YaHei" pitchFamily="34" charset="-122"/>
                 <a:cs typeface="Microsoft YaHei" pitchFamily="34" charset="-120"/>
               </a:rPr>
-              <a:t>强信号被「平均」稀释：一笔命中 2 条 30% 命中率硬规则的付款，被其它正常维度一平均就沉底、可能没人看。</a:t>
+              <a:t>强信号被「平均」稀释：一笔哪怕只命中 1 条 30% 命中率硬规则的付款，被其它正常维度一平均就沉底、可能没人看。</a:t>
             </a:r>
             <a:endParaRPr lang="en-US" sz="1250" dirty="0"/>
           </a:p>
@@ -3609,7 +3609,7 @@
                 <a:ea typeface="Microsoft YaHei" pitchFamily="34" charset="-122"/>
                 <a:cs typeface="Microsoft YaHei" pitchFamily="34" charset="-120"/>
               </a:rPr>
-              <a:t>分级逻辑：看命中几条高精度规则</a:t>
+              <a:t>分级逻辑：命中任意一条高精度规则即 T1</a:t>
             </a:r>
             <a:endParaRPr lang="en-US" sz="3000" dirty="0"/>
           </a:p>
@@ -3682,7 +3682,7 @@
                 <a:ea typeface="Microsoft YaHei" pitchFamily="34" charset="-122"/>
                 <a:cs typeface="Microsoft YaHei" pitchFamily="34" charset="-120"/>
               </a:rPr>
-              <a:t>付款级高精度规则（入口 A）</a:t>
+              <a:t>付款级硬规则（入口 A）</a:t>
             </a:r>
             <a:endParaRPr lang="en-US" sz="1600" dirty="0"/>
           </a:p>
@@ -3721,7 +3721,7 @@
                 <a:ea typeface="Microsoft YaHei" pitchFamily="34" charset="-122"/>
                 <a:cs typeface="Microsoft YaHei" pitchFamily="34" charset="-120"/>
               </a:rPr>
-              <a:t>每条约 30% PPV —— 命中后约三成确实是洗钱</a:t>
+              <a:t>准确率 100% 的确定性校验 —— 单条命中即高置信</a:t>
             </a:r>
             <a:endParaRPr lang="en-US" sz="1150" dirty="0"/>
           </a:p>
@@ -3955,7 +3955,7 @@
                 <a:ea typeface="Microsoft YaHei" pitchFamily="34" charset="-122"/>
                 <a:cs typeface="Microsoft YaHei" pitchFamily="34" charset="-120"/>
               </a:rPr>
-              <a:t>命中 ≥ 2 条高精度规则</a:t>
+              <a:t>命中任意 1 条高精度规则</a:t>
             </a:r>
             <a:endParaRPr lang="en-US" sz="1500" dirty="0"/>
           </a:p>
@@ -4110,7 +4110,7 @@
                 <a:ea typeface="Microsoft YaHei" pitchFamily="34" charset="-122"/>
                 <a:cs typeface="Microsoft YaHei" pitchFamily="34" charset="-120"/>
               </a:rPr>
-              <a:t>命中 1 条高精度规则</a:t>
+              <a:t>仅命中供应商级信号</a:t>
             </a:r>
             <a:endParaRPr lang="en-US" sz="1500" dirty="0"/>
           </a:p>
@@ -4265,7 +4265,7 @@
                 <a:ea typeface="Microsoft YaHei" pitchFamily="34" charset="-122"/>
                 <a:cs typeface="Microsoft YaHei" pitchFamily="34" charset="-120"/>
               </a:rPr>
-              <a:t>未命中高精度规则</a:t>
+              <a:t>高精度 / 行为均未命中</a:t>
             </a:r>
             <a:endParaRPr lang="en-US" sz="1500" dirty="0"/>
           </a:p>
@@ -4357,7 +4357,7 @@
               <a:buNone/>
             </a:pPr>
             <a:r>
-              <a:rPr lang="en-US" sz="1300" b="1" dirty="0">
+              <a:rPr lang="en-US" sz="1250" b="1" dirty="0">
                 <a:solidFill>
                   <a:srgbClr val="37B7AD"/>
                 </a:solidFill>
@@ -4365,13 +4365,13 @@
                 <a:ea typeface="Microsoft YaHei" pitchFamily="34" charset="-122"/>
                 <a:cs typeface="Microsoft YaHei" pitchFamily="34" charset="-120"/>
               </a:rPr>
-              <a:t>供应商级信号（入口 B）同样并入：</a:t>
+              <a:t>为何如此从严：</a:t>
             </a:r>
             <a:pPr indent="0" marL="0">
               <a:buNone/>
             </a:pPr>
             <a:r>
-              <a:rPr lang="en-US" sz="1300" dirty="0">
+              <a:rPr lang="en-US" sz="1250" dirty="0">
                 <a:solidFill>
                   <a:srgbClr val="DDEBEF"/>
                 </a:solidFill>
@@ -4379,9 +4379,9 @@
                 <a:ea typeface="Microsoft YaHei" pitchFamily="34" charset="-122"/>
                 <a:cs typeface="Microsoft YaHei" pitchFamily="34" charset="-120"/>
               </a:rPr>
-              <a:t>拆分 + 旗下高精度命中 → T1；单一行为信号（拆分 / 突增 / 多次命中）→ T2。</a:t>
-            </a:r>
-            <a:endParaRPr lang="en-US" sz="1300" dirty="0"/>
+              <a:t>这四条是准确率 100% 的确定性校验，单条命中即高置信 → 直接 T1。仅命中供应商级行为信号（拆分 / 突增 / 多次命中）→ T2。</a:t>
+            </a:r>
+            <a:endParaRPr lang="en-US" sz="1250" dirty="0"/>
           </a:p>
         </p:txBody>
       </p:sp>

--- a/ppt/AML-System-Walkthrough-Legal-CN.pptx
+++ b/ppt/AML-System-Walkthrough-Legal-CN.pptx
@@ -3609,7 +3609,7 @@
                 <a:ea typeface="Microsoft YaHei" pitchFamily="34" charset="-122"/>
                 <a:cs typeface="Microsoft YaHei" pitchFamily="34" charset="-120"/>
               </a:rPr>
-              <a:t>分级逻辑：命中任意一条高精度规则即 T1</a:t>
+              <a:t>三个等级：逐级说明</a:t>
             </a:r>
             <a:endParaRPr lang="en-US" sz="3000" dirty="0"/>
           </a:p>
@@ -3624,11 +3624,11 @@
         <p:spPr>
           <a:xfrm>
             <a:off x="548640" y="1828800"/>
-            <a:ext cx="5074920" cy="3520440"/>
+            <a:ext cx="3511296" cy="4160520"/>
           </a:xfrm>
           <a:prstGeom prst="roundRect">
             <a:avLst>
-              <a:gd name="adj" fmla="val 3117"/>
+              <a:gd name="adj" fmla="val 3646"/>
             </a:avLst>
           </a:prstGeom>
           <a:solidFill>
@@ -3657,8 +3657,51 @@
         </p:nvSpPr>
         <p:spPr>
           <a:xfrm>
-            <a:off x="822960" y="2029968"/>
-            <a:ext cx="4572000" cy="365760"/>
+            <a:off x="822960" y="2103120"/>
+            <a:ext cx="868680" cy="566928"/>
+          </a:xfrm>
+          <a:prstGeom prst="rect">
+            <a:avLst>
+              <a:gd name="adj" fmla="val 12903"/>
+            </a:avLst>
+          </a:prstGeom>
+          <a:solidFill>
+            <a:srgbClr val="D84B4B"/>
+          </a:solidFill>
+          <a:ln/>
+        </p:spPr>
+        <p:txBody>
+          <a:bodyPr wrap="square" rtlCol="0" anchor="ctr"/>
+          <a:lstStyle/>
+          <a:p>
+            <a:pPr algn="ctr" indent="0" marL="0">
+              <a:buNone/>
+            </a:pPr>
+            <a:r>
+              <a:rPr lang="en-US" sz="2000" b="1" dirty="0">
+                <a:solidFill>
+                  <a:srgbClr val="FFFFFF"/>
+                </a:solidFill>
+                <a:latin typeface="Microsoft YaHei" pitchFamily="34" charset="0"/>
+                <a:ea typeface="Microsoft YaHei" pitchFamily="34" charset="-122"/>
+                <a:cs typeface="Microsoft YaHei" pitchFamily="34" charset="-120"/>
+              </a:rPr>
+              <a:t>T1</a:t>
+            </a:r>
+            <a:endParaRPr lang="en-US" sz="2000" dirty="0"/>
+          </a:p>
+        </p:txBody>
+      </p:sp>
+      <p:sp>
+        <p:nvSpPr>
+          <p:cNvPr id="6" name="Text 4"/>
+          <p:cNvSpPr/>
+          <p:nvPr/>
+        </p:nvSpPr>
+        <p:spPr>
+          <a:xfrm>
+            <a:off x="1828800" y="2103120"/>
+            <a:ext cx="2011680" cy="365760"/>
           </a:xfrm>
           <a:prstGeom prst="rect">
             <a:avLst/>
@@ -3674,7 +3717,7 @@
               <a:buNone/>
             </a:pPr>
             <a:r>
-              <a:rPr lang="en-US" sz="1600" b="1" dirty="0">
+              <a:rPr lang="en-US" sz="1700" b="1" dirty="0">
                 <a:solidFill>
                   <a:srgbClr val="17313F"/>
                 </a:solidFill>
@@ -3682,22 +3725,22 @@
                 <a:ea typeface="Microsoft YaHei" pitchFamily="34" charset="-122"/>
                 <a:cs typeface="Microsoft YaHei" pitchFamily="34" charset="-120"/>
               </a:rPr>
-              <a:t>付款级硬规则（入口 A）</a:t>
-            </a:r>
-            <a:endParaRPr lang="en-US" sz="1600" dirty="0"/>
-          </a:p>
-        </p:txBody>
-      </p:sp>
-      <p:sp>
-        <p:nvSpPr>
-          <p:cNvPr id="6" name="Text 4"/>
-          <p:cNvSpPr/>
-          <p:nvPr/>
-        </p:nvSpPr>
-        <p:spPr>
-          <a:xfrm>
-            <a:off x="822960" y="2432304"/>
-            <a:ext cx="4572000" cy="320040"/>
+              <a:t>紧急</a:t>
+            </a:r>
+            <a:endParaRPr lang="en-US" sz="1700" dirty="0"/>
+          </a:p>
+        </p:txBody>
+      </p:sp>
+      <p:sp>
+        <p:nvSpPr>
+          <p:cNvPr id="7" name="Text 5"/>
+          <p:cNvSpPr/>
+          <p:nvPr/>
+        </p:nvSpPr>
+        <p:spPr>
+          <a:xfrm>
+            <a:off x="1828800" y="2487168"/>
+            <a:ext cx="2011680" cy="292608"/>
           </a:xfrm>
           <a:prstGeom prst="rect">
             <a:avLst/>
@@ -3713,7 +3756,7 @@
               <a:buNone/>
             </a:pPr>
             <a:r>
-              <a:rPr lang="en-US" sz="1150" dirty="0">
+              <a:rPr lang="en-US" sz="1100" dirty="0">
                 <a:solidFill>
                   <a:srgbClr val="71838F"/>
                 </a:solidFill>
@@ -3721,22 +3764,87 @@
                 <a:ea typeface="Microsoft YaHei" pitchFamily="34" charset="-122"/>
                 <a:cs typeface="Microsoft YaHei" pitchFamily="34" charset="-120"/>
               </a:rPr>
-              <a:t>准确率 100% 的确定性校验 —— 单条命中即高置信</a:t>
-            </a:r>
-            <a:endParaRPr lang="en-US" sz="1150" dirty="0"/>
-          </a:p>
-        </p:txBody>
-      </p:sp>
-      <p:sp>
-        <p:nvSpPr>
-          <p:cNvPr id="7" name="Text 5"/>
-          <p:cNvSpPr/>
-          <p:nvPr/>
-        </p:nvSpPr>
-        <p:spPr>
-          <a:xfrm>
-            <a:off x="914400" y="2926080"/>
-            <a:ext cx="4572000" cy="2194560"/>
+              <a:t>24 小时内复核</a:t>
+            </a:r>
+            <a:endParaRPr lang="en-US" sz="1100" dirty="0"/>
+          </a:p>
+        </p:txBody>
+      </p:sp>
+      <p:sp>
+        <p:nvSpPr>
+          <p:cNvPr id="8" name="Shape 6"/>
+          <p:cNvSpPr/>
+          <p:nvPr/>
+        </p:nvSpPr>
+        <p:spPr>
+          <a:xfrm>
+            <a:off x="822960" y="2880360"/>
+            <a:ext cx="2962656" cy="0"/>
+          </a:xfrm>
+          <a:prstGeom prst="line">
+            <a:avLst/>
+          </a:prstGeom>
+          <a:noFill/>
+          <a:ln w="12700">
+            <a:solidFill>
+              <a:srgbClr val="DCE8EE"/>
+            </a:solidFill>
+            <a:prstDash val="solid"/>
+          </a:ln>
+        </p:spPr>
+      </p:sp>
+      <p:sp>
+        <p:nvSpPr>
+          <p:cNvPr id="9" name="Text 7"/>
+          <p:cNvSpPr/>
+          <p:nvPr/>
+        </p:nvSpPr>
+        <p:spPr>
+          <a:xfrm>
+            <a:off x="822960" y="2980944"/>
+            <a:ext cx="2962656" cy="548640"/>
+          </a:xfrm>
+          <a:prstGeom prst="rect">
+            <a:avLst/>
+          </a:prstGeom>
+          <a:noFill/>
+          <a:ln/>
+        </p:spPr>
+        <p:txBody>
+          <a:bodyPr wrap="square" rtlCol="0" anchor="ctr"/>
+          <a:lstStyle/>
+          <a:p>
+            <a:pPr indent="0" marL="0">
+              <a:lnSpc>
+                <a:spcPct val="105000"/>
+              </a:lnSpc>
+              <a:buNone/>
+            </a:pPr>
+            <a:r>
+              <a:rPr lang="en-US" sz="1400" b="1" dirty="0">
+                <a:solidFill>
+                  <a:srgbClr val="17313F"/>
+                </a:solidFill>
+                <a:latin typeface="Microsoft YaHei" pitchFamily="34" charset="0"/>
+                <a:ea typeface="Microsoft YaHei" pitchFamily="34" charset="-122"/>
+                <a:cs typeface="Microsoft YaHei" pitchFamily="34" charset="-120"/>
+              </a:rPr>
+              <a:t>命中任意 1 条高精度规则</a:t>
+            </a:r>
+            <a:endParaRPr lang="en-US" sz="1400" dirty="0"/>
+          </a:p>
+        </p:txBody>
+      </p:sp>
+      <p:sp>
+        <p:nvSpPr>
+          <p:cNvPr id="10" name="Text 8"/>
+          <p:cNvSpPr/>
+          <p:nvPr/>
+        </p:nvSpPr>
+        <p:spPr>
+          <a:xfrm>
+            <a:off x="932688" y="3611880"/>
+            <a:ext cx="2852928" cy="1371600"/>
           </a:xfrm>
           <a:prstGeom prst="rect">
             <a:avLst/>
@@ -3753,13 +3861,13 @@
                 <a:spcPct val="100000"/>
               </a:lnSpc>
               <a:spcAft>
-                <a:spcPts val="1200"/>
+                <a:spcPts val="600"/>
               </a:spcAft>
               <a:buSzPct val="100000"/>
               <a:buChar char="•"/>
             </a:pPr>
             <a:r>
-              <a:rPr lang="en-US" sz="1400" dirty="0">
+              <a:rPr lang="en-US" sz="1200" dirty="0">
                 <a:solidFill>
                   <a:srgbClr val="17313F"/>
                 </a:solidFill>
@@ -3769,7 +3877,7 @@
               </a:rPr>
               <a:t>银行 / 营业地国家不一致</a:t>
             </a:r>
-            <a:endParaRPr lang="en-US" sz="1400" dirty="0"/>
+            <a:endParaRPr lang="en-US" sz="1200" dirty="0"/>
           </a:p>
           <a:p>
             <a:pPr marL="342900" indent="-342900">
@@ -3777,13 +3885,13 @@
                 <a:spcPct val="100000"/>
               </a:lnSpc>
               <a:spcAft>
-                <a:spcPts val="1200"/>
+                <a:spcPts val="600"/>
               </a:spcAft>
               <a:buSzPct val="100000"/>
               <a:buChar char="•"/>
             </a:pPr>
             <a:r>
-              <a:rPr lang="en-US" sz="1400" dirty="0">
+              <a:rPr lang="en-US" sz="1200" dirty="0">
                 <a:solidFill>
                   <a:srgbClr val="17313F"/>
                 </a:solidFill>
@@ -3793,7 +3901,7 @@
               </a:rPr>
               <a:t>付款方 / 发票来源国不一致</a:t>
             </a:r>
-            <a:endParaRPr lang="en-US" sz="1400" dirty="0"/>
+            <a:endParaRPr lang="en-US" sz="1200" dirty="0"/>
           </a:p>
           <a:p>
             <a:pPr marL="342900" indent="-342900">
@@ -3801,13 +3909,13 @@
                 <a:spcPct val="100000"/>
               </a:lnSpc>
               <a:spcAft>
-                <a:spcPts val="1200"/>
+                <a:spcPts val="600"/>
               </a:spcAft>
               <a:buSzPct val="100000"/>
               <a:buChar char="•"/>
             </a:pPr>
             <a:r>
-              <a:rPr lang="en-US" sz="1400" dirty="0">
+              <a:rPr lang="en-US" sz="1200" dirty="0">
                 <a:solidFill>
                   <a:srgbClr val="17313F"/>
                 </a:solidFill>
@@ -3817,7 +3925,7 @@
               </a:rPr>
               <a:t>主营业务 ≠ 采购品类</a:t>
             </a:r>
-            <a:endParaRPr lang="en-US" sz="1400" dirty="0"/>
+            <a:endParaRPr lang="en-US" sz="1200" dirty="0"/>
           </a:p>
           <a:p>
             <a:pPr marL="342900" indent="-342900">
@@ -3825,13 +3933,13 @@
                 <a:spcPct val="100000"/>
               </a:lnSpc>
               <a:spcAft>
-                <a:spcPts val="1200"/>
+                <a:spcPts val="600"/>
               </a:spcAft>
               <a:buSzPct val="100000"/>
               <a:buChar char="•"/>
             </a:pPr>
             <a:r>
-              <a:rPr lang="en-US" sz="1400" dirty="0">
+              <a:rPr lang="en-US" sz="1200" dirty="0">
                 <a:solidFill>
                   <a:srgbClr val="17313F"/>
                 </a:solidFill>
@@ -3841,24 +3949,110 @@
               </a:rPr>
               <a:t>虚假发票特征</a:t>
             </a:r>
-            <a:endParaRPr lang="en-US" sz="1400" dirty="0"/>
-          </a:p>
-        </p:txBody>
-      </p:sp>
-      <p:sp>
-        <p:nvSpPr>
-          <p:cNvPr id="8" name="Shape 6"/>
-          <p:cNvSpPr/>
-          <p:nvPr/>
-        </p:nvSpPr>
-        <p:spPr>
-          <a:xfrm>
-            <a:off x="5989320" y="1828800"/>
-            <a:ext cx="5650992" cy="1005840"/>
+            <a:endParaRPr lang="en-US" sz="1200" dirty="0"/>
+          </a:p>
+        </p:txBody>
+      </p:sp>
+      <p:sp>
+        <p:nvSpPr>
+          <p:cNvPr id="11" name="Shape 9"/>
+          <p:cNvSpPr/>
+          <p:nvPr/>
+        </p:nvSpPr>
+        <p:spPr>
+          <a:xfrm>
+            <a:off x="822960" y="4983480"/>
+            <a:ext cx="2962656" cy="868680"/>
           </a:xfrm>
           <a:prstGeom prst="roundRect">
             <a:avLst>
-              <a:gd name="adj" fmla="val 10909"/>
+              <a:gd name="adj" fmla="val 10526"/>
+            </a:avLst>
+          </a:prstGeom>
+          <a:solidFill>
+            <a:srgbClr val="FBEEEE"/>
+          </a:solidFill>
+          <a:ln w="12700">
+            <a:solidFill>
+              <a:srgbClr val="F0C9C9"/>
+            </a:solidFill>
+            <a:prstDash val="solid"/>
+          </a:ln>
+        </p:spPr>
+      </p:sp>
+      <p:sp>
+        <p:nvSpPr>
+          <p:cNvPr id="12" name="Text 10"/>
+          <p:cNvSpPr/>
+          <p:nvPr/>
+        </p:nvSpPr>
+        <p:spPr>
+          <a:xfrm>
+            <a:off x="960120" y="5029200"/>
+            <a:ext cx="2688336" cy="777240"/>
+          </a:xfrm>
+          <a:prstGeom prst="rect">
+            <a:avLst/>
+          </a:prstGeom>
+          <a:noFill/>
+          <a:ln/>
+        </p:spPr>
+        <p:txBody>
+          <a:bodyPr wrap="square" rtlCol="0" anchor="ctr"/>
+          <a:lstStyle/>
+          <a:p>
+            <a:pPr indent="0" marL="0">
+              <a:lnSpc>
+                <a:spcPct val="110000"/>
+              </a:lnSpc>
+              <a:buNone/>
+            </a:pPr>
+            <a:r>
+              <a:rPr lang="en-US" sz="1100" b="1" dirty="0">
+                <a:solidFill>
+                  <a:srgbClr val="D84B4B"/>
+                </a:solidFill>
+                <a:latin typeface="Microsoft YaHei" pitchFamily="34" charset="0"/>
+                <a:ea typeface="Microsoft YaHei" pitchFamily="34" charset="-122"/>
+                <a:cs typeface="Microsoft YaHei" pitchFamily="34" charset="-120"/>
+              </a:rPr>
+              <a:t>为何直接 T1：</a:t>
+            </a:r>
+            <a:pPr indent="0" marL="0">
+              <a:lnSpc>
+                <a:spcPct val="110000"/>
+              </a:lnSpc>
+              <a:buNone/>
+            </a:pPr>
+            <a:r>
+              <a:rPr lang="en-US" sz="1100" dirty="0">
+                <a:solidFill>
+                  <a:srgbClr val="17313F"/>
+                </a:solidFill>
+                <a:latin typeface="Microsoft YaHei" pitchFamily="34" charset="0"/>
+                <a:ea typeface="Microsoft YaHei" pitchFamily="34" charset="-122"/>
+                <a:cs typeface="Microsoft YaHei" pitchFamily="34" charset="-120"/>
+              </a:rPr>
+              <a:t>准确率 100% 的确定性校验，单条命中即高置信。</a:t>
+            </a:r>
+            <a:endParaRPr lang="en-US" sz="1100" dirty="0"/>
+          </a:p>
+        </p:txBody>
+      </p:sp>
+      <p:sp>
+        <p:nvSpPr>
+          <p:cNvPr id="13" name="Shape 11"/>
+          <p:cNvSpPr/>
+          <p:nvPr/>
+        </p:nvSpPr>
+        <p:spPr>
+          <a:xfrm>
+            <a:off x="4338828" y="1828800"/>
+            <a:ext cx="3511296" cy="4160520"/>
+          </a:xfrm>
+          <a:prstGeom prst="roundRect">
+            <a:avLst>
+              <a:gd name="adj" fmla="val 3646"/>
             </a:avLst>
           </a:prstGeom>
           <a:solidFill>
@@ -3881,22 +4075,22 @@
       </p:sp>
       <p:sp>
         <p:nvSpPr>
-          <p:cNvPr id="9" name="Text 7"/>
-          <p:cNvSpPr/>
-          <p:nvPr/>
-        </p:nvSpPr>
-        <p:spPr>
-          <a:xfrm>
-            <a:off x="6217920" y="2057400"/>
-            <a:ext cx="914400" cy="548640"/>
+          <p:cNvPr id="14" name="Text 12"/>
+          <p:cNvSpPr/>
+          <p:nvPr/>
+        </p:nvSpPr>
+        <p:spPr>
+          <a:xfrm>
+            <a:off x="4613148" y="2103120"/>
+            <a:ext cx="868680" cy="566928"/>
           </a:xfrm>
           <a:prstGeom prst="rect">
             <a:avLst>
-              <a:gd name="adj" fmla="val 13333"/>
+              <a:gd name="adj" fmla="val 12903"/>
             </a:avLst>
           </a:prstGeom>
           <a:solidFill>
-            <a:srgbClr val="D84B4B"/>
+            <a:srgbClr val="C9861A"/>
           </a:solidFill>
           <a:ln/>
         </p:spPr>
@@ -3916,7 +4110,7 @@
                 <a:ea typeface="Microsoft YaHei" pitchFamily="34" charset="-122"/>
                 <a:cs typeface="Microsoft YaHei" pitchFamily="34" charset="-120"/>
               </a:rPr>
-              <a:t>T1</a:t>
+              <a:t>T2</a:t>
             </a:r>
             <a:endParaRPr lang="en-US" sz="2000" dirty="0"/>
           </a:p>
@@ -3924,14 +4118,14 @@
       </p:sp>
       <p:sp>
         <p:nvSpPr>
-          <p:cNvPr id="10" name="Text 8"/>
-          <p:cNvSpPr/>
-          <p:nvPr/>
-        </p:nvSpPr>
-        <p:spPr>
-          <a:xfrm>
-            <a:off x="7360920" y="1975104"/>
-            <a:ext cx="4114800" cy="384048"/>
+          <p:cNvPr id="15" name="Text 13"/>
+          <p:cNvSpPr/>
+          <p:nvPr/>
+        </p:nvSpPr>
+        <p:spPr>
+          <a:xfrm>
+            <a:off x="5618988" y="2103120"/>
+            <a:ext cx="2011680" cy="365760"/>
           </a:xfrm>
           <a:prstGeom prst="rect">
             <a:avLst/>
@@ -3947,7 +4141,7 @@
               <a:buNone/>
             </a:pPr>
             <a:r>
-              <a:rPr lang="en-US" sz="1500" b="1" dirty="0">
+              <a:rPr lang="en-US" sz="1700" b="1" dirty="0">
                 <a:solidFill>
                   <a:srgbClr val="17313F"/>
                 </a:solidFill>
@@ -3955,22 +4149,22 @@
                 <a:ea typeface="Microsoft YaHei" pitchFamily="34" charset="-122"/>
                 <a:cs typeface="Microsoft YaHei" pitchFamily="34" charset="-120"/>
               </a:rPr>
-              <a:t>命中任意 1 条高精度规则</a:t>
-            </a:r>
-            <a:endParaRPr lang="en-US" sz="1500" dirty="0"/>
-          </a:p>
-        </p:txBody>
-      </p:sp>
-      <p:sp>
-        <p:nvSpPr>
-          <p:cNvPr id="11" name="Text 9"/>
-          <p:cNvSpPr/>
-          <p:nvPr/>
-        </p:nvSpPr>
-        <p:spPr>
-          <a:xfrm>
-            <a:off x="7360920" y="2359152"/>
-            <a:ext cx="4114800" cy="347472"/>
+              <a:t>告警</a:t>
+            </a:r>
+            <a:endParaRPr lang="en-US" sz="1700" dirty="0"/>
+          </a:p>
+        </p:txBody>
+      </p:sp>
+      <p:sp>
+        <p:nvSpPr>
+          <p:cNvPr id="16" name="Text 14"/>
+          <p:cNvSpPr/>
+          <p:nvPr/>
+        </p:nvSpPr>
+        <p:spPr>
+          <a:xfrm>
+            <a:off x="5618988" y="2487168"/>
+            <a:ext cx="2011680" cy="292608"/>
           </a:xfrm>
           <a:prstGeom prst="rect">
             <a:avLst/>
@@ -3986,7 +4180,7 @@
               <a:buNone/>
             </a:pPr>
             <a:r>
-              <a:rPr lang="en-US" sz="1200" dirty="0">
+              <a:rPr lang="en-US" sz="1100" dirty="0">
                 <a:solidFill>
                   <a:srgbClr val="71838F"/>
                 </a:solidFill>
@@ -3994,26 +4188,224 @@
                 <a:ea typeface="Microsoft YaHei" pitchFamily="34" charset="-122"/>
                 <a:cs typeface="Microsoft YaHei" pitchFamily="34" charset="-120"/>
               </a:rPr>
-              <a:t>紧急 · 24 小时内复核</a:t>
-            </a:r>
-            <a:endParaRPr lang="en-US" sz="1200" dirty="0"/>
-          </a:p>
-        </p:txBody>
-      </p:sp>
-      <p:sp>
-        <p:nvSpPr>
-          <p:cNvPr id="12" name="Shape 10"/>
-          <p:cNvSpPr/>
-          <p:nvPr/>
-        </p:nvSpPr>
-        <p:spPr>
-          <a:xfrm>
-            <a:off x="5989320" y="3017520"/>
-            <a:ext cx="5650992" cy="1005840"/>
+              <a:t>3 天内复核</a:t>
+            </a:r>
+            <a:endParaRPr lang="en-US" sz="1100" dirty="0"/>
+          </a:p>
+        </p:txBody>
+      </p:sp>
+      <p:sp>
+        <p:nvSpPr>
+          <p:cNvPr id="17" name="Shape 15"/>
+          <p:cNvSpPr/>
+          <p:nvPr/>
+        </p:nvSpPr>
+        <p:spPr>
+          <a:xfrm>
+            <a:off x="4613148" y="2880360"/>
+            <a:ext cx="2962656" cy="0"/>
+          </a:xfrm>
+          <a:prstGeom prst="line">
+            <a:avLst/>
+          </a:prstGeom>
+          <a:noFill/>
+          <a:ln w="12700">
+            <a:solidFill>
+              <a:srgbClr val="DCE8EE"/>
+            </a:solidFill>
+            <a:prstDash val="solid"/>
+          </a:ln>
+        </p:spPr>
+      </p:sp>
+      <p:sp>
+        <p:nvSpPr>
+          <p:cNvPr id="18" name="Text 16"/>
+          <p:cNvSpPr/>
+          <p:nvPr/>
+        </p:nvSpPr>
+        <p:spPr>
+          <a:xfrm>
+            <a:off x="4613148" y="2980944"/>
+            <a:ext cx="2962656" cy="548640"/>
+          </a:xfrm>
+          <a:prstGeom prst="rect">
+            <a:avLst/>
+          </a:prstGeom>
+          <a:noFill/>
+          <a:ln/>
+        </p:spPr>
+        <p:txBody>
+          <a:bodyPr wrap="square" rtlCol="0" anchor="ctr"/>
+          <a:lstStyle/>
+          <a:p>
+            <a:pPr indent="0" marL="0">
+              <a:lnSpc>
+                <a:spcPct val="105000"/>
+              </a:lnSpc>
+              <a:buNone/>
+            </a:pPr>
+            <a:r>
+              <a:rPr lang="en-US" sz="1400" b="1" dirty="0">
+                <a:solidFill>
+                  <a:srgbClr val="17313F"/>
+                </a:solidFill>
+                <a:latin typeface="Microsoft YaHei" pitchFamily="34" charset="0"/>
+                <a:ea typeface="Microsoft YaHei" pitchFamily="34" charset="-122"/>
+                <a:cs typeface="Microsoft YaHei" pitchFamily="34" charset="-120"/>
+              </a:rPr>
+              <a:t>仅命中供应商级信号（无硬规则命中）</a:t>
+            </a:r>
+            <a:endParaRPr lang="en-US" sz="1400" dirty="0"/>
+          </a:p>
+        </p:txBody>
+      </p:sp>
+      <p:sp>
+        <p:nvSpPr>
+          <p:cNvPr id="19" name="Text 17"/>
+          <p:cNvSpPr/>
+          <p:nvPr/>
+        </p:nvSpPr>
+        <p:spPr>
+          <a:xfrm>
+            <a:off x="4613148" y="3611880"/>
+            <a:ext cx="2962656" cy="320040"/>
+          </a:xfrm>
+          <a:prstGeom prst="rect">
+            <a:avLst/>
+          </a:prstGeom>
+          <a:noFill/>
+          <a:ln/>
+        </p:spPr>
+        <p:txBody>
+          <a:bodyPr wrap="square" rtlCol="0" anchor="ctr"/>
+          <a:lstStyle/>
+          <a:p>
+            <a:pPr indent="0" marL="0">
+              <a:buNone/>
+            </a:pPr>
+            <a:r>
+              <a:rPr lang="en-US" sz="1100" dirty="0">
+                <a:solidFill>
+                  <a:srgbClr val="71838F"/>
+                </a:solidFill>
+                <a:latin typeface="Microsoft YaHei" pitchFamily="34" charset="0"/>
+                <a:ea typeface="Microsoft YaHei" pitchFamily="34" charset="-122"/>
+                <a:cs typeface="Microsoft YaHei" pitchFamily="34" charset="-120"/>
+              </a:rPr>
+              <a:t>命中以下任一供应商级行为信号：</a:t>
+            </a:r>
+            <a:endParaRPr lang="en-US" sz="1100" dirty="0"/>
+          </a:p>
+        </p:txBody>
+      </p:sp>
+      <p:sp>
+        <p:nvSpPr>
+          <p:cNvPr id="20" name="Text 18"/>
+          <p:cNvSpPr/>
+          <p:nvPr/>
+        </p:nvSpPr>
+        <p:spPr>
+          <a:xfrm>
+            <a:off x="4722876" y="4023360"/>
+            <a:ext cx="2852928" cy="1463040"/>
+          </a:xfrm>
+          <a:prstGeom prst="rect">
+            <a:avLst/>
+          </a:prstGeom>
+          <a:noFill/>
+          <a:ln/>
+        </p:spPr>
+        <p:txBody>
+          <a:bodyPr wrap="square" rtlCol="0" anchor="ctr"/>
+          <a:lstStyle/>
+          <a:p>
+            <a:pPr marL="342900" indent="-342900">
+              <a:lnSpc>
+                <a:spcPct val="100000"/>
+              </a:lnSpc>
+              <a:spcAft>
+                <a:spcPts val="800"/>
+              </a:spcAft>
+              <a:buSzPct val="100000"/>
+              <a:buChar char="•"/>
+            </a:pPr>
+            <a:r>
+              <a:rPr lang="en-US" sz="1250" dirty="0">
+                <a:solidFill>
+                  <a:srgbClr val="17313F"/>
+                </a:solidFill>
+                <a:latin typeface="Microsoft YaHei" pitchFamily="34" charset="0"/>
+                <a:ea typeface="Microsoft YaHei" pitchFamily="34" charset="-122"/>
+                <a:cs typeface="Microsoft YaHei" pitchFamily="34" charset="-120"/>
+              </a:rPr>
+              <a:t>拆分付款（化整为零）</a:t>
+            </a:r>
+            <a:endParaRPr lang="en-US" sz="1250" dirty="0"/>
+          </a:p>
+          <a:p>
+            <a:pPr marL="342900" indent="-342900">
+              <a:lnSpc>
+                <a:spcPct val="100000"/>
+              </a:lnSpc>
+              <a:spcAft>
+                <a:spcPts val="800"/>
+              </a:spcAft>
+              <a:buSzPct val="100000"/>
+              <a:buChar char="•"/>
+            </a:pPr>
+            <a:r>
+              <a:rPr lang="en-US" sz="1250" dirty="0">
+                <a:solidFill>
+                  <a:srgbClr val="17313F"/>
+                </a:solidFill>
+                <a:latin typeface="Microsoft YaHei" pitchFamily="34" charset="0"/>
+                <a:ea typeface="Microsoft YaHei" pitchFamily="34" charset="-122"/>
+                <a:cs typeface="Microsoft YaHei" pitchFamily="34" charset="-120"/>
+              </a:rPr>
+              <a:t>付款突增（新供应商）</a:t>
+            </a:r>
+            <a:endParaRPr lang="en-US" sz="1250" dirty="0"/>
+          </a:p>
+          <a:p>
+            <a:pPr marL="342900" indent="-342900">
+              <a:lnSpc>
+                <a:spcPct val="100000"/>
+              </a:lnSpc>
+              <a:spcAft>
+                <a:spcPts val="800"/>
+              </a:spcAft>
+              <a:buSzPct val="100000"/>
+              <a:buChar char="•"/>
+            </a:pPr>
+            <a:r>
+              <a:rPr lang="en-US" sz="1250" dirty="0">
+                <a:solidFill>
+                  <a:srgbClr val="17313F"/>
+                </a:solidFill>
+                <a:latin typeface="Microsoft YaHei" pitchFamily="34" charset="0"/>
+                <a:ea typeface="Microsoft YaHei" pitchFamily="34" charset="-122"/>
+                <a:cs typeface="Microsoft YaHei" pitchFamily="34" charset="-120"/>
+              </a:rPr>
+              <a:t>高精度规则多次命中</a:t>
+            </a:r>
+            <a:endParaRPr lang="en-US" sz="1250" dirty="0"/>
+          </a:p>
+        </p:txBody>
+      </p:sp>
+      <p:sp>
+        <p:nvSpPr>
+          <p:cNvPr id="21" name="Shape 19"/>
+          <p:cNvSpPr/>
+          <p:nvPr/>
+        </p:nvSpPr>
+        <p:spPr>
+          <a:xfrm>
+            <a:off x="8129016" y="1828800"/>
+            <a:ext cx="3511296" cy="4160520"/>
           </a:xfrm>
           <a:prstGeom prst="roundRect">
             <a:avLst>
-              <a:gd name="adj" fmla="val 10909"/>
+              <a:gd name="adj" fmla="val 3646"/>
             </a:avLst>
           </a:prstGeom>
           <a:solidFill>
@@ -4036,22 +4428,22 @@
       </p:sp>
       <p:sp>
         <p:nvSpPr>
-          <p:cNvPr id="13" name="Text 11"/>
-          <p:cNvSpPr/>
-          <p:nvPr/>
-        </p:nvSpPr>
-        <p:spPr>
-          <a:xfrm>
-            <a:off x="6217920" y="3246120"/>
-            <a:ext cx="914400" cy="548640"/>
+          <p:cNvPr id="22" name="Text 20"/>
+          <p:cNvSpPr/>
+          <p:nvPr/>
+        </p:nvSpPr>
+        <p:spPr>
+          <a:xfrm>
+            <a:off x="8403336" y="2103120"/>
+            <a:ext cx="868680" cy="566928"/>
           </a:xfrm>
           <a:prstGeom prst="rect">
             <a:avLst>
-              <a:gd name="adj" fmla="val 13333"/>
+              <a:gd name="adj" fmla="val 12903"/>
             </a:avLst>
           </a:prstGeom>
           <a:solidFill>
-            <a:srgbClr val="C9861A"/>
+            <a:srgbClr val="5D8AA8"/>
           </a:solidFill>
           <a:ln/>
         </p:spPr>
@@ -4071,7 +4463,7 @@
                 <a:ea typeface="Microsoft YaHei" pitchFamily="34" charset="-122"/>
                 <a:cs typeface="Microsoft YaHei" pitchFamily="34" charset="-120"/>
               </a:rPr>
-              <a:t>T2</a:t>
+              <a:t>T3</a:t>
             </a:r>
             <a:endParaRPr lang="en-US" sz="2000" dirty="0"/>
           </a:p>
@@ -4079,14 +4471,14 @@
       </p:sp>
       <p:sp>
         <p:nvSpPr>
-          <p:cNvPr id="14" name="Text 12"/>
-          <p:cNvSpPr/>
-          <p:nvPr/>
-        </p:nvSpPr>
-        <p:spPr>
-          <a:xfrm>
-            <a:off x="7360920" y="3163824"/>
-            <a:ext cx="4114800" cy="384048"/>
+          <p:cNvPr id="23" name="Text 21"/>
+          <p:cNvSpPr/>
+          <p:nvPr/>
+        </p:nvSpPr>
+        <p:spPr>
+          <a:xfrm>
+            <a:off x="9409176" y="2103120"/>
+            <a:ext cx="2011680" cy="365760"/>
           </a:xfrm>
           <a:prstGeom prst="rect">
             <a:avLst/>
@@ -4102,7 +4494,7 @@
               <a:buNone/>
             </a:pPr>
             <a:r>
-              <a:rPr lang="en-US" sz="1500" b="1" dirty="0">
+              <a:rPr lang="en-US" sz="1700" b="1" dirty="0">
                 <a:solidFill>
                   <a:srgbClr val="17313F"/>
                 </a:solidFill>
@@ -4110,22 +4502,22 @@
                 <a:ea typeface="Microsoft YaHei" pitchFamily="34" charset="-122"/>
                 <a:cs typeface="Microsoft YaHei" pitchFamily="34" charset="-120"/>
               </a:rPr>
-              <a:t>仅命中供应商级信号</a:t>
-            </a:r>
-            <a:endParaRPr lang="en-US" sz="1500" dirty="0"/>
-          </a:p>
-        </p:txBody>
-      </p:sp>
-      <p:sp>
-        <p:nvSpPr>
-          <p:cNvPr id="15" name="Text 13"/>
-          <p:cNvSpPr/>
-          <p:nvPr/>
-        </p:nvSpPr>
-        <p:spPr>
-          <a:xfrm>
-            <a:off x="7360920" y="3547872"/>
-            <a:ext cx="4114800" cy="347472"/>
+              <a:t>评分</a:t>
+            </a:r>
+            <a:endParaRPr lang="en-US" sz="1700" dirty="0"/>
+          </a:p>
+        </p:txBody>
+      </p:sp>
+      <p:sp>
+        <p:nvSpPr>
+          <p:cNvPr id="24" name="Text 22"/>
+          <p:cNvSpPr/>
+          <p:nvPr/>
+        </p:nvSpPr>
+        <p:spPr>
+          <a:xfrm>
+            <a:off x="9409176" y="2487168"/>
+            <a:ext cx="2011680" cy="292608"/>
           </a:xfrm>
           <a:prstGeom prst="rect">
             <a:avLst/>
@@ -4141,7 +4533,7 @@
               <a:buNone/>
             </a:pPr>
             <a:r>
-              <a:rPr lang="en-US" sz="1200" dirty="0">
+              <a:rPr lang="en-US" sz="1100" dirty="0">
                 <a:solidFill>
                   <a:srgbClr val="71838F"/>
                 </a:solidFill>
@@ -4149,99 +4541,45 @@
                 <a:ea typeface="Microsoft YaHei" pitchFamily="34" charset="-122"/>
                 <a:cs typeface="Microsoft YaHei" pitchFamily="34" charset="-120"/>
               </a:rPr>
-              <a:t>告警 · 3 天内复核</a:t>
-            </a:r>
-            <a:endParaRPr lang="en-US" sz="1200" dirty="0"/>
-          </a:p>
-        </p:txBody>
-      </p:sp>
-      <p:sp>
-        <p:nvSpPr>
-          <p:cNvPr id="16" name="Shape 14"/>
-          <p:cNvSpPr/>
-          <p:nvPr/>
-        </p:nvSpPr>
-        <p:spPr>
-          <a:xfrm>
-            <a:off x="5989320" y="4206240"/>
-            <a:ext cx="5650992" cy="1005840"/>
-          </a:xfrm>
-          <a:prstGeom prst="roundRect">
-            <a:avLst>
-              <a:gd name="adj" fmla="val 10909"/>
-            </a:avLst>
-          </a:prstGeom>
-          <a:solidFill>
-            <a:srgbClr val="F4FAFB"/>
-          </a:solidFill>
+              <a:t>批量排序</a:t>
+            </a:r>
+            <a:endParaRPr lang="en-US" sz="1100" dirty="0"/>
+          </a:p>
+        </p:txBody>
+      </p:sp>
+      <p:sp>
+        <p:nvSpPr>
+          <p:cNvPr id="25" name="Shape 23"/>
+          <p:cNvSpPr/>
+          <p:nvPr/>
+        </p:nvSpPr>
+        <p:spPr>
+          <a:xfrm>
+            <a:off x="8403336" y="2880360"/>
+            <a:ext cx="2962656" cy="0"/>
+          </a:xfrm>
+          <a:prstGeom prst="line">
+            <a:avLst/>
+          </a:prstGeom>
+          <a:noFill/>
           <a:ln w="12700">
             <a:solidFill>
               <a:srgbClr val="DCE8EE"/>
             </a:solidFill>
             <a:prstDash val="solid"/>
           </a:ln>
-          <a:effectLst>
-            <a:outerShdw sx="100000" sy="100000" kx="0" ky="0" algn="bl" rotWithShape="0" blurRad="114300" dist="38100" dir="8100000">
-              <a:srgbClr val="0B1F2A">
-                <a:alpha val="16000"/>
-              </a:srgbClr>
-            </a:outerShdw>
-          </a:effectLst>
-        </p:spPr>
-      </p:sp>
-      <p:sp>
-        <p:nvSpPr>
-          <p:cNvPr id="17" name="Text 15"/>
-          <p:cNvSpPr/>
-          <p:nvPr/>
-        </p:nvSpPr>
-        <p:spPr>
-          <a:xfrm>
-            <a:off x="6217920" y="4434840"/>
-            <a:ext cx="914400" cy="548640"/>
-          </a:xfrm>
-          <a:prstGeom prst="rect">
-            <a:avLst>
-              <a:gd name="adj" fmla="val 13333"/>
-            </a:avLst>
-          </a:prstGeom>
-          <a:solidFill>
-            <a:srgbClr val="5D8AA8"/>
-          </a:solidFill>
-          <a:ln/>
-        </p:spPr>
-        <p:txBody>
-          <a:bodyPr wrap="square" rtlCol="0" anchor="ctr"/>
-          <a:lstStyle/>
-          <a:p>
-            <a:pPr algn="ctr" indent="0" marL="0">
-              <a:buNone/>
-            </a:pPr>
-            <a:r>
-              <a:rPr lang="en-US" sz="2000" b="1" dirty="0">
-                <a:solidFill>
-                  <a:srgbClr val="FFFFFF"/>
-                </a:solidFill>
-                <a:latin typeface="Microsoft YaHei" pitchFamily="34" charset="0"/>
-                <a:ea typeface="Microsoft YaHei" pitchFamily="34" charset="-122"/>
-                <a:cs typeface="Microsoft YaHei" pitchFamily="34" charset="-120"/>
-              </a:rPr>
-              <a:t>T3</a:t>
-            </a:r>
-            <a:endParaRPr lang="en-US" sz="2000" dirty="0"/>
-          </a:p>
-        </p:txBody>
-      </p:sp>
-      <p:sp>
-        <p:nvSpPr>
-          <p:cNvPr id="18" name="Text 16"/>
-          <p:cNvSpPr/>
-          <p:nvPr/>
-        </p:nvSpPr>
-        <p:spPr>
-          <a:xfrm>
-            <a:off x="7360920" y="4352544"/>
-            <a:ext cx="4114800" cy="384048"/>
+        </p:spPr>
+      </p:sp>
+      <p:sp>
+        <p:nvSpPr>
+          <p:cNvPr id="26" name="Text 24"/>
+          <p:cNvSpPr/>
+          <p:nvPr/>
+        </p:nvSpPr>
+        <p:spPr>
+          <a:xfrm>
+            <a:off x="8403336" y="2980944"/>
+            <a:ext cx="2962656" cy="548640"/>
           </a:xfrm>
           <a:prstGeom prst="rect">
             <a:avLst/>
@@ -4254,10 +4592,13 @@
           <a:lstStyle/>
           <a:p>
             <a:pPr indent="0" marL="0">
-              <a:buNone/>
-            </a:pPr>
-            <a:r>
-              <a:rPr lang="en-US" sz="1500" b="1" dirty="0">
+              <a:lnSpc>
+                <a:spcPct val="105000"/>
+              </a:lnSpc>
+              <a:buNone/>
+            </a:pPr>
+            <a:r>
+              <a:rPr lang="en-US" sz="1400" b="1" dirty="0">
                 <a:solidFill>
                   <a:srgbClr val="17313F"/>
                 </a:solidFill>
@@ -4267,20 +4608,20 @@
               </a:rPr>
               <a:t>高精度 / 行为均未命中</a:t>
             </a:r>
-            <a:endParaRPr lang="en-US" sz="1500" dirty="0"/>
-          </a:p>
-        </p:txBody>
-      </p:sp>
-      <p:sp>
-        <p:nvSpPr>
-          <p:cNvPr id="19" name="Text 17"/>
-          <p:cNvSpPr/>
-          <p:nvPr/>
-        </p:nvSpPr>
-        <p:spPr>
-          <a:xfrm>
-            <a:off x="7360920" y="4736592"/>
-            <a:ext cx="4114800" cy="347472"/>
+            <a:endParaRPr lang="en-US" sz="1400" dirty="0"/>
+          </a:p>
+        </p:txBody>
+      </p:sp>
+      <p:sp>
+        <p:nvSpPr>
+          <p:cNvPr id="27" name="Text 25"/>
+          <p:cNvSpPr/>
+          <p:nvPr/>
+        </p:nvSpPr>
+        <p:spPr>
+          <a:xfrm>
+            <a:off x="8403336" y="3611880"/>
+            <a:ext cx="2962656" cy="1828800"/>
           </a:xfrm>
           <a:prstGeom prst="rect">
             <a:avLst/>
@@ -4293,93 +4634,21 @@
           <a:lstStyle/>
           <a:p>
             <a:pPr indent="0" marL="0">
-              <a:buNone/>
-            </a:pPr>
-            <a:r>
-              <a:rPr lang="en-US" sz="1200" dirty="0">
-                <a:solidFill>
-                  <a:srgbClr val="71838F"/>
-                </a:solidFill>
-                <a:latin typeface="Microsoft YaHei" pitchFamily="34" charset="0"/>
-                <a:ea typeface="Microsoft YaHei" pitchFamily="34" charset="-122"/>
-                <a:cs typeface="Microsoft YaHei" pitchFamily="34" charset="-120"/>
-              </a:rPr>
-              <a:t>评分 · 批量排序（复用原有逻辑）</a:t>
-            </a:r>
-            <a:endParaRPr lang="en-US" sz="1200" dirty="0"/>
-          </a:p>
-        </p:txBody>
-      </p:sp>
-      <p:sp>
-        <p:nvSpPr>
-          <p:cNvPr id="20" name="Shape 18"/>
-          <p:cNvSpPr/>
-          <p:nvPr/>
-        </p:nvSpPr>
-        <p:spPr>
-          <a:xfrm>
-            <a:off x="548640" y="5532120"/>
-            <a:ext cx="11091672" cy="640080"/>
-          </a:xfrm>
-          <a:prstGeom prst="roundRect">
-            <a:avLst>
-              <a:gd name="adj" fmla="val 17143"/>
-            </a:avLst>
-          </a:prstGeom>
-          <a:solidFill>
-            <a:srgbClr val="102C3A"/>
-          </a:solidFill>
-          <a:ln/>
-        </p:spPr>
-      </p:sp>
-      <p:sp>
-        <p:nvSpPr>
-          <p:cNvPr id="21" name="Text 19"/>
-          <p:cNvSpPr/>
-          <p:nvPr/>
-        </p:nvSpPr>
-        <p:spPr>
-          <a:xfrm>
-            <a:off x="822960" y="5532120"/>
-            <a:ext cx="10607040" cy="640080"/>
-          </a:xfrm>
-          <a:prstGeom prst="rect">
-            <a:avLst/>
-          </a:prstGeom>
-          <a:noFill/>
-          <a:ln/>
-        </p:spPr>
-        <p:txBody>
-          <a:bodyPr wrap="square" rtlCol="0" anchor="ctr"/>
-          <a:lstStyle/>
-          <a:p>
-            <a:pPr indent="0" marL="0">
-              <a:buNone/>
-            </a:pPr>
-            <a:r>
-              <a:rPr lang="en-US" sz="1250" b="1" dirty="0">
-                <a:solidFill>
-                  <a:srgbClr val="37B7AD"/>
-                </a:solidFill>
-                <a:latin typeface="Microsoft YaHei" pitchFamily="34" charset="0"/>
-                <a:ea typeface="Microsoft YaHei" pitchFamily="34" charset="-122"/>
-                <a:cs typeface="Microsoft YaHei" pitchFamily="34" charset="-120"/>
-              </a:rPr>
-              <a:t>为何如此从严：</a:t>
-            </a:r>
-            <a:pPr indent="0" marL="0">
+              <a:lnSpc>
+                <a:spcPct val="130000"/>
+              </a:lnSpc>
               <a:buNone/>
             </a:pPr>
             <a:r>
               <a:rPr lang="en-US" sz="1250" dirty="0">
                 <a:solidFill>
-                  <a:srgbClr val="DDEBEF"/>
-                </a:solidFill>
-                <a:latin typeface="Microsoft YaHei" pitchFamily="34" charset="0"/>
-                <a:ea typeface="Microsoft YaHei" pitchFamily="34" charset="-122"/>
-                <a:cs typeface="Microsoft YaHei" pitchFamily="34" charset="-120"/>
-              </a:rPr>
-              <a:t>这四条是准确率 100% 的确定性校验，单条命中即高置信 → 直接 T1。仅命中供应商级行为信号（拆分 / 突增 / 多次命中）→ T2。</a:t>
+                  <a:srgbClr val="17313F"/>
+                </a:solidFill>
+                <a:latin typeface="Microsoft YaHei" pitchFamily="34" charset="0"/>
+                <a:ea typeface="Microsoft YaHei" pitchFamily="34" charset="-122"/>
+                <a:cs typeface="Microsoft YaHei" pitchFamily="34" charset="-120"/>
+              </a:rPr>
+              <a:t>回落到原有加权评分（供应商分 / 付款分 / 合理性），批量排序后取 Top K 复核。</a:t>
             </a:r>
             <a:endParaRPr lang="en-US" sz="1250" dirty="0"/>
           </a:p>
@@ -4387,7 +4656,7 @@
       </p:sp>
       <p:sp>
         <p:nvSpPr>
-          <p:cNvPr id="22" name="Text 20"/>
+          <p:cNvPr id="28" name="Text 26"/>
           <p:cNvSpPr/>
           <p:nvPr/>
         </p:nvSpPr>
@@ -4426,7 +4695,7 @@
       </p:sp>
       <p:sp>
         <p:nvSpPr>
-          <p:cNvPr id="23" name="Text 21"/>
+          <p:cNvPr id="29" name="Text 27"/>
           <p:cNvSpPr/>
           <p:nvPr/>
         </p:nvSpPr>
